--- a/dr/presentation.pptx
+++ b/dr/presentation.pptx
@@ -116,6 +116,11 @@
       </a:defRPr>
     </a:lvl9pPr>
   </p:defaultTextStyle>
+  <p:extLst>
+    <p:ext uri="{EFAFB233-063F-42B5-8137-9DF3F51BA10A}">
+      <p15:sldGuideLst xmlns:p15="http://schemas.microsoft.com/office/powerpoint/2012/main"/>
+    </p:ext>
+  </p:extLst>
 </p:presentation>
 </file>
 
@@ -213,7 +218,7 @@
           <a:p>
             <a:fld id="{EA7AC966-8BEE-4CAC-9D5B-6621CFB65C26}" type="datetimeFigureOut">
               <a:rPr lang="bg-BG" smtClean="0"/>
-              <a:t>13.5.2025 г.</a:t>
+              <a:t>14.5.2025 г.</a:t>
             </a:fld>
             <a:endParaRPr lang="bg-BG"/>
           </a:p>
@@ -525,7 +530,662 @@
           <a:bodyPr/>
           <a:lstStyle/>
           <a:p>
+            <a:pPr marL="0" marR="0" lvl="0" indent="0" algn="l" defTabSz="914400" rtl="0" eaLnBrk="1" fontAlgn="auto" latinLnBrk="0" hangingPunct="1">
+              <a:lnSpc>
+                <a:spcPct val="100000"/>
+              </a:lnSpc>
+              <a:spcBef>
+                <a:spcPts val="0"/>
+              </a:spcBef>
+              <a:spcAft>
+                <a:spcPts val="0"/>
+              </a:spcAft>
+              <a:buClrTx/>
+              <a:buSzTx/>
+              <a:buFontTx/>
+              <a:buNone/>
+              <a:tabLst/>
+              <a:defRPr/>
+            </a:pPr>
+            <a:r>
+              <a:rPr lang="bg-BG" dirty="0" smtClean="0"/>
+              <a:t>Проектът цели изграждането на надеждна сървърна среда за деплой на уеб приложение. Основната мотивация е необходимостта от практическо овладяване на съвременни технологии и методи, които да осигурят стабилност, сигурност и лесна поддръжка при работа с уеб приложения и техните сървъри.</a:t>
+            </a:r>
+            <a:br>
+              <a:rPr lang="bg-BG" dirty="0" smtClean="0"/>
+            </a:br>
+            <a:endParaRPr lang="bg-BG" dirty="0" smtClean="0"/>
+          </a:p>
+          <a:p>
+            <a:endParaRPr lang="bg-BG" dirty="0"/>
+          </a:p>
+        </p:txBody>
+      </p:sp>
+      <p:sp>
+        <p:nvSpPr>
+          <p:cNvPr id="4" name="Slide Number Placeholder 3"/>
+          <p:cNvSpPr>
+            <a:spLocks noGrp="1"/>
+          </p:cNvSpPr>
+          <p:nvPr>
+            <p:ph type="sldNum" sz="quarter" idx="10"/>
+          </p:nvPr>
+        </p:nvSpPr>
+        <p:spPr/>
+        <p:txBody>
+          <a:bodyPr/>
+          <a:lstStyle/>
+          <a:p>
+            <a:fld id="{F63C9E35-DB9A-436C-8DE0-D3E82DBFC18A}" type="slidenum">
+              <a:rPr lang="bg-BG" smtClean="0"/>
+              <a:t>2</a:t>
+            </a:fld>
             <a:endParaRPr lang="bg-BG"/>
+          </a:p>
+        </p:txBody>
+      </p:sp>
+    </p:spTree>
+    <p:extLst>
+      <p:ext uri="{BB962C8B-B14F-4D97-AF65-F5344CB8AC3E}">
+        <p14:creationId xmlns:p14="http://schemas.microsoft.com/office/powerpoint/2010/main" val="3492968734"/>
+      </p:ext>
+    </p:extLst>
+  </p:cSld>
+  <p:clrMapOvr>
+    <a:masterClrMapping/>
+  </p:clrMapOvr>
+</p:notes>
+</file>
+
+<file path=ppt/notesSlides/notesSlide2.xml><?xml version="1.0" encoding="utf-8"?>
+<p:notes xmlns:a="http://schemas.openxmlformats.org/drawingml/2006/main" xmlns:r="http://schemas.openxmlformats.org/officeDocument/2006/relationships" xmlns:p="http://schemas.openxmlformats.org/presentationml/2006/main">
+  <p:cSld>
+    <p:spTree>
+      <p:nvGrpSpPr>
+        <p:cNvPr id="1" name=""/>
+        <p:cNvGrpSpPr/>
+        <p:nvPr/>
+      </p:nvGrpSpPr>
+      <p:grpSpPr>
+        <a:xfrm>
+          <a:off x="0" y="0"/>
+          <a:ext cx="0" cy="0"/>
+          <a:chOff x="0" y="0"/>
+          <a:chExt cx="0" cy="0"/>
+        </a:xfrm>
+      </p:grpSpPr>
+      <p:sp>
+        <p:nvSpPr>
+          <p:cNvPr id="2" name="Slide Image Placeholder 1"/>
+          <p:cNvSpPr>
+            <a:spLocks noGrp="1" noRot="1" noChangeAspect="1"/>
+          </p:cNvSpPr>
+          <p:nvPr>
+            <p:ph type="sldImg"/>
+          </p:nvPr>
+        </p:nvSpPr>
+        <p:spPr/>
+      </p:sp>
+      <p:sp>
+        <p:nvSpPr>
+          <p:cNvPr id="3" name="Notes Placeholder 2"/>
+          <p:cNvSpPr>
+            <a:spLocks noGrp="1"/>
+          </p:cNvSpPr>
+          <p:nvPr>
+            <p:ph type="body" idx="1"/>
+          </p:nvPr>
+        </p:nvSpPr>
+        <p:spPr/>
+        <p:txBody>
+          <a:bodyPr/>
+          <a:lstStyle/>
+          <a:p>
+            <a:pPr marL="0" marR="0" lvl="0" indent="0" algn="l" defTabSz="914400" rtl="0" eaLnBrk="1" fontAlgn="auto" latinLnBrk="0" hangingPunct="1">
+              <a:lnSpc>
+                <a:spcPct val="100000"/>
+              </a:lnSpc>
+              <a:spcBef>
+                <a:spcPts val="0"/>
+              </a:spcBef>
+              <a:spcAft>
+                <a:spcPts val="0"/>
+              </a:spcAft>
+              <a:buClrTx/>
+              <a:buSzTx/>
+              <a:buFontTx/>
+              <a:buNone/>
+              <a:tabLst/>
+              <a:defRPr/>
+            </a:pPr>
+            <a:r>
+              <a:rPr lang="bg-BG" dirty="0" smtClean="0"/>
+              <a:t>Във встъпителната теория се разглежда развитието на интернет и уеб технологиите — от първите уеб сървъри и статични страници до съвременните динамични уеб приложения. Тук се подчертава ролята на операционните системи и софтуерните решения с отворен код, които помагат за тяхното усъвършенстване и масово приложение.</a:t>
+            </a:r>
+          </a:p>
+          <a:p>
+            <a:endParaRPr lang="bg-BG" dirty="0"/>
+          </a:p>
+        </p:txBody>
+      </p:sp>
+      <p:sp>
+        <p:nvSpPr>
+          <p:cNvPr id="4" name="Slide Number Placeholder 3"/>
+          <p:cNvSpPr>
+            <a:spLocks noGrp="1"/>
+          </p:cNvSpPr>
+          <p:nvPr>
+            <p:ph type="sldNum" sz="quarter" idx="10"/>
+          </p:nvPr>
+        </p:nvSpPr>
+        <p:spPr/>
+        <p:txBody>
+          <a:bodyPr/>
+          <a:lstStyle/>
+          <a:p>
+            <a:fld id="{F63C9E35-DB9A-436C-8DE0-D3E82DBFC18A}" type="slidenum">
+              <a:rPr lang="bg-BG" smtClean="0"/>
+              <a:t>3</a:t>
+            </a:fld>
+            <a:endParaRPr lang="bg-BG"/>
+          </a:p>
+        </p:txBody>
+      </p:sp>
+    </p:spTree>
+    <p:extLst>
+      <p:ext uri="{BB962C8B-B14F-4D97-AF65-F5344CB8AC3E}">
+        <p14:creationId xmlns:p14="http://schemas.microsoft.com/office/powerpoint/2010/main" val="3041346817"/>
+      </p:ext>
+    </p:extLst>
+  </p:cSld>
+  <p:clrMapOvr>
+    <a:masterClrMapping/>
+  </p:clrMapOvr>
+</p:notes>
+</file>
+
+<file path=ppt/notesSlides/notesSlide3.xml><?xml version="1.0" encoding="utf-8"?>
+<p:notes xmlns:a="http://schemas.openxmlformats.org/drawingml/2006/main" xmlns:r="http://schemas.openxmlformats.org/officeDocument/2006/relationships" xmlns:p="http://schemas.openxmlformats.org/presentationml/2006/main">
+  <p:cSld>
+    <p:spTree>
+      <p:nvGrpSpPr>
+        <p:cNvPr id="1" name=""/>
+        <p:cNvGrpSpPr/>
+        <p:nvPr/>
+      </p:nvGrpSpPr>
+      <p:grpSpPr>
+        <a:xfrm>
+          <a:off x="0" y="0"/>
+          <a:ext cx="0" cy="0"/>
+          <a:chOff x="0" y="0"/>
+          <a:chExt cx="0" cy="0"/>
+        </a:xfrm>
+      </p:grpSpPr>
+      <p:sp>
+        <p:nvSpPr>
+          <p:cNvPr id="2" name="Slide Image Placeholder 1"/>
+          <p:cNvSpPr>
+            <a:spLocks noGrp="1" noRot="1" noChangeAspect="1"/>
+          </p:cNvSpPr>
+          <p:nvPr>
+            <p:ph type="sldImg"/>
+          </p:nvPr>
+        </p:nvSpPr>
+        <p:spPr/>
+      </p:sp>
+      <p:sp>
+        <p:nvSpPr>
+          <p:cNvPr id="3" name="Notes Placeholder 2"/>
+          <p:cNvSpPr>
+            <a:spLocks noGrp="1"/>
+          </p:cNvSpPr>
+          <p:nvPr>
+            <p:ph type="body" idx="1"/>
+          </p:nvPr>
+        </p:nvSpPr>
+        <p:spPr/>
+        <p:txBody>
+          <a:bodyPr/>
+          <a:lstStyle/>
+          <a:p>
+            <a:pPr marL="0" marR="0" lvl="0" indent="0" algn="l" defTabSz="914400" rtl="0" eaLnBrk="1" fontAlgn="auto" latinLnBrk="0" hangingPunct="1">
+              <a:lnSpc>
+                <a:spcPct val="100000"/>
+              </a:lnSpc>
+              <a:spcBef>
+                <a:spcPts val="0"/>
+              </a:spcBef>
+              <a:spcAft>
+                <a:spcPts val="0"/>
+              </a:spcAft>
+              <a:buClrTx/>
+              <a:buSzTx/>
+              <a:buFontTx/>
+              <a:buNone/>
+              <a:tabLst/>
+              <a:defRPr/>
+            </a:pPr>
+            <a:r>
+              <a:rPr lang="bg-BG" dirty="0" smtClean="0"/>
+              <a:t>Ubuntu Server е избран поради своята стабилност, лесна интеграция, добра документация и широка общност. Тази ОС осигурява визия за надеждна и поддържана сървърна платформа, върху която могат да се изпълняват уеб сървъри и бази данни, оптимизирана е за работа през команден ред и поддържа автентичност и сигурност.</a:t>
+            </a:r>
+          </a:p>
+          <a:p>
+            <a:endParaRPr lang="bg-BG" dirty="0"/>
+          </a:p>
+        </p:txBody>
+      </p:sp>
+      <p:sp>
+        <p:nvSpPr>
+          <p:cNvPr id="4" name="Slide Number Placeholder 3"/>
+          <p:cNvSpPr>
+            <a:spLocks noGrp="1"/>
+          </p:cNvSpPr>
+          <p:nvPr>
+            <p:ph type="sldNum" sz="quarter" idx="10"/>
+          </p:nvPr>
+        </p:nvSpPr>
+        <p:spPr/>
+        <p:txBody>
+          <a:bodyPr/>
+          <a:lstStyle/>
+          <a:p>
+            <a:fld id="{F63C9E35-DB9A-436C-8DE0-D3E82DBFC18A}" type="slidenum">
+              <a:rPr lang="bg-BG" smtClean="0"/>
+              <a:t>4</a:t>
+            </a:fld>
+            <a:endParaRPr lang="bg-BG"/>
+          </a:p>
+        </p:txBody>
+      </p:sp>
+    </p:spTree>
+    <p:extLst>
+      <p:ext uri="{BB962C8B-B14F-4D97-AF65-F5344CB8AC3E}">
+        <p14:creationId xmlns:p14="http://schemas.microsoft.com/office/powerpoint/2010/main" val="2976836851"/>
+      </p:ext>
+    </p:extLst>
+  </p:cSld>
+  <p:clrMapOvr>
+    <a:masterClrMapping/>
+  </p:clrMapOvr>
+</p:notes>
+</file>
+
+<file path=ppt/notesSlides/notesSlide4.xml><?xml version="1.0" encoding="utf-8"?>
+<p:notes xmlns:a="http://schemas.openxmlformats.org/drawingml/2006/main" xmlns:r="http://schemas.openxmlformats.org/officeDocument/2006/relationships" xmlns:p="http://schemas.openxmlformats.org/presentationml/2006/main">
+  <p:cSld>
+    <p:spTree>
+      <p:nvGrpSpPr>
+        <p:cNvPr id="1" name=""/>
+        <p:cNvGrpSpPr/>
+        <p:nvPr/>
+      </p:nvGrpSpPr>
+      <p:grpSpPr>
+        <a:xfrm>
+          <a:off x="0" y="0"/>
+          <a:ext cx="0" cy="0"/>
+          <a:chOff x="0" y="0"/>
+          <a:chExt cx="0" cy="0"/>
+        </a:xfrm>
+      </p:grpSpPr>
+      <p:sp>
+        <p:nvSpPr>
+          <p:cNvPr id="2" name="Slide Image Placeholder 1"/>
+          <p:cNvSpPr>
+            <a:spLocks noGrp="1" noRot="1" noChangeAspect="1"/>
+          </p:cNvSpPr>
+          <p:nvPr>
+            <p:ph type="sldImg"/>
+          </p:nvPr>
+        </p:nvSpPr>
+        <p:spPr/>
+      </p:sp>
+      <p:sp>
+        <p:nvSpPr>
+          <p:cNvPr id="3" name="Notes Placeholder 2"/>
+          <p:cNvSpPr>
+            <a:spLocks noGrp="1"/>
+          </p:cNvSpPr>
+          <p:nvPr>
+            <p:ph type="body" idx="1"/>
+          </p:nvPr>
+        </p:nvSpPr>
+        <p:spPr/>
+        <p:txBody>
+          <a:bodyPr/>
+          <a:lstStyle/>
+          <a:p>
+            <a:r>
+              <a:rPr lang="bg-BG" sz="1200" dirty="0" smtClean="0"/>
+              <a:t>Nginx играе ролята на обратен прокси и уеб сървър, който обслужва заявки ефективно и с минимално натоварване на сървъра. Gunicorn е WSGI сървър, който осигурява интерфейс между Python уеб приложението (Django) и уеб сървъра. Този двоен модел подобрява производителността, позволява асинхронна обработка и гъвкавост при настройките за натоварване.</a:t>
+            </a:r>
+          </a:p>
+          <a:p>
+            <a:endParaRPr lang="bg-BG" sz="1200" dirty="0" smtClean="0"/>
+          </a:p>
+          <a:p>
+            <a:endParaRPr lang="bg-BG" dirty="0"/>
+          </a:p>
+        </p:txBody>
+      </p:sp>
+      <p:sp>
+        <p:nvSpPr>
+          <p:cNvPr id="4" name="Slide Number Placeholder 3"/>
+          <p:cNvSpPr>
+            <a:spLocks noGrp="1"/>
+          </p:cNvSpPr>
+          <p:nvPr>
+            <p:ph type="sldNum" sz="quarter" idx="10"/>
+          </p:nvPr>
+        </p:nvSpPr>
+        <p:spPr/>
+        <p:txBody>
+          <a:bodyPr/>
+          <a:lstStyle/>
+          <a:p>
+            <a:fld id="{F63C9E35-DB9A-436C-8DE0-D3E82DBFC18A}" type="slidenum">
+              <a:rPr lang="bg-BG" smtClean="0"/>
+              <a:t>5</a:t>
+            </a:fld>
+            <a:endParaRPr lang="bg-BG"/>
+          </a:p>
+        </p:txBody>
+      </p:sp>
+    </p:spTree>
+    <p:extLst>
+      <p:ext uri="{BB962C8B-B14F-4D97-AF65-F5344CB8AC3E}">
+        <p14:creationId xmlns:p14="http://schemas.microsoft.com/office/powerpoint/2010/main" val="2653242900"/>
+      </p:ext>
+    </p:extLst>
+  </p:cSld>
+  <p:clrMapOvr>
+    <a:masterClrMapping/>
+  </p:clrMapOvr>
+</p:notes>
+</file>
+
+<file path=ppt/notesSlides/notesSlide5.xml><?xml version="1.0" encoding="utf-8"?>
+<p:notes xmlns:a="http://schemas.openxmlformats.org/drawingml/2006/main" xmlns:r="http://schemas.openxmlformats.org/officeDocument/2006/relationships" xmlns:p="http://schemas.openxmlformats.org/presentationml/2006/main">
+  <p:cSld>
+    <p:spTree>
+      <p:nvGrpSpPr>
+        <p:cNvPr id="1" name=""/>
+        <p:cNvGrpSpPr/>
+        <p:nvPr/>
+      </p:nvGrpSpPr>
+      <p:grpSpPr>
+        <a:xfrm>
+          <a:off x="0" y="0"/>
+          <a:ext cx="0" cy="0"/>
+          <a:chOff x="0" y="0"/>
+          <a:chExt cx="0" cy="0"/>
+        </a:xfrm>
+      </p:grpSpPr>
+      <p:sp>
+        <p:nvSpPr>
+          <p:cNvPr id="2" name="Slide Image Placeholder 1"/>
+          <p:cNvSpPr>
+            <a:spLocks noGrp="1" noRot="1" noChangeAspect="1"/>
+          </p:cNvSpPr>
+          <p:nvPr>
+            <p:ph type="sldImg"/>
+          </p:nvPr>
+        </p:nvSpPr>
+        <p:spPr/>
+      </p:sp>
+      <p:sp>
+        <p:nvSpPr>
+          <p:cNvPr id="3" name="Notes Placeholder 2"/>
+          <p:cNvSpPr>
+            <a:spLocks noGrp="1"/>
+          </p:cNvSpPr>
+          <p:nvPr>
+            <p:ph type="body" idx="1"/>
+          </p:nvPr>
+        </p:nvSpPr>
+        <p:spPr/>
+        <p:txBody>
+          <a:bodyPr/>
+          <a:lstStyle/>
+          <a:p>
+            <a:pPr marL="0" marR="0" lvl="0" indent="0" algn="l" defTabSz="914400" rtl="0" eaLnBrk="1" fontAlgn="auto" latinLnBrk="0" hangingPunct="1">
+              <a:lnSpc>
+                <a:spcPct val="100000"/>
+              </a:lnSpc>
+              <a:spcBef>
+                <a:spcPts val="0"/>
+              </a:spcBef>
+              <a:spcAft>
+                <a:spcPts val="0"/>
+              </a:spcAft>
+              <a:buClrTx/>
+              <a:buSzTx/>
+              <a:buFontTx/>
+              <a:buNone/>
+              <a:tabLst/>
+              <a:defRPr/>
+            </a:pPr>
+            <a:r>
+              <a:rPr lang="bg-BG" dirty="0" smtClean="0"/>
+              <a:t>Python е избран като език със своята ясна синтактична структура и мощни библиотеки. Django е рамка, поддържаща MVC архитектура, която осигурява отделяне на логиката, дизайна и данните. Това прави приложението по-лесно за разработка, поддръжка и разширяване, като същевременно осигурява набор от вградени функционалности като аутентификация, админ панел и ORM.</a:t>
+            </a:r>
+          </a:p>
+          <a:p>
+            <a:endParaRPr lang="bg-BG" dirty="0"/>
+          </a:p>
+        </p:txBody>
+      </p:sp>
+      <p:sp>
+        <p:nvSpPr>
+          <p:cNvPr id="4" name="Slide Number Placeholder 3"/>
+          <p:cNvSpPr>
+            <a:spLocks noGrp="1"/>
+          </p:cNvSpPr>
+          <p:nvPr>
+            <p:ph type="sldNum" sz="quarter" idx="10"/>
+          </p:nvPr>
+        </p:nvSpPr>
+        <p:spPr/>
+        <p:txBody>
+          <a:bodyPr/>
+          <a:lstStyle/>
+          <a:p>
+            <a:fld id="{F63C9E35-DB9A-436C-8DE0-D3E82DBFC18A}" type="slidenum">
+              <a:rPr lang="bg-BG" smtClean="0"/>
+              <a:t>6</a:t>
+            </a:fld>
+            <a:endParaRPr lang="bg-BG"/>
+          </a:p>
+        </p:txBody>
+      </p:sp>
+    </p:spTree>
+    <p:extLst>
+      <p:ext uri="{BB962C8B-B14F-4D97-AF65-F5344CB8AC3E}">
+        <p14:creationId xmlns:p14="http://schemas.microsoft.com/office/powerpoint/2010/main" val="1568159448"/>
+      </p:ext>
+    </p:extLst>
+  </p:cSld>
+  <p:clrMapOvr>
+    <a:masterClrMapping/>
+  </p:clrMapOvr>
+</p:notes>
+</file>
+
+<file path=ppt/notesSlides/notesSlide6.xml><?xml version="1.0" encoding="utf-8"?>
+<p:notes xmlns:a="http://schemas.openxmlformats.org/drawingml/2006/main" xmlns:r="http://schemas.openxmlformats.org/officeDocument/2006/relationships" xmlns:p="http://schemas.openxmlformats.org/presentationml/2006/main">
+  <p:cSld>
+    <p:spTree>
+      <p:nvGrpSpPr>
+        <p:cNvPr id="1" name=""/>
+        <p:cNvGrpSpPr/>
+        <p:nvPr/>
+      </p:nvGrpSpPr>
+      <p:grpSpPr>
+        <a:xfrm>
+          <a:off x="0" y="0"/>
+          <a:ext cx="0" cy="0"/>
+          <a:chOff x="0" y="0"/>
+          <a:chExt cx="0" cy="0"/>
+        </a:xfrm>
+      </p:grpSpPr>
+      <p:sp>
+        <p:nvSpPr>
+          <p:cNvPr id="2" name="Slide Image Placeholder 1"/>
+          <p:cNvSpPr>
+            <a:spLocks noGrp="1" noRot="1" noChangeAspect="1"/>
+          </p:cNvSpPr>
+          <p:nvPr>
+            <p:ph type="sldImg"/>
+          </p:nvPr>
+        </p:nvSpPr>
+        <p:spPr/>
+      </p:sp>
+      <p:sp>
+        <p:nvSpPr>
+          <p:cNvPr id="3" name="Notes Placeholder 2"/>
+          <p:cNvSpPr>
+            <a:spLocks noGrp="1"/>
+          </p:cNvSpPr>
+          <p:nvPr>
+            <p:ph type="body" idx="1"/>
+          </p:nvPr>
+        </p:nvSpPr>
+        <p:spPr/>
+        <p:txBody>
+          <a:bodyPr/>
+          <a:lstStyle/>
+          <a:p>
+            <a:pPr marL="0" marR="0" lvl="0" indent="0" algn="l" defTabSz="914400" rtl="0" eaLnBrk="1" fontAlgn="auto" latinLnBrk="0" hangingPunct="1">
+              <a:lnSpc>
+                <a:spcPct val="100000"/>
+              </a:lnSpc>
+              <a:spcBef>
+                <a:spcPts val="0"/>
+              </a:spcBef>
+              <a:spcAft>
+                <a:spcPts val="0"/>
+              </a:spcAft>
+              <a:buClrTx/>
+              <a:buSzTx/>
+              <a:buFontTx/>
+              <a:buNone/>
+              <a:tabLst/>
+              <a:defRPr/>
+            </a:pPr>
+            <a:r>
+              <a:rPr lang="bg-BG" dirty="0" smtClean="0"/>
+              <a:t>MySQL предоставя структурирана и надеждна база за съхранение и извличане на данни, необходима за функционирането на приложението. PhpMyAdmin е графичен уеб интерфейс, който улеснява администрирането на базата данни, позволява лесно управление на таблици, потребители и резервни копия, което е важно за практическото управление на сървърната среда.</a:t>
+            </a:r>
+          </a:p>
+          <a:p>
+            <a:endParaRPr lang="bg-BG" dirty="0"/>
+          </a:p>
+        </p:txBody>
+      </p:sp>
+      <p:sp>
+        <p:nvSpPr>
+          <p:cNvPr id="4" name="Slide Number Placeholder 3"/>
+          <p:cNvSpPr>
+            <a:spLocks noGrp="1"/>
+          </p:cNvSpPr>
+          <p:nvPr>
+            <p:ph type="sldNum" sz="quarter" idx="10"/>
+          </p:nvPr>
+        </p:nvSpPr>
+        <p:spPr/>
+        <p:txBody>
+          <a:bodyPr/>
+          <a:lstStyle/>
+          <a:p>
+            <a:fld id="{F63C9E35-DB9A-436C-8DE0-D3E82DBFC18A}" type="slidenum">
+              <a:rPr lang="bg-BG" smtClean="0"/>
+              <a:t>7</a:t>
+            </a:fld>
+            <a:endParaRPr lang="bg-BG"/>
+          </a:p>
+        </p:txBody>
+      </p:sp>
+    </p:spTree>
+    <p:extLst>
+      <p:ext uri="{BB962C8B-B14F-4D97-AF65-F5344CB8AC3E}">
+        <p14:creationId xmlns:p14="http://schemas.microsoft.com/office/powerpoint/2010/main" val="1236019857"/>
+      </p:ext>
+    </p:extLst>
+  </p:cSld>
+  <p:clrMapOvr>
+    <a:masterClrMapping/>
+  </p:clrMapOvr>
+</p:notes>
+</file>
+
+<file path=ppt/notesSlides/notesSlide7.xml><?xml version="1.0" encoding="utf-8"?>
+<p:notes xmlns:a="http://schemas.openxmlformats.org/drawingml/2006/main" xmlns:r="http://schemas.openxmlformats.org/officeDocument/2006/relationships" xmlns:p="http://schemas.openxmlformats.org/presentationml/2006/main">
+  <p:cSld>
+    <p:spTree>
+      <p:nvGrpSpPr>
+        <p:cNvPr id="1" name=""/>
+        <p:cNvGrpSpPr/>
+        <p:nvPr/>
+      </p:nvGrpSpPr>
+      <p:grpSpPr>
+        <a:xfrm>
+          <a:off x="0" y="0"/>
+          <a:ext cx="0" cy="0"/>
+          <a:chOff x="0" y="0"/>
+          <a:chExt cx="0" cy="0"/>
+        </a:xfrm>
+      </p:grpSpPr>
+      <p:sp>
+        <p:nvSpPr>
+          <p:cNvPr id="2" name="Slide Image Placeholder 1"/>
+          <p:cNvSpPr>
+            <a:spLocks noGrp="1" noRot="1" noChangeAspect="1"/>
+          </p:cNvSpPr>
+          <p:nvPr>
+            <p:ph type="sldImg"/>
+          </p:nvPr>
+        </p:nvSpPr>
+        <p:spPr/>
+      </p:sp>
+      <p:sp>
+        <p:nvSpPr>
+          <p:cNvPr id="3" name="Notes Placeholder 2"/>
+          <p:cNvSpPr>
+            <a:spLocks noGrp="1"/>
+          </p:cNvSpPr>
+          <p:nvPr>
+            <p:ph type="body" idx="1"/>
+          </p:nvPr>
+        </p:nvSpPr>
+        <p:spPr/>
+        <p:txBody>
+          <a:bodyPr/>
+          <a:lstStyle/>
+          <a:p>
+            <a:pPr marL="0" marR="0" lvl="0" indent="0" algn="l" defTabSz="914400" rtl="0" eaLnBrk="1" fontAlgn="auto" latinLnBrk="0" hangingPunct="1">
+              <a:lnSpc>
+                <a:spcPct val="100000"/>
+              </a:lnSpc>
+              <a:spcBef>
+                <a:spcPts val="0"/>
+              </a:spcBef>
+              <a:spcAft>
+                <a:spcPts val="0"/>
+              </a:spcAft>
+              <a:buClrTx/>
+              <a:buSzTx/>
+              <a:buFontTx/>
+              <a:buNone/>
+              <a:tabLst/>
+              <a:defRPr/>
+            </a:pPr>
+            <a:r>
+              <a:rPr lang="bg-BG" dirty="0" smtClean="0"/>
+              <a:t>Подробно се описва процесът от инсталиране на Ubuntu Server, през настройка на Nginx като прокси сървър, инсталиране и конфигуриране на Gunicorn за стартиране на Django приложението, до създаване на базата данни и настройка на phpMyAdmin. Също така е разгледано създаването на виртуална Python среда и прехвърлянето на проектните файлове чрез FTP, като се обръща внимание на правилното конфигуриране на права и сигурност.</a:t>
+            </a:r>
+          </a:p>
+          <a:p>
+            <a:endParaRPr lang="bg-BG" dirty="0"/>
           </a:p>
         </p:txBody>
       </p:sp>
@@ -556,6 +1216,113 @@
     <p:extLst>
       <p:ext uri="{BB962C8B-B14F-4D97-AF65-F5344CB8AC3E}">
         <p14:creationId xmlns:p14="http://schemas.microsoft.com/office/powerpoint/2010/main" val="1255949792"/>
+      </p:ext>
+    </p:extLst>
+  </p:cSld>
+  <p:clrMapOvr>
+    <a:masterClrMapping/>
+  </p:clrMapOvr>
+</p:notes>
+</file>
+
+<file path=ppt/notesSlides/notesSlide8.xml><?xml version="1.0" encoding="utf-8"?>
+<p:notes xmlns:a="http://schemas.openxmlformats.org/drawingml/2006/main" xmlns:r="http://schemas.openxmlformats.org/officeDocument/2006/relationships" xmlns:p="http://schemas.openxmlformats.org/presentationml/2006/main">
+  <p:cSld>
+    <p:spTree>
+      <p:nvGrpSpPr>
+        <p:cNvPr id="1" name=""/>
+        <p:cNvGrpSpPr/>
+        <p:nvPr/>
+      </p:nvGrpSpPr>
+      <p:grpSpPr>
+        <a:xfrm>
+          <a:off x="0" y="0"/>
+          <a:ext cx="0" cy="0"/>
+          <a:chOff x="0" y="0"/>
+          <a:chExt cx="0" cy="0"/>
+        </a:xfrm>
+      </p:grpSpPr>
+      <p:sp>
+        <p:nvSpPr>
+          <p:cNvPr id="2" name="Slide Image Placeholder 1"/>
+          <p:cNvSpPr>
+            <a:spLocks noGrp="1" noRot="1" noChangeAspect="1"/>
+          </p:cNvSpPr>
+          <p:nvPr>
+            <p:ph type="sldImg"/>
+          </p:nvPr>
+        </p:nvSpPr>
+        <p:spPr/>
+      </p:sp>
+      <p:sp>
+        <p:nvSpPr>
+          <p:cNvPr id="3" name="Notes Placeholder 2"/>
+          <p:cNvSpPr>
+            <a:spLocks noGrp="1"/>
+          </p:cNvSpPr>
+          <p:nvPr>
+            <p:ph type="body" idx="1"/>
+          </p:nvPr>
+        </p:nvSpPr>
+        <p:spPr/>
+        <p:txBody>
+          <a:bodyPr/>
+          <a:lstStyle/>
+          <a:p>
+            <a:pPr marL="0" marR="0" lvl="0" indent="0" algn="l" defTabSz="914400" rtl="0" eaLnBrk="1" fontAlgn="auto" latinLnBrk="0" hangingPunct="1">
+              <a:lnSpc>
+                <a:spcPct val="100000"/>
+              </a:lnSpc>
+              <a:spcBef>
+                <a:spcPts val="0"/>
+              </a:spcBef>
+              <a:spcAft>
+                <a:spcPts val="0"/>
+              </a:spcAft>
+              <a:buClrTx/>
+              <a:buSzTx/>
+              <a:buFontTx/>
+              <a:buNone/>
+              <a:tabLst/>
+              <a:defRPr/>
+            </a:pPr>
+            <a:r>
+              <a:rPr lang="bg-BG" dirty="0" smtClean="0"/>
+              <a:t>Реализираният проект демонстрира успешно изграждане на стабилна и сигурна сървърна инфраструктура, която позволява гладко и ефективно функциониране на уеб приложения. Подчертава се значението на съобразяване с добрите практики, правилната настройка и интеграция на различните компоненти за постигане на оптимални резултати в реална работна среда.</a:t>
+            </a:r>
+          </a:p>
+          <a:p>
+            <a:endParaRPr lang="bg-BG" dirty="0"/>
+          </a:p>
+        </p:txBody>
+      </p:sp>
+      <p:sp>
+        <p:nvSpPr>
+          <p:cNvPr id="4" name="Slide Number Placeholder 3"/>
+          <p:cNvSpPr>
+            <a:spLocks noGrp="1"/>
+          </p:cNvSpPr>
+          <p:nvPr>
+            <p:ph type="sldNum" sz="quarter" idx="10"/>
+          </p:nvPr>
+        </p:nvSpPr>
+        <p:spPr/>
+        <p:txBody>
+          <a:bodyPr/>
+          <a:lstStyle/>
+          <a:p>
+            <a:fld id="{F63C9E35-DB9A-436C-8DE0-D3E82DBFC18A}" type="slidenum">
+              <a:rPr lang="bg-BG" smtClean="0"/>
+              <a:t>9</a:t>
+            </a:fld>
+            <a:endParaRPr lang="bg-BG"/>
+          </a:p>
+        </p:txBody>
+      </p:sp>
+    </p:spTree>
+    <p:extLst>
+      <p:ext uri="{BB962C8B-B14F-4D97-AF65-F5344CB8AC3E}">
+        <p14:creationId xmlns:p14="http://schemas.microsoft.com/office/powerpoint/2010/main" val="2519333029"/>
       </p:ext>
     </p:extLst>
   </p:cSld>
@@ -615,7 +1382,7 @@
           <a:noFill/>
           <a:extLst>
             <a:ext uri="{909E8E84-426E-40dd-AFC4-6F175D3DCCD1}">
-              <a14:hiddenFill xmlns:a14="http://schemas.microsoft.com/office/drawing/2010/main" xmlns="">
+              <a14:hiddenFill xmlns="" xmlns:a14="http://schemas.microsoft.com/office/drawing/2010/main">
                 <a:solidFill>
                   <a:srgbClr val="FFFFFF"/>
                 </a:solidFill>
@@ -675,7 +1442,7 @@
             </a:ln>
             <a:extLst>
               <a:ext uri="{91240B29-F687-4f45-9708-019B960494DF}">
-                <a14:hiddenLine xmlns:a14="http://schemas.microsoft.com/office/drawing/2010/main" xmlns="" w="9525">
+                <a14:hiddenLine xmlns="" xmlns:a14="http://schemas.microsoft.com/office/drawing/2010/main" w="9525">
                   <a:solidFill>
                     <a:srgbClr val="000000"/>
                   </a:solidFill>
@@ -765,7 +1532,7 @@
             </a:ln>
             <a:extLst>
               <a:ext uri="{91240B29-F687-4f45-9708-019B960494DF}">
-                <a14:hiddenLine xmlns:a14="http://schemas.microsoft.com/office/drawing/2010/main" xmlns="" w="9525">
+                <a14:hiddenLine xmlns="" xmlns:a14="http://schemas.microsoft.com/office/drawing/2010/main" w="9525">
                   <a:solidFill>
                     <a:srgbClr val="000000"/>
                   </a:solidFill>
@@ -855,7 +1622,7 @@
             </a:ln>
             <a:extLst>
               <a:ext uri="{91240B29-F687-4f45-9708-019B960494DF}">
-                <a14:hiddenLine xmlns:a14="http://schemas.microsoft.com/office/drawing/2010/main" xmlns="" w="9525">
+                <a14:hiddenLine xmlns="" xmlns:a14="http://schemas.microsoft.com/office/drawing/2010/main" w="9525">
                   <a:solidFill>
                     <a:srgbClr val="000000"/>
                   </a:solidFill>
@@ -889,7 +1656,7 @@
             </a:ln>
             <a:extLst>
               <a:ext uri="{91240B29-F687-4f45-9708-019B960494DF}">
-                <a14:hiddenLine xmlns:a14="http://schemas.microsoft.com/office/drawing/2010/main" xmlns="" w="9525">
+                <a14:hiddenLine xmlns="" xmlns:a14="http://schemas.microsoft.com/office/drawing/2010/main" w="9525">
                   <a:solidFill>
                     <a:srgbClr val="000000"/>
                   </a:solidFill>
@@ -979,7 +1746,7 @@
             </a:ln>
             <a:extLst>
               <a:ext uri="{91240B29-F687-4f45-9708-019B960494DF}">
-                <a14:hiddenLine xmlns:a14="http://schemas.microsoft.com/office/drawing/2010/main" xmlns="" w="9525">
+                <a14:hiddenLine xmlns="" xmlns:a14="http://schemas.microsoft.com/office/drawing/2010/main" w="9525">
                   <a:solidFill>
                     <a:srgbClr val="000000"/>
                   </a:solidFill>
@@ -1041,7 +1808,7 @@
             </a:ln>
             <a:extLst>
               <a:ext uri="{91240B29-F687-4f45-9708-019B960494DF}">
-                <a14:hiddenLine xmlns:a14="http://schemas.microsoft.com/office/drawing/2010/main" xmlns="" w="9525">
+                <a14:hiddenLine xmlns="" xmlns:a14="http://schemas.microsoft.com/office/drawing/2010/main" w="9525">
                   <a:solidFill>
                     <a:srgbClr val="000000"/>
                   </a:solidFill>
@@ -1103,7 +1870,7 @@
             </a:ln>
             <a:extLst>
               <a:ext uri="{91240B29-F687-4f45-9708-019B960494DF}">
-                <a14:hiddenLine xmlns:a14="http://schemas.microsoft.com/office/drawing/2010/main" xmlns="" w="9525">
+                <a14:hiddenLine xmlns="" xmlns:a14="http://schemas.microsoft.com/office/drawing/2010/main" w="9525">
                   <a:solidFill>
                     <a:srgbClr val="000000"/>
                   </a:solidFill>
@@ -1193,7 +1960,7 @@
             </a:ln>
             <a:extLst>
               <a:ext uri="{91240B29-F687-4f45-9708-019B960494DF}">
-                <a14:hiddenLine xmlns:a14="http://schemas.microsoft.com/office/drawing/2010/main" xmlns="" w="9525">
+                <a14:hiddenLine xmlns="" xmlns:a14="http://schemas.microsoft.com/office/drawing/2010/main" w="9525">
                   <a:solidFill>
                     <a:srgbClr val="000000"/>
                   </a:solidFill>
@@ -1255,7 +2022,7 @@
             </a:ln>
             <a:extLst>
               <a:ext uri="{91240B29-F687-4f45-9708-019B960494DF}">
-                <a14:hiddenLine xmlns:a14="http://schemas.microsoft.com/office/drawing/2010/main" xmlns="" w="9525">
+                <a14:hiddenLine xmlns="" xmlns:a14="http://schemas.microsoft.com/office/drawing/2010/main" w="9525">
                   <a:solidFill>
                     <a:srgbClr val="000000"/>
                   </a:solidFill>
@@ -1317,7 +2084,7 @@
             </a:ln>
             <a:extLst>
               <a:ext uri="{91240B29-F687-4f45-9708-019B960494DF}">
-                <a14:hiddenLine xmlns:a14="http://schemas.microsoft.com/office/drawing/2010/main" xmlns="" w="9525">
+                <a14:hiddenLine xmlns="" xmlns:a14="http://schemas.microsoft.com/office/drawing/2010/main" w="9525">
                   <a:solidFill>
                     <a:srgbClr val="000000"/>
                   </a:solidFill>
@@ -1407,7 +2174,7 @@
             </a:ln>
             <a:extLst>
               <a:ext uri="{91240B29-F687-4f45-9708-019B960494DF}">
-                <a14:hiddenLine xmlns:a14="http://schemas.microsoft.com/office/drawing/2010/main" xmlns="" w="9525">
+                <a14:hiddenLine xmlns="" xmlns:a14="http://schemas.microsoft.com/office/drawing/2010/main" w="9525">
                   <a:solidFill>
                     <a:srgbClr val="000000"/>
                   </a:solidFill>
@@ -1497,7 +2264,7 @@
             </a:ln>
             <a:extLst>
               <a:ext uri="{91240B29-F687-4f45-9708-019B960494DF}">
-                <a14:hiddenLine xmlns:a14="http://schemas.microsoft.com/office/drawing/2010/main" xmlns="" w="9525">
+                <a14:hiddenLine xmlns="" xmlns:a14="http://schemas.microsoft.com/office/drawing/2010/main" w="9525">
                   <a:solidFill>
                     <a:srgbClr val="000000"/>
                   </a:solidFill>
@@ -1559,7 +2326,7 @@
             </a:ln>
             <a:extLst>
               <a:ext uri="{91240B29-F687-4f45-9708-019B960494DF}">
-                <a14:hiddenLine xmlns:a14="http://schemas.microsoft.com/office/drawing/2010/main" xmlns="" w="9525">
+                <a14:hiddenLine xmlns="" xmlns:a14="http://schemas.microsoft.com/office/drawing/2010/main" w="9525">
                   <a:solidFill>
                     <a:srgbClr val="000000"/>
                   </a:solidFill>
@@ -1669,7 +2436,7 @@
             </a:ln>
             <a:extLst>
               <a:ext uri="{91240B29-F687-4f45-9708-019B960494DF}">
-                <a14:hiddenLine xmlns:a14="http://schemas.microsoft.com/office/drawing/2010/main" xmlns="" w="9525">
+                <a14:hiddenLine xmlns="" xmlns:a14="http://schemas.microsoft.com/office/drawing/2010/main" w="9525">
                   <a:solidFill>
                     <a:srgbClr val="000000"/>
                   </a:solidFill>
@@ -1731,7 +2498,7 @@
             </a:ln>
             <a:extLst>
               <a:ext uri="{91240B29-F687-4f45-9708-019B960494DF}">
-                <a14:hiddenLine xmlns:a14="http://schemas.microsoft.com/office/drawing/2010/main" xmlns="" w="9525">
+                <a14:hiddenLine xmlns="" xmlns:a14="http://schemas.microsoft.com/office/drawing/2010/main" w="9525">
                   <a:solidFill>
                     <a:srgbClr val="000000"/>
                   </a:solidFill>
@@ -1821,7 +2588,7 @@
             </a:ln>
             <a:extLst>
               <a:ext uri="{91240B29-F687-4f45-9708-019B960494DF}">
-                <a14:hiddenLine xmlns:a14="http://schemas.microsoft.com/office/drawing/2010/main" xmlns="" w="9525">
+                <a14:hiddenLine xmlns="" xmlns:a14="http://schemas.microsoft.com/office/drawing/2010/main" w="9525">
                   <a:solidFill>
                     <a:srgbClr val="000000"/>
                   </a:solidFill>
@@ -1911,7 +2678,7 @@
             </a:ln>
             <a:extLst>
               <a:ext uri="{91240B29-F687-4f45-9708-019B960494DF}">
-                <a14:hiddenLine xmlns:a14="http://schemas.microsoft.com/office/drawing/2010/main" xmlns="" w="9525">
+                <a14:hiddenLine xmlns="" xmlns:a14="http://schemas.microsoft.com/office/drawing/2010/main" w="9525">
                   <a:solidFill>
                     <a:srgbClr val="000000"/>
                   </a:solidFill>
@@ -1973,7 +2740,7 @@
             </a:ln>
             <a:extLst>
               <a:ext uri="{91240B29-F687-4f45-9708-019B960494DF}">
-                <a14:hiddenLine xmlns:a14="http://schemas.microsoft.com/office/drawing/2010/main" xmlns="" w="9525">
+                <a14:hiddenLine xmlns="" xmlns:a14="http://schemas.microsoft.com/office/drawing/2010/main" w="9525">
                   <a:solidFill>
                     <a:srgbClr val="000000"/>
                   </a:solidFill>
@@ -2063,7 +2830,7 @@
             </a:ln>
             <a:extLst>
               <a:ext uri="{91240B29-F687-4f45-9708-019B960494DF}">
-                <a14:hiddenLine xmlns:a14="http://schemas.microsoft.com/office/drawing/2010/main" xmlns="" w="9525">
+                <a14:hiddenLine xmlns="" xmlns:a14="http://schemas.microsoft.com/office/drawing/2010/main" w="9525">
                   <a:solidFill>
                     <a:srgbClr val="000000"/>
                   </a:solidFill>
@@ -2153,7 +2920,7 @@
             </a:ln>
             <a:extLst>
               <a:ext uri="{91240B29-F687-4f45-9708-019B960494DF}">
-                <a14:hiddenLine xmlns:a14="http://schemas.microsoft.com/office/drawing/2010/main" xmlns="" w="9525">
+                <a14:hiddenLine xmlns="" xmlns:a14="http://schemas.microsoft.com/office/drawing/2010/main" w="9525">
                   <a:solidFill>
                     <a:srgbClr val="000000"/>
                   </a:solidFill>
@@ -2209,7 +2976,7 @@
             </a:ln>
             <a:extLst>
               <a:ext uri="{91240B29-F687-4f45-9708-019B960494DF}">
-                <a14:hiddenLine xmlns:a14="http://schemas.microsoft.com/office/drawing/2010/main" xmlns="" w="9525">
+                <a14:hiddenLine xmlns="" xmlns:a14="http://schemas.microsoft.com/office/drawing/2010/main" w="9525">
                   <a:solidFill>
                     <a:srgbClr val="000000"/>
                   </a:solidFill>
@@ -2299,7 +3066,7 @@
             </a:ln>
             <a:extLst>
               <a:ext uri="{91240B29-F687-4f45-9708-019B960494DF}">
-                <a14:hiddenLine xmlns:a14="http://schemas.microsoft.com/office/drawing/2010/main" xmlns="" w="9525">
+                <a14:hiddenLine xmlns="" xmlns:a14="http://schemas.microsoft.com/office/drawing/2010/main" w="9525">
                   <a:solidFill>
                     <a:srgbClr val="000000"/>
                   </a:solidFill>
@@ -2355,7 +3122,7 @@
             </a:ln>
             <a:extLst>
               <a:ext uri="{91240B29-F687-4f45-9708-019B960494DF}">
-                <a14:hiddenLine xmlns:a14="http://schemas.microsoft.com/office/drawing/2010/main" xmlns="" w="9525">
+                <a14:hiddenLine xmlns="" xmlns:a14="http://schemas.microsoft.com/office/drawing/2010/main" w="9525">
                   <a:solidFill>
                     <a:srgbClr val="000000"/>
                   </a:solidFill>
@@ -2445,7 +3212,7 @@
             </a:ln>
             <a:extLst>
               <a:ext uri="{91240B29-F687-4f45-9708-019B960494DF}">
-                <a14:hiddenLine xmlns:a14="http://schemas.microsoft.com/office/drawing/2010/main" xmlns="" w="9525">
+                <a14:hiddenLine xmlns="" xmlns:a14="http://schemas.microsoft.com/office/drawing/2010/main" w="9525">
                   <a:solidFill>
                     <a:srgbClr val="000000"/>
                   </a:solidFill>
@@ -2513,7 +3280,7 @@
             </a:ln>
             <a:extLst>
               <a:ext uri="{91240B29-F687-4f45-9708-019B960494DF}">
-                <a14:hiddenLine xmlns:a14="http://schemas.microsoft.com/office/drawing/2010/main" xmlns="" w="9525">
+                <a14:hiddenLine xmlns="" xmlns:a14="http://schemas.microsoft.com/office/drawing/2010/main" w="9525">
                   <a:solidFill>
                     <a:srgbClr val="000000"/>
                   </a:solidFill>
@@ -2603,7 +3370,7 @@
             </a:ln>
             <a:extLst>
               <a:ext uri="{91240B29-F687-4f45-9708-019B960494DF}">
-                <a14:hiddenLine xmlns:a14="http://schemas.microsoft.com/office/drawing/2010/main" xmlns="" w="9525">
+                <a14:hiddenLine xmlns="" xmlns:a14="http://schemas.microsoft.com/office/drawing/2010/main" w="9525">
                   <a:solidFill>
                     <a:srgbClr val="000000"/>
                   </a:solidFill>
@@ -2671,7 +3438,7 @@
             </a:ln>
             <a:extLst>
               <a:ext uri="{91240B29-F687-4f45-9708-019B960494DF}">
-                <a14:hiddenLine xmlns:a14="http://schemas.microsoft.com/office/drawing/2010/main" xmlns="" w="9525">
+                <a14:hiddenLine xmlns="" xmlns:a14="http://schemas.microsoft.com/office/drawing/2010/main" w="9525">
                   <a:solidFill>
                     <a:srgbClr val="000000"/>
                   </a:solidFill>
@@ -2761,7 +3528,7 @@
             </a:ln>
             <a:extLst>
               <a:ext uri="{91240B29-F687-4f45-9708-019B960494DF}">
-                <a14:hiddenLine xmlns:a14="http://schemas.microsoft.com/office/drawing/2010/main" xmlns="" w="9525">
+                <a14:hiddenLine xmlns="" xmlns:a14="http://schemas.microsoft.com/office/drawing/2010/main" w="9525">
                   <a:solidFill>
                     <a:srgbClr val="000000"/>
                   </a:solidFill>
@@ -2795,7 +3562,7 @@
             </a:ln>
             <a:extLst>
               <a:ext uri="{91240B29-F687-4f45-9708-019B960494DF}">
-                <a14:hiddenLine xmlns:a14="http://schemas.microsoft.com/office/drawing/2010/main" xmlns="" w="9525">
+                <a14:hiddenLine xmlns="" xmlns:a14="http://schemas.microsoft.com/office/drawing/2010/main" w="9525">
                   <a:solidFill>
                     <a:srgbClr val="000000"/>
                   </a:solidFill>
@@ -2885,7 +3652,7 @@
             </a:ln>
             <a:extLst>
               <a:ext uri="{91240B29-F687-4f45-9708-019B960494DF}">
-                <a14:hiddenLine xmlns:a14="http://schemas.microsoft.com/office/drawing/2010/main" xmlns="" w="9525">
+                <a14:hiddenLine xmlns="" xmlns:a14="http://schemas.microsoft.com/office/drawing/2010/main" w="9525">
                   <a:solidFill>
                     <a:srgbClr val="000000"/>
                   </a:solidFill>
@@ -2947,7 +3714,7 @@
             </a:ln>
             <a:extLst>
               <a:ext uri="{91240B29-F687-4f45-9708-019B960494DF}">
-                <a14:hiddenLine xmlns:a14="http://schemas.microsoft.com/office/drawing/2010/main" xmlns="" w="9525">
+                <a14:hiddenLine xmlns="" xmlns:a14="http://schemas.microsoft.com/office/drawing/2010/main" w="9525">
                   <a:solidFill>
                     <a:srgbClr val="000000"/>
                   </a:solidFill>
@@ -3009,7 +3776,7 @@
             </a:ln>
             <a:extLst>
               <a:ext uri="{91240B29-F687-4f45-9708-019B960494DF}">
-                <a14:hiddenLine xmlns:a14="http://schemas.microsoft.com/office/drawing/2010/main" xmlns="" w="9525">
+                <a14:hiddenLine xmlns="" xmlns:a14="http://schemas.microsoft.com/office/drawing/2010/main" w="9525">
                   <a:solidFill>
                     <a:srgbClr val="000000"/>
                   </a:solidFill>
@@ -3099,7 +3866,7 @@
             </a:ln>
             <a:extLst>
               <a:ext uri="{91240B29-F687-4f45-9708-019B960494DF}">
-                <a14:hiddenLine xmlns:a14="http://schemas.microsoft.com/office/drawing/2010/main" xmlns="" w="9525">
+                <a14:hiddenLine xmlns="" xmlns:a14="http://schemas.microsoft.com/office/drawing/2010/main" w="9525">
                   <a:solidFill>
                     <a:srgbClr val="000000"/>
                   </a:solidFill>
@@ -3167,7 +3934,7 @@
             </a:ln>
             <a:extLst>
               <a:ext uri="{91240B29-F687-4f45-9708-019B960494DF}">
-                <a14:hiddenLine xmlns:a14="http://schemas.microsoft.com/office/drawing/2010/main" xmlns="" w="9525">
+                <a14:hiddenLine xmlns="" xmlns:a14="http://schemas.microsoft.com/office/drawing/2010/main" w="9525">
                   <a:solidFill>
                     <a:srgbClr val="000000"/>
                   </a:solidFill>
@@ -3229,7 +3996,7 @@
             </a:ln>
             <a:extLst>
               <a:ext uri="{91240B29-F687-4f45-9708-019B960494DF}">
-                <a14:hiddenLine xmlns:a14="http://schemas.microsoft.com/office/drawing/2010/main" xmlns="" w="9525">
+                <a14:hiddenLine xmlns="" xmlns:a14="http://schemas.microsoft.com/office/drawing/2010/main" w="9525">
                   <a:solidFill>
                     <a:srgbClr val="000000"/>
                   </a:solidFill>
@@ -3319,7 +4086,7 @@
             </a:ln>
             <a:extLst>
               <a:ext uri="{91240B29-F687-4f45-9708-019B960494DF}">
-                <a14:hiddenLine xmlns:a14="http://schemas.microsoft.com/office/drawing/2010/main" xmlns="" w="9525">
+                <a14:hiddenLine xmlns="" xmlns:a14="http://schemas.microsoft.com/office/drawing/2010/main" w="9525">
                   <a:solidFill>
                     <a:srgbClr val="000000"/>
                   </a:solidFill>
@@ -3381,7 +4148,7 @@
             </a:ln>
             <a:extLst>
               <a:ext uri="{91240B29-F687-4f45-9708-019B960494DF}">
-                <a14:hiddenLine xmlns:a14="http://schemas.microsoft.com/office/drawing/2010/main" xmlns="" w="9525">
+                <a14:hiddenLine xmlns="" xmlns:a14="http://schemas.microsoft.com/office/drawing/2010/main" w="9525">
                   <a:solidFill>
                     <a:srgbClr val="000000"/>
                   </a:solidFill>
@@ -3471,7 +4238,7 @@
             </a:ln>
             <a:extLst>
               <a:ext uri="{91240B29-F687-4f45-9708-019B960494DF}">
-                <a14:hiddenLine xmlns:a14="http://schemas.microsoft.com/office/drawing/2010/main" xmlns="" w="9525">
+                <a14:hiddenLine xmlns="" xmlns:a14="http://schemas.microsoft.com/office/drawing/2010/main" w="9525">
                   <a:solidFill>
                     <a:srgbClr val="000000"/>
                   </a:solidFill>
@@ -3533,7 +4300,7 @@
             </a:ln>
             <a:extLst>
               <a:ext uri="{91240B29-F687-4f45-9708-019B960494DF}">
-                <a14:hiddenLine xmlns:a14="http://schemas.microsoft.com/office/drawing/2010/main" xmlns="" w="9525">
+                <a14:hiddenLine xmlns="" xmlns:a14="http://schemas.microsoft.com/office/drawing/2010/main" w="9525">
                   <a:solidFill>
                     <a:srgbClr val="000000"/>
                   </a:solidFill>
@@ -3623,7 +4390,7 @@
             </a:ln>
             <a:extLst>
               <a:ext uri="{91240B29-F687-4f45-9708-019B960494DF}">
-                <a14:hiddenLine xmlns:a14="http://schemas.microsoft.com/office/drawing/2010/main" xmlns="" w="9525">
+                <a14:hiddenLine xmlns="" xmlns:a14="http://schemas.microsoft.com/office/drawing/2010/main" w="9525">
                   <a:solidFill>
                     <a:srgbClr val="000000"/>
                   </a:solidFill>
@@ -3657,7 +4424,7 @@
             </a:ln>
             <a:extLst>
               <a:ext uri="{91240B29-F687-4f45-9708-019B960494DF}">
-                <a14:hiddenLine xmlns:a14="http://schemas.microsoft.com/office/drawing/2010/main" xmlns="" w="9525">
+                <a14:hiddenLine xmlns="" xmlns:a14="http://schemas.microsoft.com/office/drawing/2010/main" w="9525">
                   <a:solidFill>
                     <a:srgbClr val="000000"/>
                   </a:solidFill>
@@ -3722,7 +4489,7 @@
             </a:ln>
             <a:extLst>
               <a:ext uri="{91240B29-F687-4f45-9708-019B960494DF}">
-                <a14:hiddenLine xmlns:a14="http://schemas.microsoft.com/office/drawing/2010/main" xmlns="" w="9525">
+                <a14:hiddenLine xmlns="" xmlns:a14="http://schemas.microsoft.com/office/drawing/2010/main" w="9525">
                   <a:solidFill>
                     <a:srgbClr val="000000"/>
                   </a:solidFill>
@@ -3812,7 +4579,7 @@
             </a:ln>
             <a:extLst>
               <a:ext uri="{91240B29-F687-4f45-9708-019B960494DF}">
-                <a14:hiddenLine xmlns:a14="http://schemas.microsoft.com/office/drawing/2010/main" xmlns="" w="9525">
+                <a14:hiddenLine xmlns="" xmlns:a14="http://schemas.microsoft.com/office/drawing/2010/main" w="9525">
                   <a:solidFill>
                     <a:srgbClr val="000000"/>
                   </a:solidFill>
@@ -3874,7 +4641,7 @@
             </a:ln>
             <a:extLst>
               <a:ext uri="{91240B29-F687-4f45-9708-019B960494DF}">
-                <a14:hiddenLine xmlns:a14="http://schemas.microsoft.com/office/drawing/2010/main" xmlns="" w="9525">
+                <a14:hiddenLine xmlns="" xmlns:a14="http://schemas.microsoft.com/office/drawing/2010/main" w="9525">
                   <a:solidFill>
                     <a:srgbClr val="000000"/>
                   </a:solidFill>
@@ -3964,7 +4731,7 @@
             </a:ln>
             <a:extLst>
               <a:ext uri="{91240B29-F687-4f45-9708-019B960494DF}">
-                <a14:hiddenLine xmlns:a14="http://schemas.microsoft.com/office/drawing/2010/main" xmlns="" w="9525">
+                <a14:hiddenLine xmlns="" xmlns:a14="http://schemas.microsoft.com/office/drawing/2010/main" w="9525">
                   <a:solidFill>
                     <a:srgbClr val="000000"/>
                   </a:solidFill>
@@ -4054,7 +4821,7 @@
             </a:ln>
             <a:extLst>
               <a:ext uri="{91240B29-F687-4f45-9708-019B960494DF}">
-                <a14:hiddenLine xmlns:a14="http://schemas.microsoft.com/office/drawing/2010/main" xmlns="" w="9525">
+                <a14:hiddenLine xmlns="" xmlns:a14="http://schemas.microsoft.com/office/drawing/2010/main" w="9525">
                   <a:solidFill>
                     <a:srgbClr val="000000"/>
                   </a:solidFill>
@@ -4119,7 +4886,7 @@
             </a:ln>
             <a:extLst>
               <a:ext uri="{91240B29-F687-4f45-9708-019B960494DF}">
-                <a14:hiddenLine xmlns:a14="http://schemas.microsoft.com/office/drawing/2010/main" xmlns="" w="9525">
+                <a14:hiddenLine xmlns="" xmlns:a14="http://schemas.microsoft.com/office/drawing/2010/main" w="9525">
                   <a:solidFill>
                     <a:srgbClr val="000000"/>
                   </a:solidFill>
@@ -4181,7 +4948,7 @@
             </a:ln>
             <a:extLst>
               <a:ext uri="{91240B29-F687-4f45-9708-019B960494DF}">
-                <a14:hiddenLine xmlns:a14="http://schemas.microsoft.com/office/drawing/2010/main" xmlns="" w="9525">
+                <a14:hiddenLine xmlns="" xmlns:a14="http://schemas.microsoft.com/office/drawing/2010/main" w="9525">
                   <a:solidFill>
                     <a:srgbClr val="000000"/>
                   </a:solidFill>
@@ -4271,7 +5038,7 @@
             </a:ln>
             <a:extLst>
               <a:ext uri="{91240B29-F687-4f45-9708-019B960494DF}">
-                <a14:hiddenLine xmlns:a14="http://schemas.microsoft.com/office/drawing/2010/main" xmlns="" w="9525">
+                <a14:hiddenLine xmlns="" xmlns:a14="http://schemas.microsoft.com/office/drawing/2010/main" w="9525">
                   <a:solidFill>
                     <a:srgbClr val="000000"/>
                   </a:solidFill>
@@ -4361,7 +5128,7 @@
             </a:ln>
             <a:extLst>
               <a:ext uri="{91240B29-F687-4f45-9708-019B960494DF}">
-                <a14:hiddenLine xmlns:a14="http://schemas.microsoft.com/office/drawing/2010/main" xmlns="" w="9525">
+                <a14:hiddenLine xmlns="" xmlns:a14="http://schemas.microsoft.com/office/drawing/2010/main" w="9525">
                   <a:solidFill>
                     <a:srgbClr val="000000"/>
                   </a:solidFill>
@@ -4423,7 +5190,7 @@
             </a:ln>
             <a:extLst>
               <a:ext uri="{91240B29-F687-4f45-9708-019B960494DF}">
-                <a14:hiddenLine xmlns:a14="http://schemas.microsoft.com/office/drawing/2010/main" xmlns="" w="9525">
+                <a14:hiddenLine xmlns="" xmlns:a14="http://schemas.microsoft.com/office/drawing/2010/main" w="9525">
                   <a:solidFill>
                     <a:srgbClr val="000000"/>
                   </a:solidFill>
@@ -4543,7 +5310,7 @@
             </a:ln>
             <a:extLst>
               <a:ext uri="{91240B29-F687-4f45-9708-019B960494DF}">
-                <a14:hiddenLine xmlns:a14="http://schemas.microsoft.com/office/drawing/2010/main" xmlns="" w="9525">
+                <a14:hiddenLine xmlns="" xmlns:a14="http://schemas.microsoft.com/office/drawing/2010/main" w="9525">
                   <a:solidFill>
                     <a:srgbClr val="000000"/>
                   </a:solidFill>
@@ -4611,7 +5378,7 @@
             </a:ln>
             <a:extLst>
               <a:ext uri="{91240B29-F687-4f45-9708-019B960494DF}">
-                <a14:hiddenLine xmlns:a14="http://schemas.microsoft.com/office/drawing/2010/main" xmlns="" w="9525">
+                <a14:hiddenLine xmlns="" xmlns:a14="http://schemas.microsoft.com/office/drawing/2010/main" w="9525">
                   <a:solidFill>
                     <a:srgbClr val="000000"/>
                   </a:solidFill>
@@ -4701,7 +5468,7 @@
             </a:ln>
             <a:extLst>
               <a:ext uri="{91240B29-F687-4f45-9708-019B960494DF}">
-                <a14:hiddenLine xmlns:a14="http://schemas.microsoft.com/office/drawing/2010/main" xmlns="" w="9525">
+                <a14:hiddenLine xmlns="" xmlns:a14="http://schemas.microsoft.com/office/drawing/2010/main" w="9525">
                   <a:solidFill>
                     <a:srgbClr val="000000"/>
                   </a:solidFill>
@@ -4841,7 +5608,7 @@
           <a:p>
             <a:fld id="{5B11F235-42AF-49D3-AEEC-F57B10BE23B5}" type="datetimeFigureOut">
               <a:rPr lang="bg-BG" smtClean="0"/>
-              <a:t>13.5.2025 г.</a:t>
+              <a:t>14.5.2025 г.</a:t>
             </a:fld>
             <a:endParaRPr lang="bg-BG"/>
           </a:p>
@@ -5108,7 +5875,7 @@
           <a:p>
             <a:fld id="{5B11F235-42AF-49D3-AEEC-F57B10BE23B5}" type="datetimeFigureOut">
               <a:rPr lang="bg-BG" smtClean="0"/>
-              <a:t>13.5.2025 г.</a:t>
+              <a:t>14.5.2025 г.</a:t>
             </a:fld>
             <a:endParaRPr lang="bg-BG"/>
           </a:p>
@@ -5304,7 +6071,7 @@
           <a:p>
             <a:fld id="{5B11F235-42AF-49D3-AEEC-F57B10BE23B5}" type="datetimeFigureOut">
               <a:rPr lang="bg-BG" smtClean="0"/>
-              <a:t>13.5.2025 г.</a:t>
+              <a:t>14.5.2025 г.</a:t>
             </a:fld>
             <a:endParaRPr lang="bg-BG"/>
           </a:p>
@@ -5567,7 +6334,7 @@
           <a:p>
             <a:fld id="{5B11F235-42AF-49D3-AEEC-F57B10BE23B5}" type="datetimeFigureOut">
               <a:rPr lang="bg-BG" smtClean="0"/>
-              <a:t>13.5.2025 г.</a:t>
+              <a:t>14.5.2025 г.</a:t>
             </a:fld>
             <a:endParaRPr lang="bg-BG"/>
           </a:p>
@@ -6001,7 +6768,7 @@
           <a:p>
             <a:fld id="{5B11F235-42AF-49D3-AEEC-F57B10BE23B5}" type="datetimeFigureOut">
               <a:rPr lang="bg-BG" smtClean="0"/>
-              <a:t>13.5.2025 г.</a:t>
+              <a:t>14.5.2025 г.</a:t>
             </a:fld>
             <a:endParaRPr lang="bg-BG"/>
           </a:p>
@@ -6547,7 +7314,7 @@
           <a:p>
             <a:fld id="{5B11F235-42AF-49D3-AEEC-F57B10BE23B5}" type="datetimeFigureOut">
               <a:rPr lang="bg-BG" smtClean="0"/>
-              <a:t>13.5.2025 г.</a:t>
+              <a:t>14.5.2025 г.</a:t>
             </a:fld>
             <a:endParaRPr lang="bg-BG"/>
           </a:p>
@@ -7267,7 +8034,7 @@
           <a:p>
             <a:fld id="{5B11F235-42AF-49D3-AEEC-F57B10BE23B5}" type="datetimeFigureOut">
               <a:rPr lang="bg-BG" smtClean="0"/>
-              <a:t>13.5.2025 г.</a:t>
+              <a:t>14.5.2025 г.</a:t>
             </a:fld>
             <a:endParaRPr lang="bg-BG"/>
           </a:p>
@@ -7437,7 +8204,7 @@
           <a:p>
             <a:fld id="{5B11F235-42AF-49D3-AEEC-F57B10BE23B5}" type="datetimeFigureOut">
               <a:rPr lang="bg-BG" smtClean="0"/>
-              <a:t>13.5.2025 г.</a:t>
+              <a:t>14.5.2025 г.</a:t>
             </a:fld>
             <a:endParaRPr lang="bg-BG"/>
           </a:p>
@@ -7617,7 +8384,7 @@
           <a:p>
             <a:fld id="{5B11F235-42AF-49D3-AEEC-F57B10BE23B5}" type="datetimeFigureOut">
               <a:rPr lang="bg-BG" smtClean="0"/>
-              <a:t>13.5.2025 г.</a:t>
+              <a:t>14.5.2025 г.</a:t>
             </a:fld>
             <a:endParaRPr lang="bg-BG"/>
           </a:p>
@@ -7787,7 +8554,7 @@
           <a:p>
             <a:fld id="{5B11F235-42AF-49D3-AEEC-F57B10BE23B5}" type="datetimeFigureOut">
               <a:rPr lang="bg-BG" smtClean="0"/>
-              <a:t>13.5.2025 г.</a:t>
+              <a:t>14.5.2025 г.</a:t>
             </a:fld>
             <a:endParaRPr lang="bg-BG"/>
           </a:p>
@@ -8037,7 +8804,7 @@
           <a:p>
             <a:fld id="{5B11F235-42AF-49D3-AEEC-F57B10BE23B5}" type="datetimeFigureOut">
               <a:rPr lang="bg-BG" smtClean="0"/>
-              <a:t>13.5.2025 г.</a:t>
+              <a:t>14.5.2025 г.</a:t>
             </a:fld>
             <a:endParaRPr lang="bg-BG"/>
           </a:p>
@@ -8269,7 +9036,7 @@
           <a:p>
             <a:fld id="{5B11F235-42AF-49D3-AEEC-F57B10BE23B5}" type="datetimeFigureOut">
               <a:rPr lang="bg-BG" smtClean="0"/>
-              <a:t>13.5.2025 г.</a:t>
+              <a:t>14.5.2025 г.</a:t>
             </a:fld>
             <a:endParaRPr lang="bg-BG"/>
           </a:p>
@@ -8650,7 +9417,7 @@
           <a:p>
             <a:fld id="{5B11F235-42AF-49D3-AEEC-F57B10BE23B5}" type="datetimeFigureOut">
               <a:rPr lang="bg-BG" smtClean="0"/>
-              <a:t>13.5.2025 г.</a:t>
+              <a:t>14.5.2025 г.</a:t>
             </a:fld>
             <a:endParaRPr lang="bg-BG"/>
           </a:p>
@@ -8768,7 +9535,7 @@
           <a:p>
             <a:fld id="{5B11F235-42AF-49D3-AEEC-F57B10BE23B5}" type="datetimeFigureOut">
               <a:rPr lang="bg-BG" smtClean="0"/>
-              <a:t>13.5.2025 г.</a:t>
+              <a:t>14.5.2025 г.</a:t>
             </a:fld>
             <a:endParaRPr lang="bg-BG"/>
           </a:p>
@@ -8863,7 +9630,7 @@
           <a:p>
             <a:fld id="{5B11F235-42AF-49D3-AEEC-F57B10BE23B5}" type="datetimeFigureOut">
               <a:rPr lang="bg-BG" smtClean="0"/>
-              <a:t>13.5.2025 г.</a:t>
+              <a:t>14.5.2025 г.</a:t>
             </a:fld>
             <a:endParaRPr lang="bg-BG"/>
           </a:p>
@@ -9112,7 +9879,7 @@
           <a:p>
             <a:fld id="{5B11F235-42AF-49D3-AEEC-F57B10BE23B5}" type="datetimeFigureOut">
               <a:rPr lang="bg-BG" smtClean="0"/>
-              <a:t>13.5.2025 г.</a:t>
+              <a:t>14.5.2025 г.</a:t>
             </a:fld>
             <a:endParaRPr lang="bg-BG"/>
           </a:p>
@@ -9392,7 +10159,7 @@
           <a:p>
             <a:fld id="{5B11F235-42AF-49D3-AEEC-F57B10BE23B5}" type="datetimeFigureOut">
               <a:rPr lang="bg-BG" smtClean="0"/>
-              <a:t>13.5.2025 г.</a:t>
+              <a:t>14.5.2025 г.</a:t>
             </a:fld>
             <a:endParaRPr lang="bg-BG"/>
           </a:p>
@@ -9508,7 +10275,7 @@
           <a:noFill/>
           <a:extLst>
             <a:ext uri="{909E8E84-426E-40dd-AFC4-6F175D3DCCD1}">
-              <a14:hiddenFill xmlns:a14="http://schemas.microsoft.com/office/drawing/2010/main" xmlns="">
+              <a14:hiddenFill xmlns="" xmlns:a14="http://schemas.microsoft.com/office/drawing/2010/main">
                 <a:solidFill>
                   <a:srgbClr val="FFFFFF"/>
                 </a:solidFill>
@@ -9582,7 +10349,7 @@
               </a:ln>
               <a:extLst>
                 <a:ext uri="{91240B29-F687-4f45-9708-019B960494DF}">
-                  <a14:hiddenLine xmlns:a14="http://schemas.microsoft.com/office/drawing/2010/main" xmlns="" w="9525">
+                  <a14:hiddenLine xmlns="" xmlns:a14="http://schemas.microsoft.com/office/drawing/2010/main" w="9525">
                     <a:solidFill>
                       <a:srgbClr val="000000"/>
                     </a:solidFill>
@@ -9672,7 +10439,7 @@
               </a:ln>
               <a:extLst>
                 <a:ext uri="{91240B29-F687-4f45-9708-019B960494DF}">
-                  <a14:hiddenLine xmlns:a14="http://schemas.microsoft.com/office/drawing/2010/main" xmlns="" w="9525">
+                  <a14:hiddenLine xmlns="" xmlns:a14="http://schemas.microsoft.com/office/drawing/2010/main" w="9525">
                     <a:solidFill>
                       <a:srgbClr val="000000"/>
                     </a:solidFill>
@@ -9762,7 +10529,7 @@
               </a:ln>
               <a:extLst>
                 <a:ext uri="{91240B29-F687-4f45-9708-019B960494DF}">
-                  <a14:hiddenLine xmlns:a14="http://schemas.microsoft.com/office/drawing/2010/main" xmlns="" w="9525">
+                  <a14:hiddenLine xmlns="" xmlns:a14="http://schemas.microsoft.com/office/drawing/2010/main" w="9525">
                     <a:solidFill>
                       <a:srgbClr val="000000"/>
                     </a:solidFill>
@@ -9824,7 +10591,7 @@
               </a:ln>
               <a:extLst>
                 <a:ext uri="{91240B29-F687-4f45-9708-019B960494DF}">
-                  <a14:hiddenLine xmlns:a14="http://schemas.microsoft.com/office/drawing/2010/main" xmlns="" w="9525">
+                  <a14:hiddenLine xmlns="" xmlns:a14="http://schemas.microsoft.com/office/drawing/2010/main" w="9525">
                     <a:solidFill>
                       <a:srgbClr val="000000"/>
                     </a:solidFill>
@@ -9914,7 +10681,7 @@
               </a:ln>
               <a:extLst>
                 <a:ext uri="{91240B29-F687-4f45-9708-019B960494DF}">
-                  <a14:hiddenLine xmlns:a14="http://schemas.microsoft.com/office/drawing/2010/main" xmlns="" w="9525">
+                  <a14:hiddenLine xmlns="" xmlns:a14="http://schemas.microsoft.com/office/drawing/2010/main" w="9525">
                     <a:solidFill>
                       <a:srgbClr val="000000"/>
                     </a:solidFill>
@@ -9976,7 +10743,7 @@
               </a:ln>
               <a:extLst>
                 <a:ext uri="{91240B29-F687-4f45-9708-019B960494DF}">
-                  <a14:hiddenLine xmlns:a14="http://schemas.microsoft.com/office/drawing/2010/main" xmlns="" w="9525">
+                  <a14:hiddenLine xmlns="" xmlns:a14="http://schemas.microsoft.com/office/drawing/2010/main" w="9525">
                     <a:solidFill>
                       <a:srgbClr val="000000"/>
                     </a:solidFill>
@@ -10038,7 +10805,7 @@
               </a:ln>
               <a:extLst>
                 <a:ext uri="{91240B29-F687-4f45-9708-019B960494DF}">
-                  <a14:hiddenLine xmlns:a14="http://schemas.microsoft.com/office/drawing/2010/main" xmlns="" w="9525">
+                  <a14:hiddenLine xmlns="" xmlns:a14="http://schemas.microsoft.com/office/drawing/2010/main" w="9525">
                     <a:solidFill>
                       <a:srgbClr val="000000"/>
                     </a:solidFill>
@@ -10128,7 +10895,7 @@
               </a:ln>
               <a:extLst>
                 <a:ext uri="{91240B29-F687-4f45-9708-019B960494DF}">
-                  <a14:hiddenLine xmlns:a14="http://schemas.microsoft.com/office/drawing/2010/main" xmlns="" w="9525">
+                  <a14:hiddenLine xmlns="" xmlns:a14="http://schemas.microsoft.com/office/drawing/2010/main" w="9525">
                     <a:solidFill>
                       <a:srgbClr val="000000"/>
                     </a:solidFill>
@@ -10218,7 +10985,7 @@
               </a:ln>
               <a:extLst>
                 <a:ext uri="{91240B29-F687-4f45-9708-019B960494DF}">
-                  <a14:hiddenLine xmlns:a14="http://schemas.microsoft.com/office/drawing/2010/main" xmlns="" w="9525">
+                  <a14:hiddenLine xmlns="" xmlns:a14="http://schemas.microsoft.com/office/drawing/2010/main" w="9525">
                     <a:solidFill>
                       <a:srgbClr val="000000"/>
                     </a:solidFill>
@@ -10280,7 +11047,7 @@
               </a:ln>
               <a:extLst>
                 <a:ext uri="{91240B29-F687-4f45-9708-019B960494DF}">
-                  <a14:hiddenLine xmlns:a14="http://schemas.microsoft.com/office/drawing/2010/main" xmlns="" w="9525">
+                  <a14:hiddenLine xmlns="" xmlns:a14="http://schemas.microsoft.com/office/drawing/2010/main" w="9525">
                     <a:solidFill>
                       <a:srgbClr val="000000"/>
                     </a:solidFill>
@@ -10390,7 +11157,7 @@
               </a:ln>
               <a:extLst>
                 <a:ext uri="{91240B29-F687-4f45-9708-019B960494DF}">
-                  <a14:hiddenLine xmlns:a14="http://schemas.microsoft.com/office/drawing/2010/main" xmlns="" w="9525">
+                  <a14:hiddenLine xmlns="" xmlns:a14="http://schemas.microsoft.com/office/drawing/2010/main" w="9525">
                     <a:solidFill>
                       <a:srgbClr val="000000"/>
                     </a:solidFill>
@@ -10474,7 +11241,7 @@
               </a:ln>
               <a:extLst>
                 <a:ext uri="{91240B29-F687-4f45-9708-019B960494DF}">
-                  <a14:hiddenLine xmlns:a14="http://schemas.microsoft.com/office/drawing/2010/main" xmlns="" w="9525">
+                  <a14:hiddenLine xmlns="" xmlns:a14="http://schemas.microsoft.com/office/drawing/2010/main" w="9525">
                     <a:solidFill>
                       <a:srgbClr val="000000"/>
                     </a:solidFill>
@@ -10536,7 +11303,7 @@
               </a:ln>
               <a:extLst>
                 <a:ext uri="{91240B29-F687-4f45-9708-019B960494DF}">
-                  <a14:hiddenLine xmlns:a14="http://schemas.microsoft.com/office/drawing/2010/main" xmlns="" w="9525">
+                  <a14:hiddenLine xmlns="" xmlns:a14="http://schemas.microsoft.com/office/drawing/2010/main" w="9525">
                     <a:solidFill>
                       <a:srgbClr val="000000"/>
                     </a:solidFill>
@@ -10598,7 +11365,7 @@
               </a:ln>
               <a:extLst>
                 <a:ext uri="{91240B29-F687-4f45-9708-019B960494DF}">
-                  <a14:hiddenLine xmlns:a14="http://schemas.microsoft.com/office/drawing/2010/main" xmlns="" w="9525">
+                  <a14:hiddenLine xmlns="" xmlns:a14="http://schemas.microsoft.com/office/drawing/2010/main" w="9525">
                     <a:solidFill>
                       <a:srgbClr val="000000"/>
                     </a:solidFill>
@@ -10688,7 +11455,7 @@
               </a:ln>
               <a:extLst>
                 <a:ext uri="{91240B29-F687-4f45-9708-019B960494DF}">
-                  <a14:hiddenLine xmlns:a14="http://schemas.microsoft.com/office/drawing/2010/main" xmlns="" w="9525">
+                  <a14:hiddenLine xmlns="" xmlns:a14="http://schemas.microsoft.com/office/drawing/2010/main" w="9525">
                     <a:solidFill>
                       <a:srgbClr val="000000"/>
                     </a:solidFill>
@@ -10722,7 +11489,7 @@
               </a:ln>
               <a:extLst>
                 <a:ext uri="{91240B29-F687-4f45-9708-019B960494DF}">
-                  <a14:hiddenLine xmlns:a14="http://schemas.microsoft.com/office/drawing/2010/main" xmlns="" w="9525">
+                  <a14:hiddenLine xmlns="" xmlns:a14="http://schemas.microsoft.com/office/drawing/2010/main" w="9525">
                     <a:solidFill>
                       <a:srgbClr val="000000"/>
                     </a:solidFill>
@@ -10787,7 +11554,7 @@
               </a:ln>
               <a:extLst>
                 <a:ext uri="{91240B29-F687-4f45-9708-019B960494DF}">
-                  <a14:hiddenLine xmlns:a14="http://schemas.microsoft.com/office/drawing/2010/main" xmlns="" w="9525">
+                  <a14:hiddenLine xmlns="" xmlns:a14="http://schemas.microsoft.com/office/drawing/2010/main" w="9525">
                     <a:solidFill>
                       <a:srgbClr val="000000"/>
                     </a:solidFill>
@@ -10877,7 +11644,7 @@
               </a:ln>
               <a:extLst>
                 <a:ext uri="{91240B29-F687-4f45-9708-019B960494DF}">
-                  <a14:hiddenLine xmlns:a14="http://schemas.microsoft.com/office/drawing/2010/main" xmlns="" w="9525">
+                  <a14:hiddenLine xmlns="" xmlns:a14="http://schemas.microsoft.com/office/drawing/2010/main" w="9525">
                     <a:solidFill>
                       <a:srgbClr val="000000"/>
                     </a:solidFill>
@@ -10939,7 +11706,7 @@
               </a:ln>
               <a:extLst>
                 <a:ext uri="{91240B29-F687-4f45-9708-019B960494DF}">
-                  <a14:hiddenLine xmlns:a14="http://schemas.microsoft.com/office/drawing/2010/main" xmlns="" w="9525">
+                  <a14:hiddenLine xmlns="" xmlns:a14="http://schemas.microsoft.com/office/drawing/2010/main" w="9525">
                     <a:solidFill>
                       <a:srgbClr val="000000"/>
                     </a:solidFill>
@@ -11029,7 +11796,7 @@
               </a:ln>
               <a:extLst>
                 <a:ext uri="{91240B29-F687-4f45-9708-019B960494DF}">
-                  <a14:hiddenLine xmlns:a14="http://schemas.microsoft.com/office/drawing/2010/main" xmlns="" w="9525">
+                  <a14:hiddenLine xmlns="" xmlns:a14="http://schemas.microsoft.com/office/drawing/2010/main" w="9525">
                     <a:solidFill>
                       <a:srgbClr val="000000"/>
                     </a:solidFill>
@@ -11094,7 +11861,7 @@
               </a:ln>
               <a:extLst>
                 <a:ext uri="{91240B29-F687-4f45-9708-019B960494DF}">
-                  <a14:hiddenLine xmlns:a14="http://schemas.microsoft.com/office/drawing/2010/main" xmlns="" w="9525">
+                  <a14:hiddenLine xmlns="" xmlns:a14="http://schemas.microsoft.com/office/drawing/2010/main" w="9525">
                     <a:solidFill>
                       <a:srgbClr val="000000"/>
                     </a:solidFill>
@@ -11156,7 +11923,7 @@
               </a:ln>
               <a:extLst>
                 <a:ext uri="{91240B29-F687-4f45-9708-019B960494DF}">
-                  <a14:hiddenLine xmlns:a14="http://schemas.microsoft.com/office/drawing/2010/main" xmlns="" w="9525">
+                  <a14:hiddenLine xmlns="" xmlns:a14="http://schemas.microsoft.com/office/drawing/2010/main" w="9525">
                     <a:solidFill>
                       <a:srgbClr val="000000"/>
                     </a:solidFill>
@@ -11246,7 +12013,7 @@
               </a:ln>
               <a:extLst>
                 <a:ext uri="{91240B29-F687-4f45-9708-019B960494DF}">
-                  <a14:hiddenLine xmlns:a14="http://schemas.microsoft.com/office/drawing/2010/main" xmlns="" w="9525">
+                  <a14:hiddenLine xmlns="" xmlns:a14="http://schemas.microsoft.com/office/drawing/2010/main" w="9525">
                     <a:solidFill>
                       <a:srgbClr val="000000"/>
                     </a:solidFill>
@@ -11336,7 +12103,7 @@
               </a:ln>
               <a:extLst>
                 <a:ext uri="{91240B29-F687-4f45-9708-019B960494DF}">
-                  <a14:hiddenLine xmlns:a14="http://schemas.microsoft.com/office/drawing/2010/main" xmlns="" w="9525">
+                  <a14:hiddenLine xmlns="" xmlns:a14="http://schemas.microsoft.com/office/drawing/2010/main" w="9525">
                     <a:solidFill>
                       <a:srgbClr val="000000"/>
                     </a:solidFill>
@@ -11401,7 +12168,7 @@
               </a:ln>
               <a:extLst>
                 <a:ext uri="{91240B29-F687-4f45-9708-019B960494DF}">
-                  <a14:hiddenLine xmlns:a14="http://schemas.microsoft.com/office/drawing/2010/main" xmlns="" w="9525">
+                  <a14:hiddenLine xmlns="" xmlns:a14="http://schemas.microsoft.com/office/drawing/2010/main" w="9525">
                     <a:solidFill>
                       <a:srgbClr val="000000"/>
                     </a:solidFill>
@@ -11521,7 +12288,7 @@
               </a:ln>
               <a:extLst>
                 <a:ext uri="{91240B29-F687-4f45-9708-019B960494DF}">
-                  <a14:hiddenLine xmlns:a14="http://schemas.microsoft.com/office/drawing/2010/main" xmlns="" w="9525">
+                  <a14:hiddenLine xmlns="" xmlns:a14="http://schemas.microsoft.com/office/drawing/2010/main" w="9525">
                     <a:solidFill>
                       <a:srgbClr val="000000"/>
                     </a:solidFill>
@@ -11619,7 +12386,7 @@
               </a:ln>
               <a:extLst>
                 <a:ext uri="{91240B29-F687-4f45-9708-019B960494DF}">
-                  <a14:hiddenLine xmlns:a14="http://schemas.microsoft.com/office/drawing/2010/main" xmlns="" w="9525">
+                  <a14:hiddenLine xmlns="" xmlns:a14="http://schemas.microsoft.com/office/drawing/2010/main" w="9525">
                     <a:solidFill>
                       <a:srgbClr val="000000"/>
                     </a:solidFill>
@@ -11734,7 +12501,7 @@
               </a:ln>
               <a:extLst>
                 <a:ext uri="{91240B29-F687-4f45-9708-019B960494DF}">
-                  <a14:hiddenLine xmlns:a14="http://schemas.microsoft.com/office/drawing/2010/main" xmlns="" w="9525">
+                  <a14:hiddenLine xmlns="" xmlns:a14="http://schemas.microsoft.com/office/drawing/2010/main" w="9525">
                     <a:solidFill>
                       <a:srgbClr val="000000"/>
                     </a:solidFill>
@@ -11824,7 +12591,7 @@
               </a:ln>
               <a:extLst>
                 <a:ext uri="{91240B29-F687-4f45-9708-019B960494DF}">
-                  <a14:hiddenLine xmlns:a14="http://schemas.microsoft.com/office/drawing/2010/main" xmlns="" w="9525">
+                  <a14:hiddenLine xmlns="" xmlns:a14="http://schemas.microsoft.com/office/drawing/2010/main" w="9525">
                     <a:solidFill>
                       <a:srgbClr val="000000"/>
                     </a:solidFill>
@@ -11889,7 +12656,7 @@
               </a:ln>
               <a:extLst>
                 <a:ext uri="{91240B29-F687-4f45-9708-019B960494DF}">
-                  <a14:hiddenLine xmlns:a14="http://schemas.microsoft.com/office/drawing/2010/main" xmlns="" w="9525">
+                  <a14:hiddenLine xmlns="" xmlns:a14="http://schemas.microsoft.com/office/drawing/2010/main" w="9525">
                     <a:solidFill>
                       <a:srgbClr val="000000"/>
                     </a:solidFill>
@@ -11979,7 +12746,7 @@
               </a:ln>
               <a:extLst>
                 <a:ext uri="{91240B29-F687-4f45-9708-019B960494DF}">
-                  <a14:hiddenLine xmlns:a14="http://schemas.microsoft.com/office/drawing/2010/main" xmlns="" w="9525">
+                  <a14:hiddenLine xmlns="" xmlns:a14="http://schemas.microsoft.com/office/drawing/2010/main" w="9525">
                     <a:solidFill>
                       <a:srgbClr val="000000"/>
                     </a:solidFill>
@@ -12047,7 +12814,7 @@
               </a:ln>
               <a:extLst>
                 <a:ext uri="{91240B29-F687-4f45-9708-019B960494DF}">
-                  <a14:hiddenLine xmlns:a14="http://schemas.microsoft.com/office/drawing/2010/main" xmlns="" w="9525">
+                  <a14:hiddenLine xmlns="" xmlns:a14="http://schemas.microsoft.com/office/drawing/2010/main" w="9525">
                     <a:solidFill>
                       <a:srgbClr val="000000"/>
                     </a:solidFill>
@@ -12137,7 +12904,7 @@
               </a:ln>
               <a:extLst>
                 <a:ext uri="{91240B29-F687-4f45-9708-019B960494DF}">
-                  <a14:hiddenLine xmlns:a14="http://schemas.microsoft.com/office/drawing/2010/main" xmlns="" w="9525">
+                  <a14:hiddenLine xmlns="" xmlns:a14="http://schemas.microsoft.com/office/drawing/2010/main" w="9525">
                     <a:solidFill>
                       <a:srgbClr val="000000"/>
                     </a:solidFill>
@@ -12205,7 +12972,7 @@
               </a:ln>
               <a:extLst>
                 <a:ext uri="{91240B29-F687-4f45-9708-019B960494DF}">
-                  <a14:hiddenLine xmlns:a14="http://schemas.microsoft.com/office/drawing/2010/main" xmlns="" w="9525">
+                  <a14:hiddenLine xmlns="" xmlns:a14="http://schemas.microsoft.com/office/drawing/2010/main" w="9525">
                     <a:solidFill>
                       <a:srgbClr val="000000"/>
                     </a:solidFill>
@@ -12295,7 +13062,7 @@
               </a:ln>
               <a:extLst>
                 <a:ext uri="{91240B29-F687-4f45-9708-019B960494DF}">
-                  <a14:hiddenLine xmlns:a14="http://schemas.microsoft.com/office/drawing/2010/main" xmlns="" w="9525">
+                  <a14:hiddenLine xmlns="" xmlns:a14="http://schemas.microsoft.com/office/drawing/2010/main" w="9525">
                     <a:solidFill>
                       <a:srgbClr val="000000"/>
                     </a:solidFill>
@@ -12329,7 +13096,7 @@
               </a:ln>
               <a:extLst>
                 <a:ext uri="{91240B29-F687-4f45-9708-019B960494DF}">
-                  <a14:hiddenLine xmlns:a14="http://schemas.microsoft.com/office/drawing/2010/main" xmlns="" w="9525">
+                  <a14:hiddenLine xmlns="" xmlns:a14="http://schemas.microsoft.com/office/drawing/2010/main" w="9525">
                     <a:solidFill>
                       <a:srgbClr val="000000"/>
                     </a:solidFill>
@@ -12469,7 +13236,7 @@
           <a:p>
             <a:fld id="{5B11F235-42AF-49D3-AEEC-F57B10BE23B5}" type="datetimeFigureOut">
               <a:rPr lang="bg-BG" smtClean="0"/>
-              <a:t>13.5.2025 г.</a:t>
+              <a:t>14.5.2025 г.</a:t>
             </a:fld>
             <a:endParaRPr lang="bg-BG"/>
           </a:p>
@@ -13067,6 +13834,13 @@
   <p:clrMapOvr>
     <a:masterClrMapping/>
   </p:clrMapOvr>
+  <p:timing>
+    <p:tnLst>
+      <p:par>
+        <p:cTn id="1" dur="indefinite" restart="never" nodeType="tmRoot"/>
+      </p:par>
+    </p:tnLst>
+  </p:timing>
 </p:sld>
 </file>
 
@@ -13143,6 +13917,13 @@
   <p:clrMapOvr>
     <a:masterClrMapping/>
   </p:clrMapOvr>
+  <p:timing>
+    <p:tnLst>
+      <p:par>
+        <p:cTn id="1" dur="indefinite" restart="never" nodeType="tmRoot"/>
+      </p:par>
+    </p:tnLst>
+  </p:timing>
 </p:sld>
 </file>
 
@@ -13170,7 +13951,7 @@
             <a:spLocks noGrp="1"/>
           </p:cNvSpPr>
           <p:nvPr>
-            <p:ph type="ctrTitle"/>
+            <p:ph type="title"/>
           </p:nvPr>
         </p:nvSpPr>
         <p:spPr/>
@@ -13205,19 +13986,19 @@
             <a:spLocks noGrp="1"/>
           </p:cNvSpPr>
           <p:nvPr>
-            <p:ph type="subTitle" idx="1"/>
+            <p:ph idx="1"/>
           </p:nvPr>
         </p:nvSpPr>
         <p:spPr/>
         <p:txBody>
           <a:bodyPr>
-            <a:normAutofit fontScale="85000" lnSpcReduction="20000"/>
+            <a:normAutofit/>
           </a:bodyPr>
           <a:lstStyle/>
           <a:p>
             <a:r>
               <a:rPr lang="bg-BG" dirty="0"/>
-              <a:t>Проектът цели изграждането на надеждна сървърна среда за деплой на уеб приложение. Основната мотивация е необходимостта от практическо овладяване на съвременни технологии и методи, които да осигурят стабилност, сигурност и лесна поддръжка при работа с уеб приложения и техните сървъри.</a:t>
+              <a:t/>
             </a:r>
             <a:br>
               <a:rPr lang="bg-BG" dirty="0"/>
@@ -13226,6 +14007,47 @@
           </a:p>
         </p:txBody>
       </p:sp>
+      <p:pic>
+        <p:nvPicPr>
+          <p:cNvPr id="1028" name="Picture 4" descr="Recommended Server Room Temperature and Humidity | Network Wrangler – Tech  Blog"/>
+          <p:cNvPicPr>
+            <a:picLocks noChangeAspect="1" noChangeArrowheads="1"/>
+          </p:cNvPicPr>
+          <p:nvPr/>
+        </p:nvPicPr>
+        <p:blipFill>
+          <a:blip r:embed="rId3">
+            <a:extLst>
+              <a:ext uri="{28A0092B-C50C-407E-A947-70E740481C1C}">
+                <a14:useLocalDpi xmlns:a14="http://schemas.microsoft.com/office/drawing/2010/main" val="0"/>
+              </a:ext>
+            </a:extLst>
+          </a:blip>
+          <a:srcRect/>
+          <a:stretch>
+            <a:fillRect/>
+          </a:stretch>
+        </p:blipFill>
+        <p:spPr bwMode="auto">
+          <a:xfrm>
+            <a:off x="1773382" y="1495713"/>
+            <a:ext cx="8341302" cy="4687813"/>
+          </a:xfrm>
+          <a:prstGeom prst="rect">
+            <a:avLst/>
+          </a:prstGeom>
+          <a:noFill/>
+          <a:extLst>
+            <a:ext uri="{909E8E84-426E-40DD-AFC4-6F175D3DCCD1}">
+              <a14:hiddenFill xmlns:a14="http://schemas.microsoft.com/office/drawing/2010/main">
+                <a:solidFill>
+                  <a:srgbClr val="FFFFFF"/>
+                </a:solidFill>
+              </a14:hiddenFill>
+            </a:ext>
+          </a:extLst>
+        </p:spPr>
+      </p:pic>
     </p:spTree>
     <p:extLst>
       <p:ext uri="{BB962C8B-B14F-4D97-AF65-F5344CB8AC3E}">
@@ -13236,6 +14058,13 @@
   <p:clrMapOvr>
     <a:masterClrMapping/>
   </p:clrMapOvr>
+  <p:timing>
+    <p:tnLst>
+      <p:par>
+        <p:cTn id="1" dur="indefinite" restart="never" nodeType="tmRoot"/>
+      </p:par>
+    </p:tnLst>
+  </p:timing>
 </p:sld>
 </file>
 
@@ -13269,7 +14098,7 @@
         <p:spPr/>
         <p:txBody>
           <a:bodyPr>
-            <a:normAutofit fontScale="90000"/>
+            <a:normAutofit/>
           </a:bodyPr>
           <a:lstStyle/>
           <a:p>
@@ -13277,7 +14106,6 @@
               <a:rPr lang="bg-BG" dirty="0"/>
               <a:t>Исторически преглед и значимост на уеб технологиите</a:t>
             </a:r>
-            <a:endParaRPr lang="bg-BG" dirty="0"/>
           </a:p>
         </p:txBody>
       </p:sp>
@@ -13292,46 +14120,21 @@
           </p:nvPr>
         </p:nvPicPr>
         <p:blipFill>
-          <a:blip r:embed="rId2"/>
+          <a:blip r:embed="rId3"/>
           <a:stretch>
             <a:fillRect/>
           </a:stretch>
         </p:blipFill>
         <p:spPr>
           <a:xfrm>
-            <a:off x="5156200" y="963465"/>
-            <a:ext cx="5891213" cy="4456407"/>
+            <a:off x="1597892" y="1862609"/>
+            <a:ext cx="7758544" cy="4381173"/>
           </a:xfrm>
           <a:prstGeom prst="rect">
             <a:avLst/>
           </a:prstGeom>
         </p:spPr>
       </p:pic>
-      <p:sp>
-        <p:nvSpPr>
-          <p:cNvPr id="4" name="Text Placeholder 3"/>
-          <p:cNvSpPr>
-            <a:spLocks noGrp="1"/>
-          </p:cNvSpPr>
-          <p:nvPr>
-            <p:ph type="body" sz="half" idx="2"/>
-          </p:nvPr>
-        </p:nvSpPr>
-        <p:spPr/>
-        <p:txBody>
-          <a:bodyPr/>
-          <a:lstStyle/>
-          <a:p>
-            <a:r>
-              <a:rPr lang="bg-BG" dirty="0"/>
-              <a:t>Във встъпителната теория се разглежда развитието на интернет и уеб технологиите — от първите уеб сървъри и статични страници до съвременните динамични уеб приложения. Тук се подчертава ролята на операционните системи и софтуерните решения с отворен код, които помагат за тяхното усъвършенстване и масово приложение.</a:t>
-            </a:r>
-          </a:p>
-          <a:p>
-            <a:endParaRPr lang="bg-BG" dirty="0"/>
-          </a:p>
-        </p:txBody>
-      </p:sp>
     </p:spTree>
     <p:extLst>
       <p:ext uri="{BB962C8B-B14F-4D97-AF65-F5344CB8AC3E}">
@@ -13342,6 +14145,13 @@
   <p:clrMapOvr>
     <a:masterClrMapping/>
   </p:clrMapOvr>
+  <p:timing>
+    <p:tnLst>
+      <p:par>
+        <p:cTn id="1" dur="indefinite" restart="never" nodeType="tmRoot"/>
+      </p:par>
+    </p:tnLst>
+  </p:timing>
 </p:sld>
 </file>
 
@@ -13375,7 +14185,7 @@
         <p:spPr/>
         <p:txBody>
           <a:bodyPr>
-            <a:normAutofit fontScale="90000"/>
+            <a:normAutofit/>
           </a:bodyPr>
           <a:lstStyle/>
           <a:p>
@@ -13383,7 +14193,6 @@
               <a:rPr lang="bg-BG" dirty="0"/>
               <a:t>Избор и характеристика на операционна система Ubuntu Server</a:t>
             </a:r>
-            <a:endParaRPr lang="bg-BG" dirty="0"/>
           </a:p>
         </p:txBody>
       </p:sp>
@@ -13398,46 +14207,21 @@
           </p:nvPr>
         </p:nvPicPr>
         <p:blipFill>
-          <a:blip r:embed="rId2"/>
+          <a:blip r:embed="rId3"/>
           <a:stretch>
             <a:fillRect/>
           </a:stretch>
         </p:blipFill>
         <p:spPr>
           <a:xfrm>
-            <a:off x="5168950" y="1254034"/>
-            <a:ext cx="5133703" cy="3391657"/>
+            <a:off x="1801091" y="1794111"/>
+            <a:ext cx="7481453" cy="4332520"/>
           </a:xfrm>
           <a:prstGeom prst="rect">
             <a:avLst/>
           </a:prstGeom>
         </p:spPr>
       </p:pic>
-      <p:sp>
-        <p:nvSpPr>
-          <p:cNvPr id="4" name="Text Placeholder 3"/>
-          <p:cNvSpPr>
-            <a:spLocks noGrp="1"/>
-          </p:cNvSpPr>
-          <p:nvPr>
-            <p:ph type="body" sz="half" idx="2"/>
-          </p:nvPr>
-        </p:nvSpPr>
-        <p:spPr/>
-        <p:txBody>
-          <a:bodyPr/>
-          <a:lstStyle/>
-          <a:p>
-            <a:r>
-              <a:rPr lang="bg-BG" dirty="0"/>
-              <a:t>Ubuntu Server е избран поради своята стабилност, лесна интеграция, добра документация и широка общност. Тази ОС осигурява визия за надеждна и поддържана сървърна платформа, върху която могат да се изпълняват уеб сървъри и бази данни, оптимизирана е за работа през команден ред и поддържа автентичност и сигурност.</a:t>
-            </a:r>
-          </a:p>
-          <a:p>
-            <a:endParaRPr lang="bg-BG" dirty="0"/>
-          </a:p>
-        </p:txBody>
-      </p:sp>
     </p:spTree>
     <p:extLst>
       <p:ext uri="{BB962C8B-B14F-4D97-AF65-F5344CB8AC3E}">
@@ -13448,6 +14232,13 @@
   <p:clrMapOvr>
     <a:masterClrMapping/>
   </p:clrMapOvr>
+  <p:timing>
+    <p:tnLst>
+      <p:par>
+        <p:cTn id="1" dur="indefinite" restart="never" nodeType="tmRoot"/>
+      </p:par>
+    </p:tnLst>
+  </p:timing>
 </p:sld>
 </file>
 
@@ -13487,39 +14278,25 @@
               <a:rPr lang="bg-BG" dirty="0"/>
               <a:t>Уеб сървър Nginx и WSGI сървър Gunicorn</a:t>
             </a:r>
-            <a:endParaRPr lang="bg-BG" dirty="0"/>
           </a:p>
         </p:txBody>
       </p:sp>
       <p:sp>
         <p:nvSpPr>
-          <p:cNvPr id="3" name="Text Placeholder 2"/>
+          <p:cNvPr id="4" name="Content Placeholder 3"/>
           <p:cNvSpPr>
             <a:spLocks noGrp="1"/>
           </p:cNvSpPr>
           <p:nvPr>
-            <p:ph type="body" idx="1"/>
-          </p:nvPr>
-        </p:nvSpPr>
-        <p:spPr>
-          <a:xfrm>
-            <a:off x="1370019" y="2249486"/>
-            <a:ext cx="9115101" cy="615634"/>
-          </a:xfrm>
-        </p:spPr>
+            <p:ph sz="half" idx="1"/>
+          </p:nvPr>
+        </p:nvSpPr>
+        <p:spPr/>
         <p:txBody>
-          <a:bodyPr>
-            <a:noAutofit/>
-          </a:bodyPr>
+          <a:bodyPr/>
           <a:lstStyle/>
           <a:p>
-            <a:r>
-              <a:rPr lang="bg-BG" sz="1300" dirty="0"/>
-              <a:t>Nginx играе ролята на обратен прокси и уеб сървър, който обслужва заявки ефективно и с минимално натоварване на сървъра. Gunicorn е WSGI сървър, който осигурява интерфейс между Python уеб приложението (Django) и уеб сървъра. Този двоен модел подобрява производителността, позволява асинхронна обработка и гъвкавост при настройките за натоварване.</a:t>
-            </a:r>
-          </a:p>
-          <a:p>
-            <a:endParaRPr lang="bg-BG" sz="1300" dirty="0"/>
+            <a:endParaRPr lang="bg-BG"/>
           </a:p>
         </p:txBody>
       </p:sp>
@@ -13531,51 +14308,6 @@
           </p:cNvPicPr>
           <p:nvPr>
             <p:ph sz="half" idx="2"/>
-          </p:nvPr>
-        </p:nvPicPr>
-        <p:blipFill>
-          <a:blip r:embed="rId2"/>
-          <a:stretch>
-            <a:fillRect/>
-          </a:stretch>
-        </p:blipFill>
-        <p:spPr>
-          <a:xfrm>
-            <a:off x="1449382" y="3073400"/>
-            <a:ext cx="4262448" cy="2717800"/>
-          </a:xfrm>
-          <a:prstGeom prst="rect">
-            <a:avLst/>
-          </a:prstGeom>
-        </p:spPr>
-      </p:pic>
-      <p:sp>
-        <p:nvSpPr>
-          <p:cNvPr id="5" name="Text Placeholder 4"/>
-          <p:cNvSpPr>
-            <a:spLocks noGrp="1"/>
-          </p:cNvSpPr>
-          <p:nvPr>
-            <p:ph type="body" sz="quarter" idx="3"/>
-          </p:nvPr>
-        </p:nvSpPr>
-        <p:spPr/>
-        <p:txBody>
-          <a:bodyPr/>
-          <a:lstStyle/>
-          <a:p>
-            <a:endParaRPr lang="bg-BG" dirty="0"/>
-          </a:p>
-        </p:txBody>
-      </p:sp>
-      <p:pic>
-        <p:nvPicPr>
-          <p:cNvPr id="9" name="Content Placeholder 8"/>
-          <p:cNvPicPr>
-            <a:picLocks noGrp="1" noChangeAspect="1"/>
-          </p:cNvPicPr>
-          <p:nvPr>
-            <p:ph sz="quarter" idx="4"/>
           </p:nvPr>
         </p:nvPicPr>
         <p:blipFill>
@@ -13586,8 +14318,34 @@
         </p:blipFill>
         <p:spPr>
           <a:xfrm>
-            <a:off x="6172200" y="3108321"/>
-            <a:ext cx="4875213" cy="2647958"/>
+            <a:off x="5991836" y="2154504"/>
+            <a:ext cx="5544251" cy="3731678"/>
+          </a:xfrm>
+          <a:prstGeom prst="rect">
+            <a:avLst/>
+          </a:prstGeom>
+        </p:spPr>
+      </p:pic>
+      <p:pic>
+        <p:nvPicPr>
+          <p:cNvPr id="9" name="Content Placeholder 8"/>
+          <p:cNvPicPr>
+            <a:picLocks noGrp="1" noChangeAspect="1"/>
+          </p:cNvPicPr>
+          <p:nvPr>
+            <p:ph sz="quarter" idx="4294967295"/>
+          </p:nvPr>
+        </p:nvPicPr>
+        <p:blipFill>
+          <a:blip r:embed="rId4"/>
+          <a:stretch>
+            <a:fillRect/>
+          </a:stretch>
+        </p:blipFill>
+        <p:spPr>
+          <a:xfrm>
+            <a:off x="1045294" y="2154504"/>
+            <a:ext cx="5027613" cy="3731678"/>
           </a:xfrm>
           <a:prstGeom prst="rect">
             <a:avLst/>
@@ -13604,6 +14362,13 @@
   <p:clrMapOvr>
     <a:masterClrMapping/>
   </p:clrMapOvr>
+  <p:timing>
+    <p:tnLst>
+      <p:par>
+        <p:cTn id="1" dur="indefinite" restart="never" nodeType="tmRoot"/>
+      </p:par>
+    </p:tnLst>
+  </p:timing>
 </p:sld>
 </file>
 
@@ -13652,31 +14417,6 @@
           </a:p>
         </p:txBody>
       </p:sp>
-      <p:sp>
-        <p:nvSpPr>
-          <p:cNvPr id="4" name="Text Placeholder 3"/>
-          <p:cNvSpPr>
-            <a:spLocks noGrp="1"/>
-          </p:cNvSpPr>
-          <p:nvPr>
-            <p:ph type="body" sz="half" idx="2"/>
-          </p:nvPr>
-        </p:nvSpPr>
-        <p:spPr/>
-        <p:txBody>
-          <a:bodyPr/>
-          <a:lstStyle/>
-          <a:p>
-            <a:r>
-              <a:rPr lang="bg-BG" dirty="0"/>
-              <a:t>Python е избран като език със своята ясна синтактична структура и мощни библиотеки. Django е рамка, поддържаща MVC архитектура, която осигурява отделяне на логиката, дизайна и данните. Това прави приложението по-лесно за разработка, поддръжка и разширяване, като същевременно осигурява набор от вградени функционалности като аутентификация, админ панел и ORM.</a:t>
-            </a:r>
-          </a:p>
-          <a:p>
-            <a:endParaRPr lang="bg-BG" dirty="0"/>
-          </a:p>
-        </p:txBody>
-      </p:sp>
       <p:pic>
         <p:nvPicPr>
           <p:cNvPr id="5" name="Picture Placeholder 4"/>
@@ -13684,17 +14424,20 @@
             <a:picLocks noGrp="1"/>
           </p:cNvPicPr>
           <p:nvPr>
-            <p:ph type="pic" idx="1"/>
+            <p:ph idx="1"/>
           </p:nvPr>
         </p:nvPicPr>
         <p:blipFill>
-          <a:blip r:embed="rId2"/>
-          <a:srcRect l="28073" r="28073"/>
+          <a:blip r:embed="rId3"/>
           <a:stretch>
             <a:fillRect/>
           </a:stretch>
         </p:blipFill>
         <p:spPr>
+          <a:xfrm>
+            <a:off x="1514763" y="1625599"/>
+            <a:ext cx="8201891" cy="4655127"/>
+          </a:xfrm>
           <a:prstGeom prst="rect">
             <a:avLst/>
           </a:prstGeom>
@@ -13717,6 +14460,13 @@
   <p:clrMapOvr>
     <a:masterClrMapping/>
   </p:clrMapOvr>
+  <p:timing>
+    <p:tnLst>
+      <p:par>
+        <p:cTn id="1" dur="indefinite" restart="never" nodeType="tmRoot"/>
+      </p:par>
+    </p:tnLst>
+  </p:timing>
 </p:sld>
 </file>
 
@@ -13750,7 +14500,7 @@
         <p:spPr/>
         <p:txBody>
           <a:bodyPr>
-            <a:normAutofit fontScale="90000"/>
+            <a:normAutofit/>
           </a:bodyPr>
           <a:lstStyle/>
           <a:p>
@@ -13780,44 +14530,21 @@
           </p:nvPr>
         </p:nvPicPr>
         <p:blipFill>
-          <a:blip r:embed="rId2"/>
+          <a:blip r:embed="rId3"/>
           <a:stretch>
             <a:fillRect/>
           </a:stretch>
         </p:blipFill>
         <p:spPr>
           <a:xfrm>
-            <a:off x="5169375" y="365759"/>
-            <a:ext cx="6116933" cy="5549632"/>
+            <a:off x="1064404" y="1487055"/>
+            <a:ext cx="9344977" cy="4812145"/>
           </a:xfrm>
           <a:prstGeom prst="rect">
             <a:avLst/>
           </a:prstGeom>
         </p:spPr>
       </p:pic>
-      <p:sp>
-        <p:nvSpPr>
-          <p:cNvPr id="4" name="Text Placeholder 3"/>
-          <p:cNvSpPr>
-            <a:spLocks noGrp="1"/>
-          </p:cNvSpPr>
-          <p:nvPr>
-            <p:ph type="body" sz="half" idx="2"/>
-          </p:nvPr>
-        </p:nvSpPr>
-        <p:spPr/>
-        <p:txBody>
-          <a:bodyPr/>
-          <a:lstStyle/>
-          <a:p>
-            <a:r>
-              <a:rPr lang="bg-BG" dirty="0"/>
-              <a:t>MySQL предоставя структурирана и надеждна база за съхранение и извличане на данни, необходима за функционирането на приложението. PhpMyAdmin е графичен уеб интерфейс, който улеснява администрирането на базата данни, позволява лесно управление на таблици, потребители и резервни копия, което е важно за практическото управление на сървърната среда.</a:t>
-            </a:r>
-            <a:endParaRPr lang="bg-BG" dirty="0"/>
-          </a:p>
-        </p:txBody>
-      </p:sp>
     </p:spTree>
     <p:extLst>
       <p:ext uri="{BB962C8B-B14F-4D97-AF65-F5344CB8AC3E}">
@@ -13828,6 +14555,13 @@
   <p:clrMapOvr>
     <a:masterClrMapping/>
   </p:clrMapOvr>
+  <p:timing>
+    <p:tnLst>
+      <p:par>
+        <p:cTn id="1" dur="indefinite" restart="never" nodeType="tmRoot"/>
+      </p:par>
+    </p:tnLst>
+  </p:timing>
 </p:sld>
 </file>
 
@@ -13861,7 +14595,7 @@
         <p:spPr/>
         <p:txBody>
           <a:bodyPr>
-            <a:normAutofit fontScale="90000"/>
+            <a:normAutofit/>
           </a:bodyPr>
           <a:lstStyle/>
           <a:p>
@@ -13898,41 +14632,14 @@
         </p:blipFill>
         <p:spPr>
           <a:xfrm>
-            <a:off x="5156200" y="1669523"/>
-            <a:ext cx="5891213" cy="3044292"/>
+            <a:off x="1148287" y="1459346"/>
+            <a:ext cx="8577603" cy="4432488"/>
           </a:xfrm>
           <a:prstGeom prst="rect">
             <a:avLst/>
           </a:prstGeom>
         </p:spPr>
       </p:pic>
-      <p:sp>
-        <p:nvSpPr>
-          <p:cNvPr id="4" name="Text Placeholder 3"/>
-          <p:cNvSpPr>
-            <a:spLocks noGrp="1"/>
-          </p:cNvSpPr>
-          <p:nvPr>
-            <p:ph type="body" sz="half" idx="2"/>
-          </p:nvPr>
-        </p:nvSpPr>
-        <p:spPr/>
-        <p:txBody>
-          <a:bodyPr>
-            <a:normAutofit lnSpcReduction="10000"/>
-          </a:bodyPr>
-          <a:lstStyle/>
-          <a:p>
-            <a:r>
-              <a:rPr lang="bg-BG" dirty="0"/>
-              <a:t>Подробно се описва процесът от инсталиране на Ubuntu Server, през настройка на Nginx като прокси сървър, инсталиране и конфигуриране на Gunicorn за стартиране на Django приложението, до създаване на базата данни и настройка на phpMyAdmin. Също така е разгледано създаването на виртуална Python среда и прехвърлянето на проектните файлове чрез FTP, като се обръща внимание на правилното конфигуриране на права и сигурност.</a:t>
-            </a:r>
-          </a:p>
-          <a:p>
-            <a:endParaRPr lang="bg-BG" dirty="0"/>
-          </a:p>
-        </p:txBody>
-      </p:sp>
     </p:spTree>
     <p:extLst>
       <p:ext uri="{BB962C8B-B14F-4D97-AF65-F5344CB8AC3E}">
@@ -13943,6 +14650,13 @@
   <p:clrMapOvr>
     <a:masterClrMapping/>
   </p:clrMapOvr>
+  <p:timing>
+    <p:tnLst>
+      <p:par>
+        <p:cTn id="1" dur="indefinite" restart="never" nodeType="tmRoot"/>
+      </p:par>
+    </p:tnLst>
+  </p:timing>
 </p:sld>
 </file>
 
@@ -13982,7 +14696,6 @@
               <a:rPr lang="bg-BG" dirty="0"/>
               <a:t>Заключение и изводи</a:t>
             </a:r>
-            <a:endParaRPr lang="bg-BG" dirty="0"/>
           </a:p>
         </p:txBody>
       </p:sp>
@@ -13997,44 +14710,21 @@
           </p:nvPr>
         </p:nvPicPr>
         <p:blipFill>
-          <a:blip r:embed="rId2"/>
+          <a:blip r:embed="rId3"/>
           <a:stretch>
             <a:fillRect/>
           </a:stretch>
         </p:blipFill>
         <p:spPr>
           <a:xfrm>
-            <a:off x="5156200" y="1175657"/>
-            <a:ext cx="5891213" cy="3866605"/>
+            <a:off x="99456" y="1782618"/>
+            <a:ext cx="11224326" cy="3915371"/>
           </a:xfrm>
           <a:prstGeom prst="rect">
             <a:avLst/>
           </a:prstGeom>
         </p:spPr>
       </p:pic>
-      <p:sp>
-        <p:nvSpPr>
-          <p:cNvPr id="4" name="Text Placeholder 3"/>
-          <p:cNvSpPr>
-            <a:spLocks noGrp="1"/>
-          </p:cNvSpPr>
-          <p:nvPr>
-            <p:ph type="body" sz="half" idx="2"/>
-          </p:nvPr>
-        </p:nvSpPr>
-        <p:spPr/>
-        <p:txBody>
-          <a:bodyPr/>
-          <a:lstStyle/>
-          <a:p>
-            <a:r>
-              <a:rPr lang="bg-BG" dirty="0"/>
-              <a:t>Реализираният проект демонстрира успешно изграждане на стабилна и сигурна сървърна инфраструктура, която позволява гладко и ефективно функциониране на уеб приложения. Подчертава се значението на съобразяване с добрите практики, правилната настройка и интеграция на различните компоненти за постигане на оптимални резултати в реална работна среда.</a:t>
-            </a:r>
-            <a:endParaRPr lang="bg-BG" dirty="0"/>
-          </a:p>
-        </p:txBody>
-      </p:sp>
     </p:spTree>
     <p:extLst>
       <p:ext uri="{BB962C8B-B14F-4D97-AF65-F5344CB8AC3E}">
@@ -14045,6 +14735,13 @@
   <p:clrMapOvr>
     <a:masterClrMapping/>
   </p:clrMapOvr>
+  <p:timing>
+    <p:tnLst>
+      <p:par>
+        <p:cTn id="1" dur="indefinite" restart="never" nodeType="tmRoot"/>
+      </p:par>
+    </p:tnLst>
+  </p:timing>
 </p:sld>
 </file>
 

--- a/dr/presentation.pptx
+++ b/dr/presentation.pptx
@@ -530,34 +530,68 @@
           <a:bodyPr/>
           <a:lstStyle/>
           <a:p>
-            <a:pPr marL="0" marR="0" lvl="0" indent="0" algn="l" defTabSz="914400" rtl="0" eaLnBrk="1" fontAlgn="auto" latinLnBrk="0" hangingPunct="1">
-              <a:lnSpc>
-                <a:spcPct val="100000"/>
-              </a:lnSpc>
-              <a:spcBef>
-                <a:spcPts val="0"/>
-              </a:spcBef>
-              <a:spcAft>
-                <a:spcPts val="0"/>
-              </a:spcAft>
-              <a:buClrTx/>
-              <a:buSzTx/>
-              <a:buFontTx/>
-              <a:buNone/>
-              <a:tabLst/>
-              <a:defRPr/>
-            </a:pPr>
             <a:r>
-              <a:rPr lang="bg-BG" dirty="0" smtClean="0"/>
-              <a:t>Проектът цели изграждането на надеждна сървърна среда за деплой на уеб приложение. Основната мотивация е необходимостта от практическо овладяване на съвременни технологии и методи, които да осигурят стабилност, сигурност и лесна поддръжка при работа с уеб приложения и техните сървъри.</a:t>
+              <a:rPr lang="bg-BG" sz="1200" b="1" kern="1200" dirty="0" smtClean="0">
+                <a:solidFill>
+                  <a:schemeClr val="tx1"/>
+                </a:solidFill>
+                <a:effectLst/>
+                <a:latin typeface="+mn-lt"/>
+                <a:ea typeface="+mn-ea"/>
+                <a:cs typeface="+mn-cs"/>
+              </a:rPr>
+              <a:t>Уважаема г-жо Директор,  Уважаема комисия, уважаеми гости.</a:t>
             </a:r>
-            <a:br>
-              <a:rPr lang="bg-BG" dirty="0" smtClean="0"/>
-            </a:br>
-            <a:endParaRPr lang="bg-BG" dirty="0" smtClean="0"/>
-          </a:p>
-          <a:p>
-            <a:endParaRPr lang="bg-BG" dirty="0"/>
+            <a:endParaRPr lang="bg-BG" sz="1200" kern="1200" dirty="0" smtClean="0">
+              <a:solidFill>
+                <a:schemeClr val="tx1"/>
+              </a:solidFill>
+              <a:effectLst/>
+              <a:latin typeface="+mn-lt"/>
+              <a:ea typeface="+mn-ea"/>
+              <a:cs typeface="+mn-cs"/>
+            </a:endParaRPr>
+          </a:p>
+          <a:p>
+            <a:r>
+              <a:rPr lang="bg-BG" sz="1200" b="1" kern="1200" dirty="0" smtClean="0">
+                <a:solidFill>
+                  <a:schemeClr val="tx1"/>
+                </a:solidFill>
+                <a:effectLst/>
+                <a:latin typeface="+mn-lt"/>
+                <a:ea typeface="+mn-ea"/>
+                <a:cs typeface="+mn-cs"/>
+              </a:rPr>
+              <a:t>Аз съм Георги Бистрин. </a:t>
+            </a:r>
+            <a:r>
+              <a:rPr lang="bg-BG" sz="1200" b="1" kern="1200" smtClean="0">
+                <a:solidFill>
+                  <a:schemeClr val="tx1"/>
+                </a:solidFill>
+                <a:effectLst/>
+                <a:latin typeface="+mn-lt"/>
+                <a:ea typeface="+mn-ea"/>
+                <a:cs typeface="+mn-cs"/>
+              </a:rPr>
+              <a:t>Темата на моят дипломен проект е „</a:t>
+            </a:r>
+            <a:r>
+              <a:rPr lang="bg-BG" sz="1200" kern="1200" smtClean="0">
+                <a:solidFill>
+                  <a:schemeClr val="tx1"/>
+                </a:solidFill>
+                <a:effectLst/>
+                <a:latin typeface="+mn-lt"/>
+                <a:ea typeface="+mn-ea"/>
+                <a:cs typeface="+mn-cs"/>
+              </a:rPr>
+              <a:t>Качване и конфигуриране на уеб приложение върху реален сървър“</a:t>
+            </a:r>
+          </a:p>
+          <a:p>
+            <a:endParaRPr lang="bg-BG"/>
           </a:p>
         </p:txBody>
       </p:sp>
@@ -578,7 +612,7 @@
           <a:p>
             <a:fld id="{F63C9E35-DB9A-436C-8DE0-D3E82DBFC18A}" type="slidenum">
               <a:rPr lang="bg-BG" smtClean="0"/>
-              <a:t>2</a:t>
+              <a:t>1</a:t>
             </a:fld>
             <a:endParaRPr lang="bg-BG"/>
           </a:p>
@@ -587,7 +621,7 @@
     </p:spTree>
     <p:extLst>
       <p:ext uri="{BB962C8B-B14F-4D97-AF65-F5344CB8AC3E}">
-        <p14:creationId xmlns:p14="http://schemas.microsoft.com/office/powerpoint/2010/main" val="3492968734"/>
+        <p14:creationId xmlns:p14="http://schemas.microsoft.com/office/powerpoint/2010/main" val="1513968215"/>
       </p:ext>
     </p:extLst>
   </p:cSld>
@@ -660,8 +694,12 @@
             </a:pPr>
             <a:r>
               <a:rPr lang="bg-BG" dirty="0" smtClean="0"/>
-              <a:t>Във встъпителната теория се разглежда развитието на интернет и уеб технологиите — от първите уеб сървъри и статични страници до съвременните динамични уеб приложения. Тук се подчертава ролята на операционните системи и софтуерните решения с отворен код, които помагат за тяхното усъвършенстване и масово приложение.</a:t>
+              <a:t>Проектът цели изграждането на надеждна сървърна среда за деплой на уеб приложение. Основната мотивация е необходимостта от практическо овладяване на съвременни технологии и методи, които да осигурят стабилност, сигурност и лесна поддръжка при работа с уеб приложения и техните сървъри.</a:t>
             </a:r>
+            <a:br>
+              <a:rPr lang="bg-BG" dirty="0" smtClean="0"/>
+            </a:br>
+            <a:endParaRPr lang="bg-BG" dirty="0" smtClean="0"/>
           </a:p>
           <a:p>
             <a:endParaRPr lang="bg-BG" dirty="0"/>
@@ -685,7 +723,7 @@
           <a:p>
             <a:fld id="{F63C9E35-DB9A-436C-8DE0-D3E82DBFC18A}" type="slidenum">
               <a:rPr lang="bg-BG" smtClean="0"/>
-              <a:t>3</a:t>
+              <a:t>2</a:t>
             </a:fld>
             <a:endParaRPr lang="bg-BG"/>
           </a:p>
@@ -694,7 +732,7 @@
     </p:spTree>
     <p:extLst>
       <p:ext uri="{BB962C8B-B14F-4D97-AF65-F5344CB8AC3E}">
-        <p14:creationId xmlns:p14="http://schemas.microsoft.com/office/powerpoint/2010/main" val="3041346817"/>
+        <p14:creationId xmlns:p14="http://schemas.microsoft.com/office/powerpoint/2010/main" val="3492968734"/>
       </p:ext>
     </p:extLst>
   </p:cSld>
@@ -767,7 +805,7 @@
             </a:pPr>
             <a:r>
               <a:rPr lang="bg-BG" dirty="0" smtClean="0"/>
-              <a:t>Ubuntu Server е избран поради своята стабилност, лесна интеграция, добра документация и широка общност. Тази ОС осигурява визия за надеждна и поддържана сървърна платформа, върху която могат да се изпълняват уеб сървъри и бази данни, оптимизирана е за работа през команден ред и поддържа автентичност и сигурност.</a:t>
+              <a:t>Във встъпителната теория се разглежда развитието на интернет и уеб технологиите — от първите уеб сървъри и статични страници до съвременните динамични уеб приложения. Тук се подчертава ролята на операционните системи и софтуерните решения с отворен код, които помагат за тяхното усъвършенстване и масово приложение.</a:t>
             </a:r>
           </a:p>
           <a:p>
@@ -792,7 +830,7 @@
           <a:p>
             <a:fld id="{F63C9E35-DB9A-436C-8DE0-D3E82DBFC18A}" type="slidenum">
               <a:rPr lang="bg-BG" smtClean="0"/>
-              <a:t>4</a:t>
+              <a:t>3</a:t>
             </a:fld>
             <a:endParaRPr lang="bg-BG"/>
           </a:p>
@@ -801,7 +839,7 @@
     </p:spTree>
     <p:extLst>
       <p:ext uri="{BB962C8B-B14F-4D97-AF65-F5344CB8AC3E}">
-        <p14:creationId xmlns:p14="http://schemas.microsoft.com/office/powerpoint/2010/main" val="2976836851"/>
+        <p14:creationId xmlns:p14="http://schemas.microsoft.com/office/powerpoint/2010/main" val="3041346817"/>
       </p:ext>
     </p:extLst>
   </p:cSld>
@@ -855,13 +893,27 @@
           <a:bodyPr/>
           <a:lstStyle/>
           <a:p>
+            <a:pPr marL="0" marR="0" lvl="0" indent="0" algn="l" defTabSz="914400" rtl="0" eaLnBrk="1" fontAlgn="auto" latinLnBrk="0" hangingPunct="1">
+              <a:lnSpc>
+                <a:spcPct val="100000"/>
+              </a:lnSpc>
+              <a:spcBef>
+                <a:spcPts val="0"/>
+              </a:spcBef>
+              <a:spcAft>
+                <a:spcPts val="0"/>
+              </a:spcAft>
+              <a:buClrTx/>
+              <a:buSzTx/>
+              <a:buFontTx/>
+              <a:buNone/>
+              <a:tabLst/>
+              <a:defRPr/>
+            </a:pPr>
             <a:r>
-              <a:rPr lang="bg-BG" sz="1200" dirty="0" smtClean="0"/>
-              <a:t>Nginx играе ролята на обратен прокси и уеб сървър, който обслужва заявки ефективно и с минимално натоварване на сървъра. Gunicorn е WSGI сървър, който осигурява интерфейс между Python уеб приложението (Django) и уеб сървъра. Този двоен модел подобрява производителността, позволява асинхронна обработка и гъвкавост при настройките за натоварване.</a:t>
+              <a:rPr lang="bg-BG" dirty="0" smtClean="0"/>
+              <a:t>Ubuntu Server е избран поради своята стабилност, лесна интеграция, добра документация и широка общност. Тази ОС осигурява визия за надеждна и поддържана сървърна платформа, върху която могат да се изпълняват уеб сървъри и бази данни, оптимизирана е за работа през команден ред и поддържа автентичност и сигурност.</a:t>
             </a:r>
-          </a:p>
-          <a:p>
-            <a:endParaRPr lang="bg-BG" sz="1200" dirty="0" smtClean="0"/>
           </a:p>
           <a:p>
             <a:endParaRPr lang="bg-BG" dirty="0"/>
@@ -885,7 +937,7 @@
           <a:p>
             <a:fld id="{F63C9E35-DB9A-436C-8DE0-D3E82DBFC18A}" type="slidenum">
               <a:rPr lang="bg-BG" smtClean="0"/>
-              <a:t>5</a:t>
+              <a:t>4</a:t>
             </a:fld>
             <a:endParaRPr lang="bg-BG"/>
           </a:p>
@@ -894,7 +946,7 @@
     </p:spTree>
     <p:extLst>
       <p:ext uri="{BB962C8B-B14F-4D97-AF65-F5344CB8AC3E}">
-        <p14:creationId xmlns:p14="http://schemas.microsoft.com/office/powerpoint/2010/main" val="2653242900"/>
+        <p14:creationId xmlns:p14="http://schemas.microsoft.com/office/powerpoint/2010/main" val="2976836851"/>
       </p:ext>
     </p:extLst>
   </p:cSld>
@@ -948,27 +1000,13 @@
           <a:bodyPr/>
           <a:lstStyle/>
           <a:p>
-            <a:pPr marL="0" marR="0" lvl="0" indent="0" algn="l" defTabSz="914400" rtl="0" eaLnBrk="1" fontAlgn="auto" latinLnBrk="0" hangingPunct="1">
-              <a:lnSpc>
-                <a:spcPct val="100000"/>
-              </a:lnSpc>
-              <a:spcBef>
-                <a:spcPts val="0"/>
-              </a:spcBef>
-              <a:spcAft>
-                <a:spcPts val="0"/>
-              </a:spcAft>
-              <a:buClrTx/>
-              <a:buSzTx/>
-              <a:buFontTx/>
-              <a:buNone/>
-              <a:tabLst/>
-              <a:defRPr/>
-            </a:pPr>
             <a:r>
-              <a:rPr lang="bg-BG" dirty="0" smtClean="0"/>
-              <a:t>Python е избран като език със своята ясна синтактична структура и мощни библиотеки. Django е рамка, поддържаща MVC архитектура, която осигурява отделяне на логиката, дизайна и данните. Това прави приложението по-лесно за разработка, поддръжка и разширяване, като същевременно осигурява набор от вградени функционалности като аутентификация, админ панел и ORM.</a:t>
+              <a:rPr lang="bg-BG" sz="1200" dirty="0" smtClean="0"/>
+              <a:t>Nginx играе ролята на обратен прокси и уеб сървър, който обслужва заявки ефективно и с минимално натоварване на сървъра. Gunicorn е WSGI сървър, който осигурява интерфейс между Python уеб приложението (Django) и уеб сървъра. Този двоен модел подобрява производителността, позволява асинхронна обработка и гъвкавост при настройките за натоварване.</a:t>
             </a:r>
+          </a:p>
+          <a:p>
+            <a:endParaRPr lang="bg-BG" sz="1200" dirty="0" smtClean="0"/>
           </a:p>
           <a:p>
             <a:endParaRPr lang="bg-BG" dirty="0"/>
@@ -992,7 +1030,7 @@
           <a:p>
             <a:fld id="{F63C9E35-DB9A-436C-8DE0-D3E82DBFC18A}" type="slidenum">
               <a:rPr lang="bg-BG" smtClean="0"/>
-              <a:t>6</a:t>
+              <a:t>5</a:t>
             </a:fld>
             <a:endParaRPr lang="bg-BG"/>
           </a:p>
@@ -1001,7 +1039,7 @@
     </p:spTree>
     <p:extLst>
       <p:ext uri="{BB962C8B-B14F-4D97-AF65-F5344CB8AC3E}">
-        <p14:creationId xmlns:p14="http://schemas.microsoft.com/office/powerpoint/2010/main" val="1568159448"/>
+        <p14:creationId xmlns:p14="http://schemas.microsoft.com/office/powerpoint/2010/main" val="2653242900"/>
       </p:ext>
     </p:extLst>
   </p:cSld>
@@ -1074,7 +1112,7 @@
             </a:pPr>
             <a:r>
               <a:rPr lang="bg-BG" dirty="0" smtClean="0"/>
-              <a:t>MySQL предоставя структурирана и надеждна база за съхранение и извличане на данни, необходима за функционирането на приложението. PhpMyAdmin е графичен уеб интерфейс, който улеснява администрирането на базата данни, позволява лесно управление на таблици, потребители и резервни копия, което е важно за практическото управление на сървърната среда.</a:t>
+              <a:t>Python е избран като език със своята ясна синтактична структура и мощни библиотеки. Django е рамка, поддържаща MVC архитектура, която осигурява отделяне на логиката, дизайна и данните. Това прави приложението по-лесно за разработка, поддръжка и разширяване, като същевременно осигурява набор от вградени функционалности като аутентификация, админ панел и ORM.</a:t>
             </a:r>
           </a:p>
           <a:p>
@@ -1099,7 +1137,7 @@
           <a:p>
             <a:fld id="{F63C9E35-DB9A-436C-8DE0-D3E82DBFC18A}" type="slidenum">
               <a:rPr lang="bg-BG" smtClean="0"/>
-              <a:t>7</a:t>
+              <a:t>6</a:t>
             </a:fld>
             <a:endParaRPr lang="bg-BG"/>
           </a:p>
@@ -1108,7 +1146,7 @@
     </p:spTree>
     <p:extLst>
       <p:ext uri="{BB962C8B-B14F-4D97-AF65-F5344CB8AC3E}">
-        <p14:creationId xmlns:p14="http://schemas.microsoft.com/office/powerpoint/2010/main" val="1236019857"/>
+        <p14:creationId xmlns:p14="http://schemas.microsoft.com/office/powerpoint/2010/main" val="1568159448"/>
       </p:ext>
     </p:extLst>
   </p:cSld>
@@ -1181,6 +1219,113 @@
             </a:pPr>
             <a:r>
               <a:rPr lang="bg-BG" dirty="0" smtClean="0"/>
+              <a:t>MySQL предоставя структурирана и надеждна база за съхранение и извличане на данни, необходима за функционирането на приложението. PhpMyAdmin е графичен уеб интерфейс, който улеснява администрирането на базата данни, позволява лесно управление на таблици, потребители и резервни копия, което е важно за практическото управление на сървърната среда.</a:t>
+            </a:r>
+          </a:p>
+          <a:p>
+            <a:endParaRPr lang="bg-BG" dirty="0"/>
+          </a:p>
+        </p:txBody>
+      </p:sp>
+      <p:sp>
+        <p:nvSpPr>
+          <p:cNvPr id="4" name="Slide Number Placeholder 3"/>
+          <p:cNvSpPr>
+            <a:spLocks noGrp="1"/>
+          </p:cNvSpPr>
+          <p:nvPr>
+            <p:ph type="sldNum" sz="quarter" idx="10"/>
+          </p:nvPr>
+        </p:nvSpPr>
+        <p:spPr/>
+        <p:txBody>
+          <a:bodyPr/>
+          <a:lstStyle/>
+          <a:p>
+            <a:fld id="{F63C9E35-DB9A-436C-8DE0-D3E82DBFC18A}" type="slidenum">
+              <a:rPr lang="bg-BG" smtClean="0"/>
+              <a:t>7</a:t>
+            </a:fld>
+            <a:endParaRPr lang="bg-BG"/>
+          </a:p>
+        </p:txBody>
+      </p:sp>
+    </p:spTree>
+    <p:extLst>
+      <p:ext uri="{BB962C8B-B14F-4D97-AF65-F5344CB8AC3E}">
+        <p14:creationId xmlns:p14="http://schemas.microsoft.com/office/powerpoint/2010/main" val="1236019857"/>
+      </p:ext>
+    </p:extLst>
+  </p:cSld>
+  <p:clrMapOvr>
+    <a:masterClrMapping/>
+  </p:clrMapOvr>
+</p:notes>
+</file>
+
+<file path=ppt/notesSlides/notesSlide8.xml><?xml version="1.0" encoding="utf-8"?>
+<p:notes xmlns:a="http://schemas.openxmlformats.org/drawingml/2006/main" xmlns:r="http://schemas.openxmlformats.org/officeDocument/2006/relationships" xmlns:p="http://schemas.openxmlformats.org/presentationml/2006/main">
+  <p:cSld>
+    <p:spTree>
+      <p:nvGrpSpPr>
+        <p:cNvPr id="1" name=""/>
+        <p:cNvGrpSpPr/>
+        <p:nvPr/>
+      </p:nvGrpSpPr>
+      <p:grpSpPr>
+        <a:xfrm>
+          <a:off x="0" y="0"/>
+          <a:ext cx="0" cy="0"/>
+          <a:chOff x="0" y="0"/>
+          <a:chExt cx="0" cy="0"/>
+        </a:xfrm>
+      </p:grpSpPr>
+      <p:sp>
+        <p:nvSpPr>
+          <p:cNvPr id="2" name="Slide Image Placeholder 1"/>
+          <p:cNvSpPr>
+            <a:spLocks noGrp="1" noRot="1" noChangeAspect="1"/>
+          </p:cNvSpPr>
+          <p:nvPr>
+            <p:ph type="sldImg"/>
+          </p:nvPr>
+        </p:nvSpPr>
+        <p:spPr/>
+      </p:sp>
+      <p:sp>
+        <p:nvSpPr>
+          <p:cNvPr id="3" name="Notes Placeholder 2"/>
+          <p:cNvSpPr>
+            <a:spLocks noGrp="1"/>
+          </p:cNvSpPr>
+          <p:nvPr>
+            <p:ph type="body" idx="1"/>
+          </p:nvPr>
+        </p:nvSpPr>
+        <p:spPr/>
+        <p:txBody>
+          <a:bodyPr/>
+          <a:lstStyle/>
+          <a:p>
+            <a:pPr marL="0" marR="0" lvl="0" indent="0" algn="l" defTabSz="914400" rtl="0" eaLnBrk="1" fontAlgn="auto" latinLnBrk="0" hangingPunct="1">
+              <a:lnSpc>
+                <a:spcPct val="100000"/>
+              </a:lnSpc>
+              <a:spcBef>
+                <a:spcPts val="0"/>
+              </a:spcBef>
+              <a:spcAft>
+                <a:spcPts val="0"/>
+              </a:spcAft>
+              <a:buClrTx/>
+              <a:buSzTx/>
+              <a:buFontTx/>
+              <a:buNone/>
+              <a:tabLst/>
+              <a:defRPr/>
+            </a:pPr>
+            <a:r>
+              <a:rPr lang="bg-BG" dirty="0" smtClean="0"/>
               <a:t>Подробно се описва процесът от инсталиране на Ubuntu Server, през настройка на Nginx като прокси сървър, инсталиране и конфигуриране на Gunicorn за стартиране на Django приложението, до създаване на базата данни и настройка на phpMyAdmin. Също така е разгледано създаването на виртуална Python среда и прехвърлянето на проектните файлове чрез FTP, като се обръща внимание на правилното конфигуриране на права и сигурност.</a:t>
             </a:r>
           </a:p>
@@ -1225,7 +1370,7 @@
 </p:notes>
 </file>
 
-<file path=ppt/notesSlides/notesSlide8.xml><?xml version="1.0" encoding="utf-8"?>
+<file path=ppt/notesSlides/notesSlide9.xml><?xml version="1.0" encoding="utf-8"?>
 <p:notes xmlns:a="http://schemas.openxmlformats.org/drawingml/2006/main" xmlns:r="http://schemas.openxmlformats.org/officeDocument/2006/relationships" xmlns:p="http://schemas.openxmlformats.org/presentationml/2006/main">
   <p:cSld>
     <p:spTree>
@@ -1382,7 +1527,7 @@
           <a:noFill/>
           <a:extLst>
             <a:ext uri="{909E8E84-426E-40dd-AFC4-6F175D3DCCD1}">
-              <a14:hiddenFill xmlns="" xmlns:a14="http://schemas.microsoft.com/office/drawing/2010/main">
+              <a14:hiddenFill xmlns:a14="http://schemas.microsoft.com/office/drawing/2010/main" xmlns="">
                 <a:solidFill>
                   <a:srgbClr val="FFFFFF"/>
                 </a:solidFill>
@@ -1442,7 +1587,7 @@
             </a:ln>
             <a:extLst>
               <a:ext uri="{91240B29-F687-4f45-9708-019B960494DF}">
-                <a14:hiddenLine xmlns="" xmlns:a14="http://schemas.microsoft.com/office/drawing/2010/main" w="9525">
+                <a14:hiddenLine xmlns:a14="http://schemas.microsoft.com/office/drawing/2010/main" xmlns="" w="9525">
                   <a:solidFill>
                     <a:srgbClr val="000000"/>
                   </a:solidFill>
@@ -1532,7 +1677,7 @@
             </a:ln>
             <a:extLst>
               <a:ext uri="{91240B29-F687-4f45-9708-019B960494DF}">
-                <a14:hiddenLine xmlns="" xmlns:a14="http://schemas.microsoft.com/office/drawing/2010/main" w="9525">
+                <a14:hiddenLine xmlns:a14="http://schemas.microsoft.com/office/drawing/2010/main" xmlns="" w="9525">
                   <a:solidFill>
                     <a:srgbClr val="000000"/>
                   </a:solidFill>
@@ -1622,7 +1767,7 @@
             </a:ln>
             <a:extLst>
               <a:ext uri="{91240B29-F687-4f45-9708-019B960494DF}">
-                <a14:hiddenLine xmlns="" xmlns:a14="http://schemas.microsoft.com/office/drawing/2010/main" w="9525">
+                <a14:hiddenLine xmlns:a14="http://schemas.microsoft.com/office/drawing/2010/main" xmlns="" w="9525">
                   <a:solidFill>
                     <a:srgbClr val="000000"/>
                   </a:solidFill>
@@ -1656,7 +1801,7 @@
             </a:ln>
             <a:extLst>
               <a:ext uri="{91240B29-F687-4f45-9708-019B960494DF}">
-                <a14:hiddenLine xmlns="" xmlns:a14="http://schemas.microsoft.com/office/drawing/2010/main" w="9525">
+                <a14:hiddenLine xmlns:a14="http://schemas.microsoft.com/office/drawing/2010/main" xmlns="" w="9525">
                   <a:solidFill>
                     <a:srgbClr val="000000"/>
                   </a:solidFill>
@@ -1746,7 +1891,7 @@
             </a:ln>
             <a:extLst>
               <a:ext uri="{91240B29-F687-4f45-9708-019B960494DF}">
-                <a14:hiddenLine xmlns="" xmlns:a14="http://schemas.microsoft.com/office/drawing/2010/main" w="9525">
+                <a14:hiddenLine xmlns:a14="http://schemas.microsoft.com/office/drawing/2010/main" xmlns="" w="9525">
                   <a:solidFill>
                     <a:srgbClr val="000000"/>
                   </a:solidFill>
@@ -1808,7 +1953,7 @@
             </a:ln>
             <a:extLst>
               <a:ext uri="{91240B29-F687-4f45-9708-019B960494DF}">
-                <a14:hiddenLine xmlns="" xmlns:a14="http://schemas.microsoft.com/office/drawing/2010/main" w="9525">
+                <a14:hiddenLine xmlns:a14="http://schemas.microsoft.com/office/drawing/2010/main" xmlns="" w="9525">
                   <a:solidFill>
                     <a:srgbClr val="000000"/>
                   </a:solidFill>
@@ -1870,7 +2015,7 @@
             </a:ln>
             <a:extLst>
               <a:ext uri="{91240B29-F687-4f45-9708-019B960494DF}">
-                <a14:hiddenLine xmlns="" xmlns:a14="http://schemas.microsoft.com/office/drawing/2010/main" w="9525">
+                <a14:hiddenLine xmlns:a14="http://schemas.microsoft.com/office/drawing/2010/main" xmlns="" w="9525">
                   <a:solidFill>
                     <a:srgbClr val="000000"/>
                   </a:solidFill>
@@ -1960,7 +2105,7 @@
             </a:ln>
             <a:extLst>
               <a:ext uri="{91240B29-F687-4f45-9708-019B960494DF}">
-                <a14:hiddenLine xmlns="" xmlns:a14="http://schemas.microsoft.com/office/drawing/2010/main" w="9525">
+                <a14:hiddenLine xmlns:a14="http://schemas.microsoft.com/office/drawing/2010/main" xmlns="" w="9525">
                   <a:solidFill>
                     <a:srgbClr val="000000"/>
                   </a:solidFill>
@@ -2022,7 +2167,7 @@
             </a:ln>
             <a:extLst>
               <a:ext uri="{91240B29-F687-4f45-9708-019B960494DF}">
-                <a14:hiddenLine xmlns="" xmlns:a14="http://schemas.microsoft.com/office/drawing/2010/main" w="9525">
+                <a14:hiddenLine xmlns:a14="http://schemas.microsoft.com/office/drawing/2010/main" xmlns="" w="9525">
                   <a:solidFill>
                     <a:srgbClr val="000000"/>
                   </a:solidFill>
@@ -2084,7 +2229,7 @@
             </a:ln>
             <a:extLst>
               <a:ext uri="{91240B29-F687-4f45-9708-019B960494DF}">
-                <a14:hiddenLine xmlns="" xmlns:a14="http://schemas.microsoft.com/office/drawing/2010/main" w="9525">
+                <a14:hiddenLine xmlns:a14="http://schemas.microsoft.com/office/drawing/2010/main" xmlns="" w="9525">
                   <a:solidFill>
                     <a:srgbClr val="000000"/>
                   </a:solidFill>
@@ -2174,7 +2319,7 @@
             </a:ln>
             <a:extLst>
               <a:ext uri="{91240B29-F687-4f45-9708-019B960494DF}">
-                <a14:hiddenLine xmlns="" xmlns:a14="http://schemas.microsoft.com/office/drawing/2010/main" w="9525">
+                <a14:hiddenLine xmlns:a14="http://schemas.microsoft.com/office/drawing/2010/main" xmlns="" w="9525">
                   <a:solidFill>
                     <a:srgbClr val="000000"/>
                   </a:solidFill>
@@ -2264,7 +2409,7 @@
             </a:ln>
             <a:extLst>
               <a:ext uri="{91240B29-F687-4f45-9708-019B960494DF}">
-                <a14:hiddenLine xmlns="" xmlns:a14="http://schemas.microsoft.com/office/drawing/2010/main" w="9525">
+                <a14:hiddenLine xmlns:a14="http://schemas.microsoft.com/office/drawing/2010/main" xmlns="" w="9525">
                   <a:solidFill>
                     <a:srgbClr val="000000"/>
                   </a:solidFill>
@@ -2326,7 +2471,7 @@
             </a:ln>
             <a:extLst>
               <a:ext uri="{91240B29-F687-4f45-9708-019B960494DF}">
-                <a14:hiddenLine xmlns="" xmlns:a14="http://schemas.microsoft.com/office/drawing/2010/main" w="9525">
+                <a14:hiddenLine xmlns:a14="http://schemas.microsoft.com/office/drawing/2010/main" xmlns="" w="9525">
                   <a:solidFill>
                     <a:srgbClr val="000000"/>
                   </a:solidFill>
@@ -2436,7 +2581,7 @@
             </a:ln>
             <a:extLst>
               <a:ext uri="{91240B29-F687-4f45-9708-019B960494DF}">
-                <a14:hiddenLine xmlns="" xmlns:a14="http://schemas.microsoft.com/office/drawing/2010/main" w="9525">
+                <a14:hiddenLine xmlns:a14="http://schemas.microsoft.com/office/drawing/2010/main" xmlns="" w="9525">
                   <a:solidFill>
                     <a:srgbClr val="000000"/>
                   </a:solidFill>
@@ -2498,7 +2643,7 @@
             </a:ln>
             <a:extLst>
               <a:ext uri="{91240B29-F687-4f45-9708-019B960494DF}">
-                <a14:hiddenLine xmlns="" xmlns:a14="http://schemas.microsoft.com/office/drawing/2010/main" w="9525">
+                <a14:hiddenLine xmlns:a14="http://schemas.microsoft.com/office/drawing/2010/main" xmlns="" w="9525">
                   <a:solidFill>
                     <a:srgbClr val="000000"/>
                   </a:solidFill>
@@ -2588,7 +2733,7 @@
             </a:ln>
             <a:extLst>
               <a:ext uri="{91240B29-F687-4f45-9708-019B960494DF}">
-                <a14:hiddenLine xmlns="" xmlns:a14="http://schemas.microsoft.com/office/drawing/2010/main" w="9525">
+                <a14:hiddenLine xmlns:a14="http://schemas.microsoft.com/office/drawing/2010/main" xmlns="" w="9525">
                   <a:solidFill>
                     <a:srgbClr val="000000"/>
                   </a:solidFill>
@@ -2678,7 +2823,7 @@
             </a:ln>
             <a:extLst>
               <a:ext uri="{91240B29-F687-4f45-9708-019B960494DF}">
-                <a14:hiddenLine xmlns="" xmlns:a14="http://schemas.microsoft.com/office/drawing/2010/main" w="9525">
+                <a14:hiddenLine xmlns:a14="http://schemas.microsoft.com/office/drawing/2010/main" xmlns="" w="9525">
                   <a:solidFill>
                     <a:srgbClr val="000000"/>
                   </a:solidFill>
@@ -2740,7 +2885,7 @@
             </a:ln>
             <a:extLst>
               <a:ext uri="{91240B29-F687-4f45-9708-019B960494DF}">
-                <a14:hiddenLine xmlns="" xmlns:a14="http://schemas.microsoft.com/office/drawing/2010/main" w="9525">
+                <a14:hiddenLine xmlns:a14="http://schemas.microsoft.com/office/drawing/2010/main" xmlns="" w="9525">
                   <a:solidFill>
                     <a:srgbClr val="000000"/>
                   </a:solidFill>
@@ -2830,7 +2975,7 @@
             </a:ln>
             <a:extLst>
               <a:ext uri="{91240B29-F687-4f45-9708-019B960494DF}">
-                <a14:hiddenLine xmlns="" xmlns:a14="http://schemas.microsoft.com/office/drawing/2010/main" w="9525">
+                <a14:hiddenLine xmlns:a14="http://schemas.microsoft.com/office/drawing/2010/main" xmlns="" w="9525">
                   <a:solidFill>
                     <a:srgbClr val="000000"/>
                   </a:solidFill>
@@ -2920,7 +3065,7 @@
             </a:ln>
             <a:extLst>
               <a:ext uri="{91240B29-F687-4f45-9708-019B960494DF}">
-                <a14:hiddenLine xmlns="" xmlns:a14="http://schemas.microsoft.com/office/drawing/2010/main" w="9525">
+                <a14:hiddenLine xmlns:a14="http://schemas.microsoft.com/office/drawing/2010/main" xmlns="" w="9525">
                   <a:solidFill>
                     <a:srgbClr val="000000"/>
                   </a:solidFill>
@@ -2976,7 +3121,7 @@
             </a:ln>
             <a:extLst>
               <a:ext uri="{91240B29-F687-4f45-9708-019B960494DF}">
-                <a14:hiddenLine xmlns="" xmlns:a14="http://schemas.microsoft.com/office/drawing/2010/main" w="9525">
+                <a14:hiddenLine xmlns:a14="http://schemas.microsoft.com/office/drawing/2010/main" xmlns="" w="9525">
                   <a:solidFill>
                     <a:srgbClr val="000000"/>
                   </a:solidFill>
@@ -3066,7 +3211,7 @@
             </a:ln>
             <a:extLst>
               <a:ext uri="{91240B29-F687-4f45-9708-019B960494DF}">
-                <a14:hiddenLine xmlns="" xmlns:a14="http://schemas.microsoft.com/office/drawing/2010/main" w="9525">
+                <a14:hiddenLine xmlns:a14="http://schemas.microsoft.com/office/drawing/2010/main" xmlns="" w="9525">
                   <a:solidFill>
                     <a:srgbClr val="000000"/>
                   </a:solidFill>
@@ -3122,7 +3267,7 @@
             </a:ln>
             <a:extLst>
               <a:ext uri="{91240B29-F687-4f45-9708-019B960494DF}">
-                <a14:hiddenLine xmlns="" xmlns:a14="http://schemas.microsoft.com/office/drawing/2010/main" w="9525">
+                <a14:hiddenLine xmlns:a14="http://schemas.microsoft.com/office/drawing/2010/main" xmlns="" w="9525">
                   <a:solidFill>
                     <a:srgbClr val="000000"/>
                   </a:solidFill>
@@ -3212,7 +3357,7 @@
             </a:ln>
             <a:extLst>
               <a:ext uri="{91240B29-F687-4f45-9708-019B960494DF}">
-                <a14:hiddenLine xmlns="" xmlns:a14="http://schemas.microsoft.com/office/drawing/2010/main" w="9525">
+                <a14:hiddenLine xmlns:a14="http://schemas.microsoft.com/office/drawing/2010/main" xmlns="" w="9525">
                   <a:solidFill>
                     <a:srgbClr val="000000"/>
                   </a:solidFill>
@@ -3280,7 +3425,7 @@
             </a:ln>
             <a:extLst>
               <a:ext uri="{91240B29-F687-4f45-9708-019B960494DF}">
-                <a14:hiddenLine xmlns="" xmlns:a14="http://schemas.microsoft.com/office/drawing/2010/main" w="9525">
+                <a14:hiddenLine xmlns:a14="http://schemas.microsoft.com/office/drawing/2010/main" xmlns="" w="9525">
                   <a:solidFill>
                     <a:srgbClr val="000000"/>
                   </a:solidFill>
@@ -3370,7 +3515,7 @@
             </a:ln>
             <a:extLst>
               <a:ext uri="{91240B29-F687-4f45-9708-019B960494DF}">
-                <a14:hiddenLine xmlns="" xmlns:a14="http://schemas.microsoft.com/office/drawing/2010/main" w="9525">
+                <a14:hiddenLine xmlns:a14="http://schemas.microsoft.com/office/drawing/2010/main" xmlns="" w="9525">
                   <a:solidFill>
                     <a:srgbClr val="000000"/>
                   </a:solidFill>
@@ -3438,7 +3583,7 @@
             </a:ln>
             <a:extLst>
               <a:ext uri="{91240B29-F687-4f45-9708-019B960494DF}">
-                <a14:hiddenLine xmlns="" xmlns:a14="http://schemas.microsoft.com/office/drawing/2010/main" w="9525">
+                <a14:hiddenLine xmlns:a14="http://schemas.microsoft.com/office/drawing/2010/main" xmlns="" w="9525">
                   <a:solidFill>
                     <a:srgbClr val="000000"/>
                   </a:solidFill>
@@ -3528,7 +3673,7 @@
             </a:ln>
             <a:extLst>
               <a:ext uri="{91240B29-F687-4f45-9708-019B960494DF}">
-                <a14:hiddenLine xmlns="" xmlns:a14="http://schemas.microsoft.com/office/drawing/2010/main" w="9525">
+                <a14:hiddenLine xmlns:a14="http://schemas.microsoft.com/office/drawing/2010/main" xmlns="" w="9525">
                   <a:solidFill>
                     <a:srgbClr val="000000"/>
                   </a:solidFill>
@@ -3562,7 +3707,7 @@
             </a:ln>
             <a:extLst>
               <a:ext uri="{91240B29-F687-4f45-9708-019B960494DF}">
-                <a14:hiddenLine xmlns="" xmlns:a14="http://schemas.microsoft.com/office/drawing/2010/main" w="9525">
+                <a14:hiddenLine xmlns:a14="http://schemas.microsoft.com/office/drawing/2010/main" xmlns="" w="9525">
                   <a:solidFill>
                     <a:srgbClr val="000000"/>
                   </a:solidFill>
@@ -3652,7 +3797,7 @@
             </a:ln>
             <a:extLst>
               <a:ext uri="{91240B29-F687-4f45-9708-019B960494DF}">
-                <a14:hiddenLine xmlns="" xmlns:a14="http://schemas.microsoft.com/office/drawing/2010/main" w="9525">
+                <a14:hiddenLine xmlns:a14="http://schemas.microsoft.com/office/drawing/2010/main" xmlns="" w="9525">
                   <a:solidFill>
                     <a:srgbClr val="000000"/>
                   </a:solidFill>
@@ -3714,7 +3859,7 @@
             </a:ln>
             <a:extLst>
               <a:ext uri="{91240B29-F687-4f45-9708-019B960494DF}">
-                <a14:hiddenLine xmlns="" xmlns:a14="http://schemas.microsoft.com/office/drawing/2010/main" w="9525">
+                <a14:hiddenLine xmlns:a14="http://schemas.microsoft.com/office/drawing/2010/main" xmlns="" w="9525">
                   <a:solidFill>
                     <a:srgbClr val="000000"/>
                   </a:solidFill>
@@ -3776,7 +3921,7 @@
             </a:ln>
             <a:extLst>
               <a:ext uri="{91240B29-F687-4f45-9708-019B960494DF}">
-                <a14:hiddenLine xmlns="" xmlns:a14="http://schemas.microsoft.com/office/drawing/2010/main" w="9525">
+                <a14:hiddenLine xmlns:a14="http://schemas.microsoft.com/office/drawing/2010/main" xmlns="" w="9525">
                   <a:solidFill>
                     <a:srgbClr val="000000"/>
                   </a:solidFill>
@@ -3866,7 +4011,7 @@
             </a:ln>
             <a:extLst>
               <a:ext uri="{91240B29-F687-4f45-9708-019B960494DF}">
-                <a14:hiddenLine xmlns="" xmlns:a14="http://schemas.microsoft.com/office/drawing/2010/main" w="9525">
+                <a14:hiddenLine xmlns:a14="http://schemas.microsoft.com/office/drawing/2010/main" xmlns="" w="9525">
                   <a:solidFill>
                     <a:srgbClr val="000000"/>
                   </a:solidFill>
@@ -3934,7 +4079,7 @@
             </a:ln>
             <a:extLst>
               <a:ext uri="{91240B29-F687-4f45-9708-019B960494DF}">
-                <a14:hiddenLine xmlns="" xmlns:a14="http://schemas.microsoft.com/office/drawing/2010/main" w="9525">
+                <a14:hiddenLine xmlns:a14="http://schemas.microsoft.com/office/drawing/2010/main" xmlns="" w="9525">
                   <a:solidFill>
                     <a:srgbClr val="000000"/>
                   </a:solidFill>
@@ -3996,7 +4141,7 @@
             </a:ln>
             <a:extLst>
               <a:ext uri="{91240B29-F687-4f45-9708-019B960494DF}">
-                <a14:hiddenLine xmlns="" xmlns:a14="http://schemas.microsoft.com/office/drawing/2010/main" w="9525">
+                <a14:hiddenLine xmlns:a14="http://schemas.microsoft.com/office/drawing/2010/main" xmlns="" w="9525">
                   <a:solidFill>
                     <a:srgbClr val="000000"/>
                   </a:solidFill>
@@ -4086,7 +4231,7 @@
             </a:ln>
             <a:extLst>
               <a:ext uri="{91240B29-F687-4f45-9708-019B960494DF}">
-                <a14:hiddenLine xmlns="" xmlns:a14="http://schemas.microsoft.com/office/drawing/2010/main" w="9525">
+                <a14:hiddenLine xmlns:a14="http://schemas.microsoft.com/office/drawing/2010/main" xmlns="" w="9525">
                   <a:solidFill>
                     <a:srgbClr val="000000"/>
                   </a:solidFill>
@@ -4148,7 +4293,7 @@
             </a:ln>
             <a:extLst>
               <a:ext uri="{91240B29-F687-4f45-9708-019B960494DF}">
-                <a14:hiddenLine xmlns="" xmlns:a14="http://schemas.microsoft.com/office/drawing/2010/main" w="9525">
+                <a14:hiddenLine xmlns:a14="http://schemas.microsoft.com/office/drawing/2010/main" xmlns="" w="9525">
                   <a:solidFill>
                     <a:srgbClr val="000000"/>
                   </a:solidFill>
@@ -4238,7 +4383,7 @@
             </a:ln>
             <a:extLst>
               <a:ext uri="{91240B29-F687-4f45-9708-019B960494DF}">
-                <a14:hiddenLine xmlns="" xmlns:a14="http://schemas.microsoft.com/office/drawing/2010/main" w="9525">
+                <a14:hiddenLine xmlns:a14="http://schemas.microsoft.com/office/drawing/2010/main" xmlns="" w="9525">
                   <a:solidFill>
                     <a:srgbClr val="000000"/>
                   </a:solidFill>
@@ -4300,7 +4445,7 @@
             </a:ln>
             <a:extLst>
               <a:ext uri="{91240B29-F687-4f45-9708-019B960494DF}">
-                <a14:hiddenLine xmlns="" xmlns:a14="http://schemas.microsoft.com/office/drawing/2010/main" w="9525">
+                <a14:hiddenLine xmlns:a14="http://schemas.microsoft.com/office/drawing/2010/main" xmlns="" w="9525">
                   <a:solidFill>
                     <a:srgbClr val="000000"/>
                   </a:solidFill>
@@ -4390,7 +4535,7 @@
             </a:ln>
             <a:extLst>
               <a:ext uri="{91240B29-F687-4f45-9708-019B960494DF}">
-                <a14:hiddenLine xmlns="" xmlns:a14="http://schemas.microsoft.com/office/drawing/2010/main" w="9525">
+                <a14:hiddenLine xmlns:a14="http://schemas.microsoft.com/office/drawing/2010/main" xmlns="" w="9525">
                   <a:solidFill>
                     <a:srgbClr val="000000"/>
                   </a:solidFill>
@@ -4424,7 +4569,7 @@
             </a:ln>
             <a:extLst>
               <a:ext uri="{91240B29-F687-4f45-9708-019B960494DF}">
-                <a14:hiddenLine xmlns="" xmlns:a14="http://schemas.microsoft.com/office/drawing/2010/main" w="9525">
+                <a14:hiddenLine xmlns:a14="http://schemas.microsoft.com/office/drawing/2010/main" xmlns="" w="9525">
                   <a:solidFill>
                     <a:srgbClr val="000000"/>
                   </a:solidFill>
@@ -4489,7 +4634,7 @@
             </a:ln>
             <a:extLst>
               <a:ext uri="{91240B29-F687-4f45-9708-019B960494DF}">
-                <a14:hiddenLine xmlns="" xmlns:a14="http://schemas.microsoft.com/office/drawing/2010/main" w="9525">
+                <a14:hiddenLine xmlns:a14="http://schemas.microsoft.com/office/drawing/2010/main" xmlns="" w="9525">
                   <a:solidFill>
                     <a:srgbClr val="000000"/>
                   </a:solidFill>
@@ -4579,7 +4724,7 @@
             </a:ln>
             <a:extLst>
               <a:ext uri="{91240B29-F687-4f45-9708-019B960494DF}">
-                <a14:hiddenLine xmlns="" xmlns:a14="http://schemas.microsoft.com/office/drawing/2010/main" w="9525">
+                <a14:hiddenLine xmlns:a14="http://schemas.microsoft.com/office/drawing/2010/main" xmlns="" w="9525">
                   <a:solidFill>
                     <a:srgbClr val="000000"/>
                   </a:solidFill>
@@ -4641,7 +4786,7 @@
             </a:ln>
             <a:extLst>
               <a:ext uri="{91240B29-F687-4f45-9708-019B960494DF}">
-                <a14:hiddenLine xmlns="" xmlns:a14="http://schemas.microsoft.com/office/drawing/2010/main" w="9525">
+                <a14:hiddenLine xmlns:a14="http://schemas.microsoft.com/office/drawing/2010/main" xmlns="" w="9525">
                   <a:solidFill>
                     <a:srgbClr val="000000"/>
                   </a:solidFill>
@@ -4731,7 +4876,7 @@
             </a:ln>
             <a:extLst>
               <a:ext uri="{91240B29-F687-4f45-9708-019B960494DF}">
-                <a14:hiddenLine xmlns="" xmlns:a14="http://schemas.microsoft.com/office/drawing/2010/main" w="9525">
+                <a14:hiddenLine xmlns:a14="http://schemas.microsoft.com/office/drawing/2010/main" xmlns="" w="9525">
                   <a:solidFill>
                     <a:srgbClr val="000000"/>
                   </a:solidFill>
@@ -4821,7 +4966,7 @@
             </a:ln>
             <a:extLst>
               <a:ext uri="{91240B29-F687-4f45-9708-019B960494DF}">
-                <a14:hiddenLine xmlns="" xmlns:a14="http://schemas.microsoft.com/office/drawing/2010/main" w="9525">
+                <a14:hiddenLine xmlns:a14="http://schemas.microsoft.com/office/drawing/2010/main" xmlns="" w="9525">
                   <a:solidFill>
                     <a:srgbClr val="000000"/>
                   </a:solidFill>
@@ -4886,7 +5031,7 @@
             </a:ln>
             <a:extLst>
               <a:ext uri="{91240B29-F687-4f45-9708-019B960494DF}">
-                <a14:hiddenLine xmlns="" xmlns:a14="http://schemas.microsoft.com/office/drawing/2010/main" w="9525">
+                <a14:hiddenLine xmlns:a14="http://schemas.microsoft.com/office/drawing/2010/main" xmlns="" w="9525">
                   <a:solidFill>
                     <a:srgbClr val="000000"/>
                   </a:solidFill>
@@ -4948,7 +5093,7 @@
             </a:ln>
             <a:extLst>
               <a:ext uri="{91240B29-F687-4f45-9708-019B960494DF}">
-                <a14:hiddenLine xmlns="" xmlns:a14="http://schemas.microsoft.com/office/drawing/2010/main" w="9525">
+                <a14:hiddenLine xmlns:a14="http://schemas.microsoft.com/office/drawing/2010/main" xmlns="" w="9525">
                   <a:solidFill>
                     <a:srgbClr val="000000"/>
                   </a:solidFill>
@@ -5038,7 +5183,7 @@
             </a:ln>
             <a:extLst>
               <a:ext uri="{91240B29-F687-4f45-9708-019B960494DF}">
-                <a14:hiddenLine xmlns="" xmlns:a14="http://schemas.microsoft.com/office/drawing/2010/main" w="9525">
+                <a14:hiddenLine xmlns:a14="http://schemas.microsoft.com/office/drawing/2010/main" xmlns="" w="9525">
                   <a:solidFill>
                     <a:srgbClr val="000000"/>
                   </a:solidFill>
@@ -5128,7 +5273,7 @@
             </a:ln>
             <a:extLst>
               <a:ext uri="{91240B29-F687-4f45-9708-019B960494DF}">
-                <a14:hiddenLine xmlns="" xmlns:a14="http://schemas.microsoft.com/office/drawing/2010/main" w="9525">
+                <a14:hiddenLine xmlns:a14="http://schemas.microsoft.com/office/drawing/2010/main" xmlns="" w="9525">
                   <a:solidFill>
                     <a:srgbClr val="000000"/>
                   </a:solidFill>
@@ -5190,7 +5335,7 @@
             </a:ln>
             <a:extLst>
               <a:ext uri="{91240B29-F687-4f45-9708-019B960494DF}">
-                <a14:hiddenLine xmlns="" xmlns:a14="http://schemas.microsoft.com/office/drawing/2010/main" w="9525">
+                <a14:hiddenLine xmlns:a14="http://schemas.microsoft.com/office/drawing/2010/main" xmlns="" w="9525">
                   <a:solidFill>
                     <a:srgbClr val="000000"/>
                   </a:solidFill>
@@ -5310,7 +5455,7 @@
             </a:ln>
             <a:extLst>
               <a:ext uri="{91240B29-F687-4f45-9708-019B960494DF}">
-                <a14:hiddenLine xmlns="" xmlns:a14="http://schemas.microsoft.com/office/drawing/2010/main" w="9525">
+                <a14:hiddenLine xmlns:a14="http://schemas.microsoft.com/office/drawing/2010/main" xmlns="" w="9525">
                   <a:solidFill>
                     <a:srgbClr val="000000"/>
                   </a:solidFill>
@@ -5378,7 +5523,7 @@
             </a:ln>
             <a:extLst>
               <a:ext uri="{91240B29-F687-4f45-9708-019B960494DF}">
-                <a14:hiddenLine xmlns="" xmlns:a14="http://schemas.microsoft.com/office/drawing/2010/main" w="9525">
+                <a14:hiddenLine xmlns:a14="http://schemas.microsoft.com/office/drawing/2010/main" xmlns="" w="9525">
                   <a:solidFill>
                     <a:srgbClr val="000000"/>
                   </a:solidFill>
@@ -5468,7 +5613,7 @@
             </a:ln>
             <a:extLst>
               <a:ext uri="{91240B29-F687-4f45-9708-019B960494DF}">
-                <a14:hiddenLine xmlns="" xmlns:a14="http://schemas.microsoft.com/office/drawing/2010/main" w="9525">
+                <a14:hiddenLine xmlns:a14="http://schemas.microsoft.com/office/drawing/2010/main" xmlns="" w="9525">
                   <a:solidFill>
                     <a:srgbClr val="000000"/>
                   </a:solidFill>
@@ -10275,7 +10420,7 @@
           <a:noFill/>
           <a:extLst>
             <a:ext uri="{909E8E84-426E-40dd-AFC4-6F175D3DCCD1}">
-              <a14:hiddenFill xmlns="" xmlns:a14="http://schemas.microsoft.com/office/drawing/2010/main">
+              <a14:hiddenFill xmlns:a14="http://schemas.microsoft.com/office/drawing/2010/main" xmlns="">
                 <a:solidFill>
                   <a:srgbClr val="FFFFFF"/>
                 </a:solidFill>
@@ -10349,7 +10494,7 @@
               </a:ln>
               <a:extLst>
                 <a:ext uri="{91240B29-F687-4f45-9708-019B960494DF}">
-                  <a14:hiddenLine xmlns="" xmlns:a14="http://schemas.microsoft.com/office/drawing/2010/main" w="9525">
+                  <a14:hiddenLine xmlns:a14="http://schemas.microsoft.com/office/drawing/2010/main" xmlns="" w="9525">
                     <a:solidFill>
                       <a:srgbClr val="000000"/>
                     </a:solidFill>
@@ -10439,7 +10584,7 @@
               </a:ln>
               <a:extLst>
                 <a:ext uri="{91240B29-F687-4f45-9708-019B960494DF}">
-                  <a14:hiddenLine xmlns="" xmlns:a14="http://schemas.microsoft.com/office/drawing/2010/main" w="9525">
+                  <a14:hiddenLine xmlns:a14="http://schemas.microsoft.com/office/drawing/2010/main" xmlns="" w="9525">
                     <a:solidFill>
                       <a:srgbClr val="000000"/>
                     </a:solidFill>
@@ -10529,7 +10674,7 @@
               </a:ln>
               <a:extLst>
                 <a:ext uri="{91240B29-F687-4f45-9708-019B960494DF}">
-                  <a14:hiddenLine xmlns="" xmlns:a14="http://schemas.microsoft.com/office/drawing/2010/main" w="9525">
+                  <a14:hiddenLine xmlns:a14="http://schemas.microsoft.com/office/drawing/2010/main" xmlns="" w="9525">
                     <a:solidFill>
                       <a:srgbClr val="000000"/>
                     </a:solidFill>
@@ -10591,7 +10736,7 @@
               </a:ln>
               <a:extLst>
                 <a:ext uri="{91240B29-F687-4f45-9708-019B960494DF}">
-                  <a14:hiddenLine xmlns="" xmlns:a14="http://schemas.microsoft.com/office/drawing/2010/main" w="9525">
+                  <a14:hiddenLine xmlns:a14="http://schemas.microsoft.com/office/drawing/2010/main" xmlns="" w="9525">
                     <a:solidFill>
                       <a:srgbClr val="000000"/>
                     </a:solidFill>
@@ -10681,7 +10826,7 @@
               </a:ln>
               <a:extLst>
                 <a:ext uri="{91240B29-F687-4f45-9708-019B960494DF}">
-                  <a14:hiddenLine xmlns="" xmlns:a14="http://schemas.microsoft.com/office/drawing/2010/main" w="9525">
+                  <a14:hiddenLine xmlns:a14="http://schemas.microsoft.com/office/drawing/2010/main" xmlns="" w="9525">
                     <a:solidFill>
                       <a:srgbClr val="000000"/>
                     </a:solidFill>
@@ -10743,7 +10888,7 @@
               </a:ln>
               <a:extLst>
                 <a:ext uri="{91240B29-F687-4f45-9708-019B960494DF}">
-                  <a14:hiddenLine xmlns="" xmlns:a14="http://schemas.microsoft.com/office/drawing/2010/main" w="9525">
+                  <a14:hiddenLine xmlns:a14="http://schemas.microsoft.com/office/drawing/2010/main" xmlns="" w="9525">
                     <a:solidFill>
                       <a:srgbClr val="000000"/>
                     </a:solidFill>
@@ -10805,7 +10950,7 @@
               </a:ln>
               <a:extLst>
                 <a:ext uri="{91240B29-F687-4f45-9708-019B960494DF}">
-                  <a14:hiddenLine xmlns="" xmlns:a14="http://schemas.microsoft.com/office/drawing/2010/main" w="9525">
+                  <a14:hiddenLine xmlns:a14="http://schemas.microsoft.com/office/drawing/2010/main" xmlns="" w="9525">
                     <a:solidFill>
                       <a:srgbClr val="000000"/>
                     </a:solidFill>
@@ -10895,7 +11040,7 @@
               </a:ln>
               <a:extLst>
                 <a:ext uri="{91240B29-F687-4f45-9708-019B960494DF}">
-                  <a14:hiddenLine xmlns="" xmlns:a14="http://schemas.microsoft.com/office/drawing/2010/main" w="9525">
+                  <a14:hiddenLine xmlns:a14="http://schemas.microsoft.com/office/drawing/2010/main" xmlns="" w="9525">
                     <a:solidFill>
                       <a:srgbClr val="000000"/>
                     </a:solidFill>
@@ -10985,7 +11130,7 @@
               </a:ln>
               <a:extLst>
                 <a:ext uri="{91240B29-F687-4f45-9708-019B960494DF}">
-                  <a14:hiddenLine xmlns="" xmlns:a14="http://schemas.microsoft.com/office/drawing/2010/main" w="9525">
+                  <a14:hiddenLine xmlns:a14="http://schemas.microsoft.com/office/drawing/2010/main" xmlns="" w="9525">
                     <a:solidFill>
                       <a:srgbClr val="000000"/>
                     </a:solidFill>
@@ -11047,7 +11192,7 @@
               </a:ln>
               <a:extLst>
                 <a:ext uri="{91240B29-F687-4f45-9708-019B960494DF}">
-                  <a14:hiddenLine xmlns="" xmlns:a14="http://schemas.microsoft.com/office/drawing/2010/main" w="9525">
+                  <a14:hiddenLine xmlns:a14="http://schemas.microsoft.com/office/drawing/2010/main" xmlns="" w="9525">
                     <a:solidFill>
                       <a:srgbClr val="000000"/>
                     </a:solidFill>
@@ -11157,7 +11302,7 @@
               </a:ln>
               <a:extLst>
                 <a:ext uri="{91240B29-F687-4f45-9708-019B960494DF}">
-                  <a14:hiddenLine xmlns="" xmlns:a14="http://schemas.microsoft.com/office/drawing/2010/main" w="9525">
+                  <a14:hiddenLine xmlns:a14="http://schemas.microsoft.com/office/drawing/2010/main" xmlns="" w="9525">
                     <a:solidFill>
                       <a:srgbClr val="000000"/>
                     </a:solidFill>
@@ -11241,7 +11386,7 @@
               </a:ln>
               <a:extLst>
                 <a:ext uri="{91240B29-F687-4f45-9708-019B960494DF}">
-                  <a14:hiddenLine xmlns="" xmlns:a14="http://schemas.microsoft.com/office/drawing/2010/main" w="9525">
+                  <a14:hiddenLine xmlns:a14="http://schemas.microsoft.com/office/drawing/2010/main" xmlns="" w="9525">
                     <a:solidFill>
                       <a:srgbClr val="000000"/>
                     </a:solidFill>
@@ -11303,7 +11448,7 @@
               </a:ln>
               <a:extLst>
                 <a:ext uri="{91240B29-F687-4f45-9708-019B960494DF}">
-                  <a14:hiddenLine xmlns="" xmlns:a14="http://schemas.microsoft.com/office/drawing/2010/main" w="9525">
+                  <a14:hiddenLine xmlns:a14="http://schemas.microsoft.com/office/drawing/2010/main" xmlns="" w="9525">
                     <a:solidFill>
                       <a:srgbClr val="000000"/>
                     </a:solidFill>
@@ -11365,7 +11510,7 @@
               </a:ln>
               <a:extLst>
                 <a:ext uri="{91240B29-F687-4f45-9708-019B960494DF}">
-                  <a14:hiddenLine xmlns="" xmlns:a14="http://schemas.microsoft.com/office/drawing/2010/main" w="9525">
+                  <a14:hiddenLine xmlns:a14="http://schemas.microsoft.com/office/drawing/2010/main" xmlns="" w="9525">
                     <a:solidFill>
                       <a:srgbClr val="000000"/>
                     </a:solidFill>
@@ -11455,7 +11600,7 @@
               </a:ln>
               <a:extLst>
                 <a:ext uri="{91240B29-F687-4f45-9708-019B960494DF}">
-                  <a14:hiddenLine xmlns="" xmlns:a14="http://schemas.microsoft.com/office/drawing/2010/main" w="9525">
+                  <a14:hiddenLine xmlns:a14="http://schemas.microsoft.com/office/drawing/2010/main" xmlns="" w="9525">
                     <a:solidFill>
                       <a:srgbClr val="000000"/>
                     </a:solidFill>
@@ -11489,7 +11634,7 @@
               </a:ln>
               <a:extLst>
                 <a:ext uri="{91240B29-F687-4f45-9708-019B960494DF}">
-                  <a14:hiddenLine xmlns="" xmlns:a14="http://schemas.microsoft.com/office/drawing/2010/main" w="9525">
+                  <a14:hiddenLine xmlns:a14="http://schemas.microsoft.com/office/drawing/2010/main" xmlns="" w="9525">
                     <a:solidFill>
                       <a:srgbClr val="000000"/>
                     </a:solidFill>
@@ -11554,7 +11699,7 @@
               </a:ln>
               <a:extLst>
                 <a:ext uri="{91240B29-F687-4f45-9708-019B960494DF}">
-                  <a14:hiddenLine xmlns="" xmlns:a14="http://schemas.microsoft.com/office/drawing/2010/main" w="9525">
+                  <a14:hiddenLine xmlns:a14="http://schemas.microsoft.com/office/drawing/2010/main" xmlns="" w="9525">
                     <a:solidFill>
                       <a:srgbClr val="000000"/>
                     </a:solidFill>
@@ -11644,7 +11789,7 @@
               </a:ln>
               <a:extLst>
                 <a:ext uri="{91240B29-F687-4f45-9708-019B960494DF}">
-                  <a14:hiddenLine xmlns="" xmlns:a14="http://schemas.microsoft.com/office/drawing/2010/main" w="9525">
+                  <a14:hiddenLine xmlns:a14="http://schemas.microsoft.com/office/drawing/2010/main" xmlns="" w="9525">
                     <a:solidFill>
                       <a:srgbClr val="000000"/>
                     </a:solidFill>
@@ -11706,7 +11851,7 @@
               </a:ln>
               <a:extLst>
                 <a:ext uri="{91240B29-F687-4f45-9708-019B960494DF}">
-                  <a14:hiddenLine xmlns="" xmlns:a14="http://schemas.microsoft.com/office/drawing/2010/main" w="9525">
+                  <a14:hiddenLine xmlns:a14="http://schemas.microsoft.com/office/drawing/2010/main" xmlns="" w="9525">
                     <a:solidFill>
                       <a:srgbClr val="000000"/>
                     </a:solidFill>
@@ -11796,7 +11941,7 @@
               </a:ln>
               <a:extLst>
                 <a:ext uri="{91240B29-F687-4f45-9708-019B960494DF}">
-                  <a14:hiddenLine xmlns="" xmlns:a14="http://schemas.microsoft.com/office/drawing/2010/main" w="9525">
+                  <a14:hiddenLine xmlns:a14="http://schemas.microsoft.com/office/drawing/2010/main" xmlns="" w="9525">
                     <a:solidFill>
                       <a:srgbClr val="000000"/>
                     </a:solidFill>
@@ -11861,7 +12006,7 @@
               </a:ln>
               <a:extLst>
                 <a:ext uri="{91240B29-F687-4f45-9708-019B960494DF}">
-                  <a14:hiddenLine xmlns="" xmlns:a14="http://schemas.microsoft.com/office/drawing/2010/main" w="9525">
+                  <a14:hiddenLine xmlns:a14="http://schemas.microsoft.com/office/drawing/2010/main" xmlns="" w="9525">
                     <a:solidFill>
                       <a:srgbClr val="000000"/>
                     </a:solidFill>
@@ -11923,7 +12068,7 @@
               </a:ln>
               <a:extLst>
                 <a:ext uri="{91240B29-F687-4f45-9708-019B960494DF}">
-                  <a14:hiddenLine xmlns="" xmlns:a14="http://schemas.microsoft.com/office/drawing/2010/main" w="9525">
+                  <a14:hiddenLine xmlns:a14="http://schemas.microsoft.com/office/drawing/2010/main" xmlns="" w="9525">
                     <a:solidFill>
                       <a:srgbClr val="000000"/>
                     </a:solidFill>
@@ -12013,7 +12158,7 @@
               </a:ln>
               <a:extLst>
                 <a:ext uri="{91240B29-F687-4f45-9708-019B960494DF}">
-                  <a14:hiddenLine xmlns="" xmlns:a14="http://schemas.microsoft.com/office/drawing/2010/main" w="9525">
+                  <a14:hiddenLine xmlns:a14="http://schemas.microsoft.com/office/drawing/2010/main" xmlns="" w="9525">
                     <a:solidFill>
                       <a:srgbClr val="000000"/>
                     </a:solidFill>
@@ -12103,7 +12248,7 @@
               </a:ln>
               <a:extLst>
                 <a:ext uri="{91240B29-F687-4f45-9708-019B960494DF}">
-                  <a14:hiddenLine xmlns="" xmlns:a14="http://schemas.microsoft.com/office/drawing/2010/main" w="9525">
+                  <a14:hiddenLine xmlns:a14="http://schemas.microsoft.com/office/drawing/2010/main" xmlns="" w="9525">
                     <a:solidFill>
                       <a:srgbClr val="000000"/>
                     </a:solidFill>
@@ -12168,7 +12313,7 @@
               </a:ln>
               <a:extLst>
                 <a:ext uri="{91240B29-F687-4f45-9708-019B960494DF}">
-                  <a14:hiddenLine xmlns="" xmlns:a14="http://schemas.microsoft.com/office/drawing/2010/main" w="9525">
+                  <a14:hiddenLine xmlns:a14="http://schemas.microsoft.com/office/drawing/2010/main" xmlns="" w="9525">
                     <a:solidFill>
                       <a:srgbClr val="000000"/>
                     </a:solidFill>
@@ -12288,7 +12433,7 @@
               </a:ln>
               <a:extLst>
                 <a:ext uri="{91240B29-F687-4f45-9708-019B960494DF}">
-                  <a14:hiddenLine xmlns="" xmlns:a14="http://schemas.microsoft.com/office/drawing/2010/main" w="9525">
+                  <a14:hiddenLine xmlns:a14="http://schemas.microsoft.com/office/drawing/2010/main" xmlns="" w="9525">
                     <a:solidFill>
                       <a:srgbClr val="000000"/>
                     </a:solidFill>
@@ -12386,7 +12531,7 @@
               </a:ln>
               <a:extLst>
                 <a:ext uri="{91240B29-F687-4f45-9708-019B960494DF}">
-                  <a14:hiddenLine xmlns="" xmlns:a14="http://schemas.microsoft.com/office/drawing/2010/main" w="9525">
+                  <a14:hiddenLine xmlns:a14="http://schemas.microsoft.com/office/drawing/2010/main" xmlns="" w="9525">
                     <a:solidFill>
                       <a:srgbClr val="000000"/>
                     </a:solidFill>
@@ -12501,7 +12646,7 @@
               </a:ln>
               <a:extLst>
                 <a:ext uri="{91240B29-F687-4f45-9708-019B960494DF}">
-                  <a14:hiddenLine xmlns="" xmlns:a14="http://schemas.microsoft.com/office/drawing/2010/main" w="9525">
+                  <a14:hiddenLine xmlns:a14="http://schemas.microsoft.com/office/drawing/2010/main" xmlns="" w="9525">
                     <a:solidFill>
                       <a:srgbClr val="000000"/>
                     </a:solidFill>
@@ -12591,7 +12736,7 @@
               </a:ln>
               <a:extLst>
                 <a:ext uri="{91240B29-F687-4f45-9708-019B960494DF}">
-                  <a14:hiddenLine xmlns="" xmlns:a14="http://schemas.microsoft.com/office/drawing/2010/main" w="9525">
+                  <a14:hiddenLine xmlns:a14="http://schemas.microsoft.com/office/drawing/2010/main" xmlns="" w="9525">
                     <a:solidFill>
                       <a:srgbClr val="000000"/>
                     </a:solidFill>
@@ -12656,7 +12801,7 @@
               </a:ln>
               <a:extLst>
                 <a:ext uri="{91240B29-F687-4f45-9708-019B960494DF}">
-                  <a14:hiddenLine xmlns="" xmlns:a14="http://schemas.microsoft.com/office/drawing/2010/main" w="9525">
+                  <a14:hiddenLine xmlns:a14="http://schemas.microsoft.com/office/drawing/2010/main" xmlns="" w="9525">
                     <a:solidFill>
                       <a:srgbClr val="000000"/>
                     </a:solidFill>
@@ -12746,7 +12891,7 @@
               </a:ln>
               <a:extLst>
                 <a:ext uri="{91240B29-F687-4f45-9708-019B960494DF}">
-                  <a14:hiddenLine xmlns="" xmlns:a14="http://schemas.microsoft.com/office/drawing/2010/main" w="9525">
+                  <a14:hiddenLine xmlns:a14="http://schemas.microsoft.com/office/drawing/2010/main" xmlns="" w="9525">
                     <a:solidFill>
                       <a:srgbClr val="000000"/>
                     </a:solidFill>
@@ -12814,7 +12959,7 @@
               </a:ln>
               <a:extLst>
                 <a:ext uri="{91240B29-F687-4f45-9708-019B960494DF}">
-                  <a14:hiddenLine xmlns="" xmlns:a14="http://schemas.microsoft.com/office/drawing/2010/main" w="9525">
+                  <a14:hiddenLine xmlns:a14="http://schemas.microsoft.com/office/drawing/2010/main" xmlns="" w="9525">
                     <a:solidFill>
                       <a:srgbClr val="000000"/>
                     </a:solidFill>
@@ -12904,7 +13049,7 @@
               </a:ln>
               <a:extLst>
                 <a:ext uri="{91240B29-F687-4f45-9708-019B960494DF}">
-                  <a14:hiddenLine xmlns="" xmlns:a14="http://schemas.microsoft.com/office/drawing/2010/main" w="9525">
+                  <a14:hiddenLine xmlns:a14="http://schemas.microsoft.com/office/drawing/2010/main" xmlns="" w="9525">
                     <a:solidFill>
                       <a:srgbClr val="000000"/>
                     </a:solidFill>
@@ -12972,7 +13117,7 @@
               </a:ln>
               <a:extLst>
                 <a:ext uri="{91240B29-F687-4f45-9708-019B960494DF}">
-                  <a14:hiddenLine xmlns="" xmlns:a14="http://schemas.microsoft.com/office/drawing/2010/main" w="9525">
+                  <a14:hiddenLine xmlns:a14="http://schemas.microsoft.com/office/drawing/2010/main" xmlns="" w="9525">
                     <a:solidFill>
                       <a:srgbClr val="000000"/>
                     </a:solidFill>
@@ -13062,7 +13207,7 @@
               </a:ln>
               <a:extLst>
                 <a:ext uri="{91240B29-F687-4f45-9708-019B960494DF}">
-                  <a14:hiddenLine xmlns="" xmlns:a14="http://schemas.microsoft.com/office/drawing/2010/main" w="9525">
+                  <a14:hiddenLine xmlns:a14="http://schemas.microsoft.com/office/drawing/2010/main" xmlns="" w="9525">
                     <a:solidFill>
                       <a:srgbClr val="000000"/>
                     </a:solidFill>
@@ -13096,7 +13241,7 @@
               </a:ln>
               <a:extLst>
                 <a:ext uri="{91240B29-F687-4f45-9708-019B960494DF}">
-                  <a14:hiddenLine xmlns="" xmlns:a14="http://schemas.microsoft.com/office/drawing/2010/main" w="9525">
+                  <a14:hiddenLine xmlns:a14="http://schemas.microsoft.com/office/drawing/2010/main" xmlns="" w="9525">
                     <a:solidFill>
                       <a:srgbClr val="000000"/>
                     </a:solidFill>
@@ -13797,7 +13942,7 @@
           <p:nvPr/>
         </p:nvPicPr>
         <p:blipFill>
-          <a:blip r:embed="rId2"/>
+          <a:blip r:embed="rId3"/>
           <a:stretch>
             <a:fillRect/>
           </a:stretch>

--- a/dr/presentation.pptx
+++ b/dr/presentation.pptx
@@ -1112,7 +1112,19 @@
             </a:pPr>
             <a:r>
               <a:rPr lang="bg-BG" dirty="0" smtClean="0"/>
-              <a:t>Python е избран като език със своята ясна синтактична структура и мощни библиотеки. Django е рамка, поддържаща MVC архитектура, която осигурява отделяне на логиката, дизайна и данните. Това прави приложението по-лесно за разработка, поддръжка и разширяване, като същевременно осигурява набор от вградени функционалности като аутентификация, админ панел и ORM.</a:t>
+              <a:t>Python е избран като език със своята ясна синтактична структура и мощни библиотеки. Django е </a:t>
+            </a:r>
+            <a:r>
+              <a:rPr lang="en-US" dirty="0" smtClean="0"/>
+              <a:t>framework</a:t>
+            </a:r>
+            <a:r>
+              <a:rPr lang="bg-BG" dirty="0" smtClean="0"/>
+              <a:t>, </a:t>
+            </a:r>
+            <a:r>
+              <a:rPr lang="bg-BG" dirty="0" smtClean="0"/>
+              <a:t>поддържаща MVC архитектура, която осигурява отделяне на логиката, дизайна и данните. Това прави приложението по-лесно за разработка, поддръжка и разширяване, като същевременно осигурява набор от вградени функционалности като аутентификация, админ панел и ORM.</a:t>
             </a:r>
           </a:p>
           <a:p>
@@ -1527,7 +1539,7 @@
           <a:noFill/>
           <a:extLst>
             <a:ext uri="{909E8E84-426E-40dd-AFC4-6F175D3DCCD1}">
-              <a14:hiddenFill xmlns:a14="http://schemas.microsoft.com/office/drawing/2010/main" xmlns="">
+              <a14:hiddenFill xmlns="" xmlns:a14="http://schemas.microsoft.com/office/drawing/2010/main">
                 <a:solidFill>
                   <a:srgbClr val="FFFFFF"/>
                 </a:solidFill>
@@ -1587,7 +1599,7 @@
             </a:ln>
             <a:extLst>
               <a:ext uri="{91240B29-F687-4f45-9708-019B960494DF}">
-                <a14:hiddenLine xmlns:a14="http://schemas.microsoft.com/office/drawing/2010/main" xmlns="" w="9525">
+                <a14:hiddenLine xmlns="" xmlns:a14="http://schemas.microsoft.com/office/drawing/2010/main" w="9525">
                   <a:solidFill>
                     <a:srgbClr val="000000"/>
                   </a:solidFill>
@@ -1677,7 +1689,7 @@
             </a:ln>
             <a:extLst>
               <a:ext uri="{91240B29-F687-4f45-9708-019B960494DF}">
-                <a14:hiddenLine xmlns:a14="http://schemas.microsoft.com/office/drawing/2010/main" xmlns="" w="9525">
+                <a14:hiddenLine xmlns="" xmlns:a14="http://schemas.microsoft.com/office/drawing/2010/main" w="9525">
                   <a:solidFill>
                     <a:srgbClr val="000000"/>
                   </a:solidFill>
@@ -1767,7 +1779,7 @@
             </a:ln>
             <a:extLst>
               <a:ext uri="{91240B29-F687-4f45-9708-019B960494DF}">
-                <a14:hiddenLine xmlns:a14="http://schemas.microsoft.com/office/drawing/2010/main" xmlns="" w="9525">
+                <a14:hiddenLine xmlns="" xmlns:a14="http://schemas.microsoft.com/office/drawing/2010/main" w="9525">
                   <a:solidFill>
                     <a:srgbClr val="000000"/>
                   </a:solidFill>
@@ -1801,7 +1813,7 @@
             </a:ln>
             <a:extLst>
               <a:ext uri="{91240B29-F687-4f45-9708-019B960494DF}">
-                <a14:hiddenLine xmlns:a14="http://schemas.microsoft.com/office/drawing/2010/main" xmlns="" w="9525">
+                <a14:hiddenLine xmlns="" xmlns:a14="http://schemas.microsoft.com/office/drawing/2010/main" w="9525">
                   <a:solidFill>
                     <a:srgbClr val="000000"/>
                   </a:solidFill>
@@ -1891,7 +1903,7 @@
             </a:ln>
             <a:extLst>
               <a:ext uri="{91240B29-F687-4f45-9708-019B960494DF}">
-                <a14:hiddenLine xmlns:a14="http://schemas.microsoft.com/office/drawing/2010/main" xmlns="" w="9525">
+                <a14:hiddenLine xmlns="" xmlns:a14="http://schemas.microsoft.com/office/drawing/2010/main" w="9525">
                   <a:solidFill>
                     <a:srgbClr val="000000"/>
                   </a:solidFill>
@@ -1953,7 +1965,7 @@
             </a:ln>
             <a:extLst>
               <a:ext uri="{91240B29-F687-4f45-9708-019B960494DF}">
-                <a14:hiddenLine xmlns:a14="http://schemas.microsoft.com/office/drawing/2010/main" xmlns="" w="9525">
+                <a14:hiddenLine xmlns="" xmlns:a14="http://schemas.microsoft.com/office/drawing/2010/main" w="9525">
                   <a:solidFill>
                     <a:srgbClr val="000000"/>
                   </a:solidFill>
@@ -2015,7 +2027,7 @@
             </a:ln>
             <a:extLst>
               <a:ext uri="{91240B29-F687-4f45-9708-019B960494DF}">
-                <a14:hiddenLine xmlns:a14="http://schemas.microsoft.com/office/drawing/2010/main" xmlns="" w="9525">
+                <a14:hiddenLine xmlns="" xmlns:a14="http://schemas.microsoft.com/office/drawing/2010/main" w="9525">
                   <a:solidFill>
                     <a:srgbClr val="000000"/>
                   </a:solidFill>
@@ -2105,7 +2117,7 @@
             </a:ln>
             <a:extLst>
               <a:ext uri="{91240B29-F687-4f45-9708-019B960494DF}">
-                <a14:hiddenLine xmlns:a14="http://schemas.microsoft.com/office/drawing/2010/main" xmlns="" w="9525">
+                <a14:hiddenLine xmlns="" xmlns:a14="http://schemas.microsoft.com/office/drawing/2010/main" w="9525">
                   <a:solidFill>
                     <a:srgbClr val="000000"/>
                   </a:solidFill>
@@ -2167,7 +2179,7 @@
             </a:ln>
             <a:extLst>
               <a:ext uri="{91240B29-F687-4f45-9708-019B960494DF}">
-                <a14:hiddenLine xmlns:a14="http://schemas.microsoft.com/office/drawing/2010/main" xmlns="" w="9525">
+                <a14:hiddenLine xmlns="" xmlns:a14="http://schemas.microsoft.com/office/drawing/2010/main" w="9525">
                   <a:solidFill>
                     <a:srgbClr val="000000"/>
                   </a:solidFill>
@@ -2229,7 +2241,7 @@
             </a:ln>
             <a:extLst>
               <a:ext uri="{91240B29-F687-4f45-9708-019B960494DF}">
-                <a14:hiddenLine xmlns:a14="http://schemas.microsoft.com/office/drawing/2010/main" xmlns="" w="9525">
+                <a14:hiddenLine xmlns="" xmlns:a14="http://schemas.microsoft.com/office/drawing/2010/main" w="9525">
                   <a:solidFill>
                     <a:srgbClr val="000000"/>
                   </a:solidFill>
@@ -2319,7 +2331,7 @@
             </a:ln>
             <a:extLst>
               <a:ext uri="{91240B29-F687-4f45-9708-019B960494DF}">
-                <a14:hiddenLine xmlns:a14="http://schemas.microsoft.com/office/drawing/2010/main" xmlns="" w="9525">
+                <a14:hiddenLine xmlns="" xmlns:a14="http://schemas.microsoft.com/office/drawing/2010/main" w="9525">
                   <a:solidFill>
                     <a:srgbClr val="000000"/>
                   </a:solidFill>
@@ -2409,7 +2421,7 @@
             </a:ln>
             <a:extLst>
               <a:ext uri="{91240B29-F687-4f45-9708-019B960494DF}">
-                <a14:hiddenLine xmlns:a14="http://schemas.microsoft.com/office/drawing/2010/main" xmlns="" w="9525">
+                <a14:hiddenLine xmlns="" xmlns:a14="http://schemas.microsoft.com/office/drawing/2010/main" w="9525">
                   <a:solidFill>
                     <a:srgbClr val="000000"/>
                   </a:solidFill>
@@ -2471,7 +2483,7 @@
             </a:ln>
             <a:extLst>
               <a:ext uri="{91240B29-F687-4f45-9708-019B960494DF}">
-                <a14:hiddenLine xmlns:a14="http://schemas.microsoft.com/office/drawing/2010/main" xmlns="" w="9525">
+                <a14:hiddenLine xmlns="" xmlns:a14="http://schemas.microsoft.com/office/drawing/2010/main" w="9525">
                   <a:solidFill>
                     <a:srgbClr val="000000"/>
                   </a:solidFill>
@@ -2581,7 +2593,7 @@
             </a:ln>
             <a:extLst>
               <a:ext uri="{91240B29-F687-4f45-9708-019B960494DF}">
-                <a14:hiddenLine xmlns:a14="http://schemas.microsoft.com/office/drawing/2010/main" xmlns="" w="9525">
+                <a14:hiddenLine xmlns="" xmlns:a14="http://schemas.microsoft.com/office/drawing/2010/main" w="9525">
                   <a:solidFill>
                     <a:srgbClr val="000000"/>
                   </a:solidFill>
@@ -2643,7 +2655,7 @@
             </a:ln>
             <a:extLst>
               <a:ext uri="{91240B29-F687-4f45-9708-019B960494DF}">
-                <a14:hiddenLine xmlns:a14="http://schemas.microsoft.com/office/drawing/2010/main" xmlns="" w="9525">
+                <a14:hiddenLine xmlns="" xmlns:a14="http://schemas.microsoft.com/office/drawing/2010/main" w="9525">
                   <a:solidFill>
                     <a:srgbClr val="000000"/>
                   </a:solidFill>
@@ -2733,7 +2745,7 @@
             </a:ln>
             <a:extLst>
               <a:ext uri="{91240B29-F687-4f45-9708-019B960494DF}">
-                <a14:hiddenLine xmlns:a14="http://schemas.microsoft.com/office/drawing/2010/main" xmlns="" w="9525">
+                <a14:hiddenLine xmlns="" xmlns:a14="http://schemas.microsoft.com/office/drawing/2010/main" w="9525">
                   <a:solidFill>
                     <a:srgbClr val="000000"/>
                   </a:solidFill>
@@ -2823,7 +2835,7 @@
             </a:ln>
             <a:extLst>
               <a:ext uri="{91240B29-F687-4f45-9708-019B960494DF}">
-                <a14:hiddenLine xmlns:a14="http://schemas.microsoft.com/office/drawing/2010/main" xmlns="" w="9525">
+                <a14:hiddenLine xmlns="" xmlns:a14="http://schemas.microsoft.com/office/drawing/2010/main" w="9525">
                   <a:solidFill>
                     <a:srgbClr val="000000"/>
                   </a:solidFill>
@@ -2885,7 +2897,7 @@
             </a:ln>
             <a:extLst>
               <a:ext uri="{91240B29-F687-4f45-9708-019B960494DF}">
-                <a14:hiddenLine xmlns:a14="http://schemas.microsoft.com/office/drawing/2010/main" xmlns="" w="9525">
+                <a14:hiddenLine xmlns="" xmlns:a14="http://schemas.microsoft.com/office/drawing/2010/main" w="9525">
                   <a:solidFill>
                     <a:srgbClr val="000000"/>
                   </a:solidFill>
@@ -2975,7 +2987,7 @@
             </a:ln>
             <a:extLst>
               <a:ext uri="{91240B29-F687-4f45-9708-019B960494DF}">
-                <a14:hiddenLine xmlns:a14="http://schemas.microsoft.com/office/drawing/2010/main" xmlns="" w="9525">
+                <a14:hiddenLine xmlns="" xmlns:a14="http://schemas.microsoft.com/office/drawing/2010/main" w="9525">
                   <a:solidFill>
                     <a:srgbClr val="000000"/>
                   </a:solidFill>
@@ -3065,7 +3077,7 @@
             </a:ln>
             <a:extLst>
               <a:ext uri="{91240B29-F687-4f45-9708-019B960494DF}">
-                <a14:hiddenLine xmlns:a14="http://schemas.microsoft.com/office/drawing/2010/main" xmlns="" w="9525">
+                <a14:hiddenLine xmlns="" xmlns:a14="http://schemas.microsoft.com/office/drawing/2010/main" w="9525">
                   <a:solidFill>
                     <a:srgbClr val="000000"/>
                   </a:solidFill>
@@ -3121,7 +3133,7 @@
             </a:ln>
             <a:extLst>
               <a:ext uri="{91240B29-F687-4f45-9708-019B960494DF}">
-                <a14:hiddenLine xmlns:a14="http://schemas.microsoft.com/office/drawing/2010/main" xmlns="" w="9525">
+                <a14:hiddenLine xmlns="" xmlns:a14="http://schemas.microsoft.com/office/drawing/2010/main" w="9525">
                   <a:solidFill>
                     <a:srgbClr val="000000"/>
                   </a:solidFill>
@@ -3211,7 +3223,7 @@
             </a:ln>
             <a:extLst>
               <a:ext uri="{91240B29-F687-4f45-9708-019B960494DF}">
-                <a14:hiddenLine xmlns:a14="http://schemas.microsoft.com/office/drawing/2010/main" xmlns="" w="9525">
+                <a14:hiddenLine xmlns="" xmlns:a14="http://schemas.microsoft.com/office/drawing/2010/main" w="9525">
                   <a:solidFill>
                     <a:srgbClr val="000000"/>
                   </a:solidFill>
@@ -3267,7 +3279,7 @@
             </a:ln>
             <a:extLst>
               <a:ext uri="{91240B29-F687-4f45-9708-019B960494DF}">
-                <a14:hiddenLine xmlns:a14="http://schemas.microsoft.com/office/drawing/2010/main" xmlns="" w="9525">
+                <a14:hiddenLine xmlns="" xmlns:a14="http://schemas.microsoft.com/office/drawing/2010/main" w="9525">
                   <a:solidFill>
                     <a:srgbClr val="000000"/>
                   </a:solidFill>
@@ -3357,7 +3369,7 @@
             </a:ln>
             <a:extLst>
               <a:ext uri="{91240B29-F687-4f45-9708-019B960494DF}">
-                <a14:hiddenLine xmlns:a14="http://schemas.microsoft.com/office/drawing/2010/main" xmlns="" w="9525">
+                <a14:hiddenLine xmlns="" xmlns:a14="http://schemas.microsoft.com/office/drawing/2010/main" w="9525">
                   <a:solidFill>
                     <a:srgbClr val="000000"/>
                   </a:solidFill>
@@ -3425,7 +3437,7 @@
             </a:ln>
             <a:extLst>
               <a:ext uri="{91240B29-F687-4f45-9708-019B960494DF}">
-                <a14:hiddenLine xmlns:a14="http://schemas.microsoft.com/office/drawing/2010/main" xmlns="" w="9525">
+                <a14:hiddenLine xmlns="" xmlns:a14="http://schemas.microsoft.com/office/drawing/2010/main" w="9525">
                   <a:solidFill>
                     <a:srgbClr val="000000"/>
                   </a:solidFill>
@@ -3515,7 +3527,7 @@
             </a:ln>
             <a:extLst>
               <a:ext uri="{91240B29-F687-4f45-9708-019B960494DF}">
-                <a14:hiddenLine xmlns:a14="http://schemas.microsoft.com/office/drawing/2010/main" xmlns="" w="9525">
+                <a14:hiddenLine xmlns="" xmlns:a14="http://schemas.microsoft.com/office/drawing/2010/main" w="9525">
                   <a:solidFill>
                     <a:srgbClr val="000000"/>
                   </a:solidFill>
@@ -3583,7 +3595,7 @@
             </a:ln>
             <a:extLst>
               <a:ext uri="{91240B29-F687-4f45-9708-019B960494DF}">
-                <a14:hiddenLine xmlns:a14="http://schemas.microsoft.com/office/drawing/2010/main" xmlns="" w="9525">
+                <a14:hiddenLine xmlns="" xmlns:a14="http://schemas.microsoft.com/office/drawing/2010/main" w="9525">
                   <a:solidFill>
                     <a:srgbClr val="000000"/>
                   </a:solidFill>
@@ -3673,7 +3685,7 @@
             </a:ln>
             <a:extLst>
               <a:ext uri="{91240B29-F687-4f45-9708-019B960494DF}">
-                <a14:hiddenLine xmlns:a14="http://schemas.microsoft.com/office/drawing/2010/main" xmlns="" w="9525">
+                <a14:hiddenLine xmlns="" xmlns:a14="http://schemas.microsoft.com/office/drawing/2010/main" w="9525">
                   <a:solidFill>
                     <a:srgbClr val="000000"/>
                   </a:solidFill>
@@ -3707,7 +3719,7 @@
             </a:ln>
             <a:extLst>
               <a:ext uri="{91240B29-F687-4f45-9708-019B960494DF}">
-                <a14:hiddenLine xmlns:a14="http://schemas.microsoft.com/office/drawing/2010/main" xmlns="" w="9525">
+                <a14:hiddenLine xmlns="" xmlns:a14="http://schemas.microsoft.com/office/drawing/2010/main" w="9525">
                   <a:solidFill>
                     <a:srgbClr val="000000"/>
                   </a:solidFill>
@@ -3797,7 +3809,7 @@
             </a:ln>
             <a:extLst>
               <a:ext uri="{91240B29-F687-4f45-9708-019B960494DF}">
-                <a14:hiddenLine xmlns:a14="http://schemas.microsoft.com/office/drawing/2010/main" xmlns="" w="9525">
+                <a14:hiddenLine xmlns="" xmlns:a14="http://schemas.microsoft.com/office/drawing/2010/main" w="9525">
                   <a:solidFill>
                     <a:srgbClr val="000000"/>
                   </a:solidFill>
@@ -3859,7 +3871,7 @@
             </a:ln>
             <a:extLst>
               <a:ext uri="{91240B29-F687-4f45-9708-019B960494DF}">
-                <a14:hiddenLine xmlns:a14="http://schemas.microsoft.com/office/drawing/2010/main" xmlns="" w="9525">
+                <a14:hiddenLine xmlns="" xmlns:a14="http://schemas.microsoft.com/office/drawing/2010/main" w="9525">
                   <a:solidFill>
                     <a:srgbClr val="000000"/>
                   </a:solidFill>
@@ -3921,7 +3933,7 @@
             </a:ln>
             <a:extLst>
               <a:ext uri="{91240B29-F687-4f45-9708-019B960494DF}">
-                <a14:hiddenLine xmlns:a14="http://schemas.microsoft.com/office/drawing/2010/main" xmlns="" w="9525">
+                <a14:hiddenLine xmlns="" xmlns:a14="http://schemas.microsoft.com/office/drawing/2010/main" w="9525">
                   <a:solidFill>
                     <a:srgbClr val="000000"/>
                   </a:solidFill>
@@ -4011,7 +4023,7 @@
             </a:ln>
             <a:extLst>
               <a:ext uri="{91240B29-F687-4f45-9708-019B960494DF}">
-                <a14:hiddenLine xmlns:a14="http://schemas.microsoft.com/office/drawing/2010/main" xmlns="" w="9525">
+                <a14:hiddenLine xmlns="" xmlns:a14="http://schemas.microsoft.com/office/drawing/2010/main" w="9525">
                   <a:solidFill>
                     <a:srgbClr val="000000"/>
                   </a:solidFill>
@@ -4079,7 +4091,7 @@
             </a:ln>
             <a:extLst>
               <a:ext uri="{91240B29-F687-4f45-9708-019B960494DF}">
-                <a14:hiddenLine xmlns:a14="http://schemas.microsoft.com/office/drawing/2010/main" xmlns="" w="9525">
+                <a14:hiddenLine xmlns="" xmlns:a14="http://schemas.microsoft.com/office/drawing/2010/main" w="9525">
                   <a:solidFill>
                     <a:srgbClr val="000000"/>
                   </a:solidFill>
@@ -4141,7 +4153,7 @@
             </a:ln>
             <a:extLst>
               <a:ext uri="{91240B29-F687-4f45-9708-019B960494DF}">
-                <a14:hiddenLine xmlns:a14="http://schemas.microsoft.com/office/drawing/2010/main" xmlns="" w="9525">
+                <a14:hiddenLine xmlns="" xmlns:a14="http://schemas.microsoft.com/office/drawing/2010/main" w="9525">
                   <a:solidFill>
                     <a:srgbClr val="000000"/>
                   </a:solidFill>
@@ -4231,7 +4243,7 @@
             </a:ln>
             <a:extLst>
               <a:ext uri="{91240B29-F687-4f45-9708-019B960494DF}">
-                <a14:hiddenLine xmlns:a14="http://schemas.microsoft.com/office/drawing/2010/main" xmlns="" w="9525">
+                <a14:hiddenLine xmlns="" xmlns:a14="http://schemas.microsoft.com/office/drawing/2010/main" w="9525">
                   <a:solidFill>
                     <a:srgbClr val="000000"/>
                   </a:solidFill>
@@ -4293,7 +4305,7 @@
             </a:ln>
             <a:extLst>
               <a:ext uri="{91240B29-F687-4f45-9708-019B960494DF}">
-                <a14:hiddenLine xmlns:a14="http://schemas.microsoft.com/office/drawing/2010/main" xmlns="" w="9525">
+                <a14:hiddenLine xmlns="" xmlns:a14="http://schemas.microsoft.com/office/drawing/2010/main" w="9525">
                   <a:solidFill>
                     <a:srgbClr val="000000"/>
                   </a:solidFill>
@@ -4383,7 +4395,7 @@
             </a:ln>
             <a:extLst>
               <a:ext uri="{91240B29-F687-4f45-9708-019B960494DF}">
-                <a14:hiddenLine xmlns:a14="http://schemas.microsoft.com/office/drawing/2010/main" xmlns="" w="9525">
+                <a14:hiddenLine xmlns="" xmlns:a14="http://schemas.microsoft.com/office/drawing/2010/main" w="9525">
                   <a:solidFill>
                     <a:srgbClr val="000000"/>
                   </a:solidFill>
@@ -4445,7 +4457,7 @@
             </a:ln>
             <a:extLst>
               <a:ext uri="{91240B29-F687-4f45-9708-019B960494DF}">
-                <a14:hiddenLine xmlns:a14="http://schemas.microsoft.com/office/drawing/2010/main" xmlns="" w="9525">
+                <a14:hiddenLine xmlns="" xmlns:a14="http://schemas.microsoft.com/office/drawing/2010/main" w="9525">
                   <a:solidFill>
                     <a:srgbClr val="000000"/>
                   </a:solidFill>
@@ -4535,7 +4547,7 @@
             </a:ln>
             <a:extLst>
               <a:ext uri="{91240B29-F687-4f45-9708-019B960494DF}">
-                <a14:hiddenLine xmlns:a14="http://schemas.microsoft.com/office/drawing/2010/main" xmlns="" w="9525">
+                <a14:hiddenLine xmlns="" xmlns:a14="http://schemas.microsoft.com/office/drawing/2010/main" w="9525">
                   <a:solidFill>
                     <a:srgbClr val="000000"/>
                   </a:solidFill>
@@ -4569,7 +4581,7 @@
             </a:ln>
             <a:extLst>
               <a:ext uri="{91240B29-F687-4f45-9708-019B960494DF}">
-                <a14:hiddenLine xmlns:a14="http://schemas.microsoft.com/office/drawing/2010/main" xmlns="" w="9525">
+                <a14:hiddenLine xmlns="" xmlns:a14="http://schemas.microsoft.com/office/drawing/2010/main" w="9525">
                   <a:solidFill>
                     <a:srgbClr val="000000"/>
                   </a:solidFill>
@@ -4634,7 +4646,7 @@
             </a:ln>
             <a:extLst>
               <a:ext uri="{91240B29-F687-4f45-9708-019B960494DF}">
-                <a14:hiddenLine xmlns:a14="http://schemas.microsoft.com/office/drawing/2010/main" xmlns="" w="9525">
+                <a14:hiddenLine xmlns="" xmlns:a14="http://schemas.microsoft.com/office/drawing/2010/main" w="9525">
                   <a:solidFill>
                     <a:srgbClr val="000000"/>
                   </a:solidFill>
@@ -4724,7 +4736,7 @@
             </a:ln>
             <a:extLst>
               <a:ext uri="{91240B29-F687-4f45-9708-019B960494DF}">
-                <a14:hiddenLine xmlns:a14="http://schemas.microsoft.com/office/drawing/2010/main" xmlns="" w="9525">
+                <a14:hiddenLine xmlns="" xmlns:a14="http://schemas.microsoft.com/office/drawing/2010/main" w="9525">
                   <a:solidFill>
                     <a:srgbClr val="000000"/>
                   </a:solidFill>
@@ -4786,7 +4798,7 @@
             </a:ln>
             <a:extLst>
               <a:ext uri="{91240B29-F687-4f45-9708-019B960494DF}">
-                <a14:hiddenLine xmlns:a14="http://schemas.microsoft.com/office/drawing/2010/main" xmlns="" w="9525">
+                <a14:hiddenLine xmlns="" xmlns:a14="http://schemas.microsoft.com/office/drawing/2010/main" w="9525">
                   <a:solidFill>
                     <a:srgbClr val="000000"/>
                   </a:solidFill>
@@ -4876,7 +4888,7 @@
             </a:ln>
             <a:extLst>
               <a:ext uri="{91240B29-F687-4f45-9708-019B960494DF}">
-                <a14:hiddenLine xmlns:a14="http://schemas.microsoft.com/office/drawing/2010/main" xmlns="" w="9525">
+                <a14:hiddenLine xmlns="" xmlns:a14="http://schemas.microsoft.com/office/drawing/2010/main" w="9525">
                   <a:solidFill>
                     <a:srgbClr val="000000"/>
                   </a:solidFill>
@@ -4966,7 +4978,7 @@
             </a:ln>
             <a:extLst>
               <a:ext uri="{91240B29-F687-4f45-9708-019B960494DF}">
-                <a14:hiddenLine xmlns:a14="http://schemas.microsoft.com/office/drawing/2010/main" xmlns="" w="9525">
+                <a14:hiddenLine xmlns="" xmlns:a14="http://schemas.microsoft.com/office/drawing/2010/main" w="9525">
                   <a:solidFill>
                     <a:srgbClr val="000000"/>
                   </a:solidFill>
@@ -5031,7 +5043,7 @@
             </a:ln>
             <a:extLst>
               <a:ext uri="{91240B29-F687-4f45-9708-019B960494DF}">
-                <a14:hiddenLine xmlns:a14="http://schemas.microsoft.com/office/drawing/2010/main" xmlns="" w="9525">
+                <a14:hiddenLine xmlns="" xmlns:a14="http://schemas.microsoft.com/office/drawing/2010/main" w="9525">
                   <a:solidFill>
                     <a:srgbClr val="000000"/>
                   </a:solidFill>
@@ -5093,7 +5105,7 @@
             </a:ln>
             <a:extLst>
               <a:ext uri="{91240B29-F687-4f45-9708-019B960494DF}">
-                <a14:hiddenLine xmlns:a14="http://schemas.microsoft.com/office/drawing/2010/main" xmlns="" w="9525">
+                <a14:hiddenLine xmlns="" xmlns:a14="http://schemas.microsoft.com/office/drawing/2010/main" w="9525">
                   <a:solidFill>
                     <a:srgbClr val="000000"/>
                   </a:solidFill>
@@ -5183,7 +5195,7 @@
             </a:ln>
             <a:extLst>
               <a:ext uri="{91240B29-F687-4f45-9708-019B960494DF}">
-                <a14:hiddenLine xmlns:a14="http://schemas.microsoft.com/office/drawing/2010/main" xmlns="" w="9525">
+                <a14:hiddenLine xmlns="" xmlns:a14="http://schemas.microsoft.com/office/drawing/2010/main" w="9525">
                   <a:solidFill>
                     <a:srgbClr val="000000"/>
                   </a:solidFill>
@@ -5273,7 +5285,7 @@
             </a:ln>
             <a:extLst>
               <a:ext uri="{91240B29-F687-4f45-9708-019B960494DF}">
-                <a14:hiddenLine xmlns:a14="http://schemas.microsoft.com/office/drawing/2010/main" xmlns="" w="9525">
+                <a14:hiddenLine xmlns="" xmlns:a14="http://schemas.microsoft.com/office/drawing/2010/main" w="9525">
                   <a:solidFill>
                     <a:srgbClr val="000000"/>
                   </a:solidFill>
@@ -5335,7 +5347,7 @@
             </a:ln>
             <a:extLst>
               <a:ext uri="{91240B29-F687-4f45-9708-019B960494DF}">
-                <a14:hiddenLine xmlns:a14="http://schemas.microsoft.com/office/drawing/2010/main" xmlns="" w="9525">
+                <a14:hiddenLine xmlns="" xmlns:a14="http://schemas.microsoft.com/office/drawing/2010/main" w="9525">
                   <a:solidFill>
                     <a:srgbClr val="000000"/>
                   </a:solidFill>
@@ -5455,7 +5467,7 @@
             </a:ln>
             <a:extLst>
               <a:ext uri="{91240B29-F687-4f45-9708-019B960494DF}">
-                <a14:hiddenLine xmlns:a14="http://schemas.microsoft.com/office/drawing/2010/main" xmlns="" w="9525">
+                <a14:hiddenLine xmlns="" xmlns:a14="http://schemas.microsoft.com/office/drawing/2010/main" w="9525">
                   <a:solidFill>
                     <a:srgbClr val="000000"/>
                   </a:solidFill>
@@ -5523,7 +5535,7 @@
             </a:ln>
             <a:extLst>
               <a:ext uri="{91240B29-F687-4f45-9708-019B960494DF}">
-                <a14:hiddenLine xmlns:a14="http://schemas.microsoft.com/office/drawing/2010/main" xmlns="" w="9525">
+                <a14:hiddenLine xmlns="" xmlns:a14="http://schemas.microsoft.com/office/drawing/2010/main" w="9525">
                   <a:solidFill>
                     <a:srgbClr val="000000"/>
                   </a:solidFill>
@@ -5613,7 +5625,7 @@
             </a:ln>
             <a:extLst>
               <a:ext uri="{91240B29-F687-4f45-9708-019B960494DF}">
-                <a14:hiddenLine xmlns:a14="http://schemas.microsoft.com/office/drawing/2010/main" xmlns="" w="9525">
+                <a14:hiddenLine xmlns="" xmlns:a14="http://schemas.microsoft.com/office/drawing/2010/main" w="9525">
                   <a:solidFill>
                     <a:srgbClr val="000000"/>
                   </a:solidFill>
@@ -10420,7 +10432,7 @@
           <a:noFill/>
           <a:extLst>
             <a:ext uri="{909E8E84-426E-40dd-AFC4-6F175D3DCCD1}">
-              <a14:hiddenFill xmlns:a14="http://schemas.microsoft.com/office/drawing/2010/main" xmlns="">
+              <a14:hiddenFill xmlns="" xmlns:a14="http://schemas.microsoft.com/office/drawing/2010/main">
                 <a:solidFill>
                   <a:srgbClr val="FFFFFF"/>
                 </a:solidFill>
@@ -10494,7 +10506,7 @@
               </a:ln>
               <a:extLst>
                 <a:ext uri="{91240B29-F687-4f45-9708-019B960494DF}">
-                  <a14:hiddenLine xmlns:a14="http://schemas.microsoft.com/office/drawing/2010/main" xmlns="" w="9525">
+                  <a14:hiddenLine xmlns="" xmlns:a14="http://schemas.microsoft.com/office/drawing/2010/main" w="9525">
                     <a:solidFill>
                       <a:srgbClr val="000000"/>
                     </a:solidFill>
@@ -10584,7 +10596,7 @@
               </a:ln>
               <a:extLst>
                 <a:ext uri="{91240B29-F687-4f45-9708-019B960494DF}">
-                  <a14:hiddenLine xmlns:a14="http://schemas.microsoft.com/office/drawing/2010/main" xmlns="" w="9525">
+                  <a14:hiddenLine xmlns="" xmlns:a14="http://schemas.microsoft.com/office/drawing/2010/main" w="9525">
                     <a:solidFill>
                       <a:srgbClr val="000000"/>
                     </a:solidFill>
@@ -10674,7 +10686,7 @@
               </a:ln>
               <a:extLst>
                 <a:ext uri="{91240B29-F687-4f45-9708-019B960494DF}">
-                  <a14:hiddenLine xmlns:a14="http://schemas.microsoft.com/office/drawing/2010/main" xmlns="" w="9525">
+                  <a14:hiddenLine xmlns="" xmlns:a14="http://schemas.microsoft.com/office/drawing/2010/main" w="9525">
                     <a:solidFill>
                       <a:srgbClr val="000000"/>
                     </a:solidFill>
@@ -10736,7 +10748,7 @@
               </a:ln>
               <a:extLst>
                 <a:ext uri="{91240B29-F687-4f45-9708-019B960494DF}">
-                  <a14:hiddenLine xmlns:a14="http://schemas.microsoft.com/office/drawing/2010/main" xmlns="" w="9525">
+                  <a14:hiddenLine xmlns="" xmlns:a14="http://schemas.microsoft.com/office/drawing/2010/main" w="9525">
                     <a:solidFill>
                       <a:srgbClr val="000000"/>
                     </a:solidFill>
@@ -10826,7 +10838,7 @@
               </a:ln>
               <a:extLst>
                 <a:ext uri="{91240B29-F687-4f45-9708-019B960494DF}">
-                  <a14:hiddenLine xmlns:a14="http://schemas.microsoft.com/office/drawing/2010/main" xmlns="" w="9525">
+                  <a14:hiddenLine xmlns="" xmlns:a14="http://schemas.microsoft.com/office/drawing/2010/main" w="9525">
                     <a:solidFill>
                       <a:srgbClr val="000000"/>
                     </a:solidFill>
@@ -10888,7 +10900,7 @@
               </a:ln>
               <a:extLst>
                 <a:ext uri="{91240B29-F687-4f45-9708-019B960494DF}">
-                  <a14:hiddenLine xmlns:a14="http://schemas.microsoft.com/office/drawing/2010/main" xmlns="" w="9525">
+                  <a14:hiddenLine xmlns="" xmlns:a14="http://schemas.microsoft.com/office/drawing/2010/main" w="9525">
                     <a:solidFill>
                       <a:srgbClr val="000000"/>
                     </a:solidFill>
@@ -10950,7 +10962,7 @@
               </a:ln>
               <a:extLst>
                 <a:ext uri="{91240B29-F687-4f45-9708-019B960494DF}">
-                  <a14:hiddenLine xmlns:a14="http://schemas.microsoft.com/office/drawing/2010/main" xmlns="" w="9525">
+                  <a14:hiddenLine xmlns="" xmlns:a14="http://schemas.microsoft.com/office/drawing/2010/main" w="9525">
                     <a:solidFill>
                       <a:srgbClr val="000000"/>
                     </a:solidFill>
@@ -11040,7 +11052,7 @@
               </a:ln>
               <a:extLst>
                 <a:ext uri="{91240B29-F687-4f45-9708-019B960494DF}">
-                  <a14:hiddenLine xmlns:a14="http://schemas.microsoft.com/office/drawing/2010/main" xmlns="" w="9525">
+                  <a14:hiddenLine xmlns="" xmlns:a14="http://schemas.microsoft.com/office/drawing/2010/main" w="9525">
                     <a:solidFill>
                       <a:srgbClr val="000000"/>
                     </a:solidFill>
@@ -11130,7 +11142,7 @@
               </a:ln>
               <a:extLst>
                 <a:ext uri="{91240B29-F687-4f45-9708-019B960494DF}">
-                  <a14:hiddenLine xmlns:a14="http://schemas.microsoft.com/office/drawing/2010/main" xmlns="" w="9525">
+                  <a14:hiddenLine xmlns="" xmlns:a14="http://schemas.microsoft.com/office/drawing/2010/main" w="9525">
                     <a:solidFill>
                       <a:srgbClr val="000000"/>
                     </a:solidFill>
@@ -11192,7 +11204,7 @@
               </a:ln>
               <a:extLst>
                 <a:ext uri="{91240B29-F687-4f45-9708-019B960494DF}">
-                  <a14:hiddenLine xmlns:a14="http://schemas.microsoft.com/office/drawing/2010/main" xmlns="" w="9525">
+                  <a14:hiddenLine xmlns="" xmlns:a14="http://schemas.microsoft.com/office/drawing/2010/main" w="9525">
                     <a:solidFill>
                       <a:srgbClr val="000000"/>
                     </a:solidFill>
@@ -11302,7 +11314,7 @@
               </a:ln>
               <a:extLst>
                 <a:ext uri="{91240B29-F687-4f45-9708-019B960494DF}">
-                  <a14:hiddenLine xmlns:a14="http://schemas.microsoft.com/office/drawing/2010/main" xmlns="" w="9525">
+                  <a14:hiddenLine xmlns="" xmlns:a14="http://schemas.microsoft.com/office/drawing/2010/main" w="9525">
                     <a:solidFill>
                       <a:srgbClr val="000000"/>
                     </a:solidFill>
@@ -11386,7 +11398,7 @@
               </a:ln>
               <a:extLst>
                 <a:ext uri="{91240B29-F687-4f45-9708-019B960494DF}">
-                  <a14:hiddenLine xmlns:a14="http://schemas.microsoft.com/office/drawing/2010/main" xmlns="" w="9525">
+                  <a14:hiddenLine xmlns="" xmlns:a14="http://schemas.microsoft.com/office/drawing/2010/main" w="9525">
                     <a:solidFill>
                       <a:srgbClr val="000000"/>
                     </a:solidFill>
@@ -11448,7 +11460,7 @@
               </a:ln>
               <a:extLst>
                 <a:ext uri="{91240B29-F687-4f45-9708-019B960494DF}">
-                  <a14:hiddenLine xmlns:a14="http://schemas.microsoft.com/office/drawing/2010/main" xmlns="" w="9525">
+                  <a14:hiddenLine xmlns="" xmlns:a14="http://schemas.microsoft.com/office/drawing/2010/main" w="9525">
                     <a:solidFill>
                       <a:srgbClr val="000000"/>
                     </a:solidFill>
@@ -11510,7 +11522,7 @@
               </a:ln>
               <a:extLst>
                 <a:ext uri="{91240B29-F687-4f45-9708-019B960494DF}">
-                  <a14:hiddenLine xmlns:a14="http://schemas.microsoft.com/office/drawing/2010/main" xmlns="" w="9525">
+                  <a14:hiddenLine xmlns="" xmlns:a14="http://schemas.microsoft.com/office/drawing/2010/main" w="9525">
                     <a:solidFill>
                       <a:srgbClr val="000000"/>
                     </a:solidFill>
@@ -11600,7 +11612,7 @@
               </a:ln>
               <a:extLst>
                 <a:ext uri="{91240B29-F687-4f45-9708-019B960494DF}">
-                  <a14:hiddenLine xmlns:a14="http://schemas.microsoft.com/office/drawing/2010/main" xmlns="" w="9525">
+                  <a14:hiddenLine xmlns="" xmlns:a14="http://schemas.microsoft.com/office/drawing/2010/main" w="9525">
                     <a:solidFill>
                       <a:srgbClr val="000000"/>
                     </a:solidFill>
@@ -11634,7 +11646,7 @@
               </a:ln>
               <a:extLst>
                 <a:ext uri="{91240B29-F687-4f45-9708-019B960494DF}">
-                  <a14:hiddenLine xmlns:a14="http://schemas.microsoft.com/office/drawing/2010/main" xmlns="" w="9525">
+                  <a14:hiddenLine xmlns="" xmlns:a14="http://schemas.microsoft.com/office/drawing/2010/main" w="9525">
                     <a:solidFill>
                       <a:srgbClr val="000000"/>
                     </a:solidFill>
@@ -11699,7 +11711,7 @@
               </a:ln>
               <a:extLst>
                 <a:ext uri="{91240B29-F687-4f45-9708-019B960494DF}">
-                  <a14:hiddenLine xmlns:a14="http://schemas.microsoft.com/office/drawing/2010/main" xmlns="" w="9525">
+                  <a14:hiddenLine xmlns="" xmlns:a14="http://schemas.microsoft.com/office/drawing/2010/main" w="9525">
                     <a:solidFill>
                       <a:srgbClr val="000000"/>
                     </a:solidFill>
@@ -11789,7 +11801,7 @@
               </a:ln>
               <a:extLst>
                 <a:ext uri="{91240B29-F687-4f45-9708-019B960494DF}">
-                  <a14:hiddenLine xmlns:a14="http://schemas.microsoft.com/office/drawing/2010/main" xmlns="" w="9525">
+                  <a14:hiddenLine xmlns="" xmlns:a14="http://schemas.microsoft.com/office/drawing/2010/main" w="9525">
                     <a:solidFill>
                       <a:srgbClr val="000000"/>
                     </a:solidFill>
@@ -11851,7 +11863,7 @@
               </a:ln>
               <a:extLst>
                 <a:ext uri="{91240B29-F687-4f45-9708-019B960494DF}">
-                  <a14:hiddenLine xmlns:a14="http://schemas.microsoft.com/office/drawing/2010/main" xmlns="" w="9525">
+                  <a14:hiddenLine xmlns="" xmlns:a14="http://schemas.microsoft.com/office/drawing/2010/main" w="9525">
                     <a:solidFill>
                       <a:srgbClr val="000000"/>
                     </a:solidFill>
@@ -11941,7 +11953,7 @@
               </a:ln>
               <a:extLst>
                 <a:ext uri="{91240B29-F687-4f45-9708-019B960494DF}">
-                  <a14:hiddenLine xmlns:a14="http://schemas.microsoft.com/office/drawing/2010/main" xmlns="" w="9525">
+                  <a14:hiddenLine xmlns="" xmlns:a14="http://schemas.microsoft.com/office/drawing/2010/main" w="9525">
                     <a:solidFill>
                       <a:srgbClr val="000000"/>
                     </a:solidFill>
@@ -12006,7 +12018,7 @@
               </a:ln>
               <a:extLst>
                 <a:ext uri="{91240B29-F687-4f45-9708-019B960494DF}">
-                  <a14:hiddenLine xmlns:a14="http://schemas.microsoft.com/office/drawing/2010/main" xmlns="" w="9525">
+                  <a14:hiddenLine xmlns="" xmlns:a14="http://schemas.microsoft.com/office/drawing/2010/main" w="9525">
                     <a:solidFill>
                       <a:srgbClr val="000000"/>
                     </a:solidFill>
@@ -12068,7 +12080,7 @@
               </a:ln>
               <a:extLst>
                 <a:ext uri="{91240B29-F687-4f45-9708-019B960494DF}">
-                  <a14:hiddenLine xmlns:a14="http://schemas.microsoft.com/office/drawing/2010/main" xmlns="" w="9525">
+                  <a14:hiddenLine xmlns="" xmlns:a14="http://schemas.microsoft.com/office/drawing/2010/main" w="9525">
                     <a:solidFill>
                       <a:srgbClr val="000000"/>
                     </a:solidFill>
@@ -12158,7 +12170,7 @@
               </a:ln>
               <a:extLst>
                 <a:ext uri="{91240B29-F687-4f45-9708-019B960494DF}">
-                  <a14:hiddenLine xmlns:a14="http://schemas.microsoft.com/office/drawing/2010/main" xmlns="" w="9525">
+                  <a14:hiddenLine xmlns="" xmlns:a14="http://schemas.microsoft.com/office/drawing/2010/main" w="9525">
                     <a:solidFill>
                       <a:srgbClr val="000000"/>
                     </a:solidFill>
@@ -12248,7 +12260,7 @@
               </a:ln>
               <a:extLst>
                 <a:ext uri="{91240B29-F687-4f45-9708-019B960494DF}">
-                  <a14:hiddenLine xmlns:a14="http://schemas.microsoft.com/office/drawing/2010/main" xmlns="" w="9525">
+                  <a14:hiddenLine xmlns="" xmlns:a14="http://schemas.microsoft.com/office/drawing/2010/main" w="9525">
                     <a:solidFill>
                       <a:srgbClr val="000000"/>
                     </a:solidFill>
@@ -12313,7 +12325,7 @@
               </a:ln>
               <a:extLst>
                 <a:ext uri="{91240B29-F687-4f45-9708-019B960494DF}">
-                  <a14:hiddenLine xmlns:a14="http://schemas.microsoft.com/office/drawing/2010/main" xmlns="" w="9525">
+                  <a14:hiddenLine xmlns="" xmlns:a14="http://schemas.microsoft.com/office/drawing/2010/main" w="9525">
                     <a:solidFill>
                       <a:srgbClr val="000000"/>
                     </a:solidFill>
@@ -12433,7 +12445,7 @@
               </a:ln>
               <a:extLst>
                 <a:ext uri="{91240B29-F687-4f45-9708-019B960494DF}">
-                  <a14:hiddenLine xmlns:a14="http://schemas.microsoft.com/office/drawing/2010/main" xmlns="" w="9525">
+                  <a14:hiddenLine xmlns="" xmlns:a14="http://schemas.microsoft.com/office/drawing/2010/main" w="9525">
                     <a:solidFill>
                       <a:srgbClr val="000000"/>
                     </a:solidFill>
@@ -12531,7 +12543,7 @@
               </a:ln>
               <a:extLst>
                 <a:ext uri="{91240B29-F687-4f45-9708-019B960494DF}">
-                  <a14:hiddenLine xmlns:a14="http://schemas.microsoft.com/office/drawing/2010/main" xmlns="" w="9525">
+                  <a14:hiddenLine xmlns="" xmlns:a14="http://schemas.microsoft.com/office/drawing/2010/main" w="9525">
                     <a:solidFill>
                       <a:srgbClr val="000000"/>
                     </a:solidFill>
@@ -12646,7 +12658,7 @@
               </a:ln>
               <a:extLst>
                 <a:ext uri="{91240B29-F687-4f45-9708-019B960494DF}">
-                  <a14:hiddenLine xmlns:a14="http://schemas.microsoft.com/office/drawing/2010/main" xmlns="" w="9525">
+                  <a14:hiddenLine xmlns="" xmlns:a14="http://schemas.microsoft.com/office/drawing/2010/main" w="9525">
                     <a:solidFill>
                       <a:srgbClr val="000000"/>
                     </a:solidFill>
@@ -12736,7 +12748,7 @@
               </a:ln>
               <a:extLst>
                 <a:ext uri="{91240B29-F687-4f45-9708-019B960494DF}">
-                  <a14:hiddenLine xmlns:a14="http://schemas.microsoft.com/office/drawing/2010/main" xmlns="" w="9525">
+                  <a14:hiddenLine xmlns="" xmlns:a14="http://schemas.microsoft.com/office/drawing/2010/main" w="9525">
                     <a:solidFill>
                       <a:srgbClr val="000000"/>
                     </a:solidFill>
@@ -12801,7 +12813,7 @@
               </a:ln>
               <a:extLst>
                 <a:ext uri="{91240B29-F687-4f45-9708-019B960494DF}">
-                  <a14:hiddenLine xmlns:a14="http://schemas.microsoft.com/office/drawing/2010/main" xmlns="" w="9525">
+                  <a14:hiddenLine xmlns="" xmlns:a14="http://schemas.microsoft.com/office/drawing/2010/main" w="9525">
                     <a:solidFill>
                       <a:srgbClr val="000000"/>
                     </a:solidFill>
@@ -12891,7 +12903,7 @@
               </a:ln>
               <a:extLst>
                 <a:ext uri="{91240B29-F687-4f45-9708-019B960494DF}">
-                  <a14:hiddenLine xmlns:a14="http://schemas.microsoft.com/office/drawing/2010/main" xmlns="" w="9525">
+                  <a14:hiddenLine xmlns="" xmlns:a14="http://schemas.microsoft.com/office/drawing/2010/main" w="9525">
                     <a:solidFill>
                       <a:srgbClr val="000000"/>
                     </a:solidFill>
@@ -12959,7 +12971,7 @@
               </a:ln>
               <a:extLst>
                 <a:ext uri="{91240B29-F687-4f45-9708-019B960494DF}">
-                  <a14:hiddenLine xmlns:a14="http://schemas.microsoft.com/office/drawing/2010/main" xmlns="" w="9525">
+                  <a14:hiddenLine xmlns="" xmlns:a14="http://schemas.microsoft.com/office/drawing/2010/main" w="9525">
                     <a:solidFill>
                       <a:srgbClr val="000000"/>
                     </a:solidFill>
@@ -13049,7 +13061,7 @@
               </a:ln>
               <a:extLst>
                 <a:ext uri="{91240B29-F687-4f45-9708-019B960494DF}">
-                  <a14:hiddenLine xmlns:a14="http://schemas.microsoft.com/office/drawing/2010/main" xmlns="" w="9525">
+                  <a14:hiddenLine xmlns="" xmlns:a14="http://schemas.microsoft.com/office/drawing/2010/main" w="9525">
                     <a:solidFill>
                       <a:srgbClr val="000000"/>
                     </a:solidFill>
@@ -13117,7 +13129,7 @@
               </a:ln>
               <a:extLst>
                 <a:ext uri="{91240B29-F687-4f45-9708-019B960494DF}">
-                  <a14:hiddenLine xmlns:a14="http://schemas.microsoft.com/office/drawing/2010/main" xmlns="" w="9525">
+                  <a14:hiddenLine xmlns="" xmlns:a14="http://schemas.microsoft.com/office/drawing/2010/main" w="9525">
                     <a:solidFill>
                       <a:srgbClr val="000000"/>
                     </a:solidFill>
@@ -13207,7 +13219,7 @@
               </a:ln>
               <a:extLst>
                 <a:ext uri="{91240B29-F687-4f45-9708-019B960494DF}">
-                  <a14:hiddenLine xmlns:a14="http://schemas.microsoft.com/office/drawing/2010/main" xmlns="" w="9525">
+                  <a14:hiddenLine xmlns="" xmlns:a14="http://schemas.microsoft.com/office/drawing/2010/main" w="9525">
                     <a:solidFill>
                       <a:srgbClr val="000000"/>
                     </a:solidFill>
@@ -13241,7 +13253,7 @@
               </a:ln>
               <a:extLst>
                 <a:ext uri="{91240B29-F687-4f45-9708-019B960494DF}">
-                  <a14:hiddenLine xmlns:a14="http://schemas.microsoft.com/office/drawing/2010/main" xmlns="" w="9525">
+                  <a14:hiddenLine xmlns="" xmlns:a14="http://schemas.microsoft.com/office/drawing/2010/main" w="9525">
                     <a:solidFill>
                       <a:srgbClr val="000000"/>
                     </a:solidFill>

--- a/dr/presentation.pptx
+++ b/dr/presentation.pptx
@@ -218,7 +218,7 @@
           <a:p>
             <a:fld id="{EA7AC966-8BEE-4CAC-9D5B-6621CFB65C26}" type="datetimeFigureOut">
               <a:rPr lang="bg-BG" smtClean="0"/>
-              <a:t>14.5.2025 г.</a:t>
+              <a:t>21.5.2025 г.</a:t>
             </a:fld>
             <a:endParaRPr lang="bg-BG"/>
           </a:p>
@@ -563,22 +563,10 @@
                 <a:ea typeface="+mn-ea"/>
                 <a:cs typeface="+mn-cs"/>
               </a:rPr>
-              <a:t>Аз съм Георги Бистрин. </a:t>
+              <a:t>Аз съм Георги Бистрин. Темата на моят дипломен проект е „</a:t>
             </a:r>
             <a:r>
-              <a:rPr lang="bg-BG" sz="1200" b="1" kern="1200" smtClean="0">
-                <a:solidFill>
-                  <a:schemeClr val="tx1"/>
-                </a:solidFill>
-                <a:effectLst/>
-                <a:latin typeface="+mn-lt"/>
-                <a:ea typeface="+mn-ea"/>
-                <a:cs typeface="+mn-cs"/>
-              </a:rPr>
-              <a:t>Темата на моят дипломен проект е „</a:t>
-            </a:r>
-            <a:r>
-              <a:rPr lang="bg-BG" sz="1200" kern="1200" smtClean="0">
+              <a:rPr lang="bg-BG" sz="1200" kern="1200" dirty="0" smtClean="0">
                 <a:solidFill>
                   <a:schemeClr val="tx1"/>
                 </a:solidFill>
@@ -591,7 +579,7 @@
             </a:r>
           </a:p>
           <a:p>
-            <a:endParaRPr lang="bg-BG"/>
+            <a:endParaRPr lang="bg-BG" dirty="0"/>
           </a:p>
         </p:txBody>
       </p:sp>
@@ -1120,11 +1108,7 @@
             </a:r>
             <a:r>
               <a:rPr lang="bg-BG" dirty="0" smtClean="0"/>
-              <a:t>, </a:t>
-            </a:r>
-            <a:r>
-              <a:rPr lang="bg-BG" dirty="0" smtClean="0"/>
-              <a:t>поддържаща MVC архитектура, която осигурява отделяне на логиката, дизайна и данните. Това прави приложението по-лесно за разработка, поддръжка и разширяване, като същевременно осигурява набор от вградени функционалности като аутентификация, админ панел и ORM.</a:t>
+              <a:t>, поддържаща MVC архитектура, която осигурява отделяне на логиката, дизайна и данните. Това прави приложението по-лесно за разработка, поддръжка и разширяване, като същевременно осигурява набор от вградени функционалности като аутентификация, админ панел и ORM.</a:t>
             </a:r>
           </a:p>
           <a:p>
@@ -1539,7 +1523,7 @@
           <a:noFill/>
           <a:extLst>
             <a:ext uri="{909E8E84-426E-40dd-AFC4-6F175D3DCCD1}">
-              <a14:hiddenFill xmlns="" xmlns:a14="http://schemas.microsoft.com/office/drawing/2010/main">
+              <a14:hiddenFill xmlns:a14="http://schemas.microsoft.com/office/drawing/2010/main" xmlns="">
                 <a:solidFill>
                   <a:srgbClr val="FFFFFF"/>
                 </a:solidFill>
@@ -1599,7 +1583,7 @@
             </a:ln>
             <a:extLst>
               <a:ext uri="{91240B29-F687-4f45-9708-019B960494DF}">
-                <a14:hiddenLine xmlns="" xmlns:a14="http://schemas.microsoft.com/office/drawing/2010/main" w="9525">
+                <a14:hiddenLine xmlns:a14="http://schemas.microsoft.com/office/drawing/2010/main" xmlns="" w="9525">
                   <a:solidFill>
                     <a:srgbClr val="000000"/>
                   </a:solidFill>
@@ -1689,7 +1673,7 @@
             </a:ln>
             <a:extLst>
               <a:ext uri="{91240B29-F687-4f45-9708-019B960494DF}">
-                <a14:hiddenLine xmlns="" xmlns:a14="http://schemas.microsoft.com/office/drawing/2010/main" w="9525">
+                <a14:hiddenLine xmlns:a14="http://schemas.microsoft.com/office/drawing/2010/main" xmlns="" w="9525">
                   <a:solidFill>
                     <a:srgbClr val="000000"/>
                   </a:solidFill>
@@ -1779,7 +1763,7 @@
             </a:ln>
             <a:extLst>
               <a:ext uri="{91240B29-F687-4f45-9708-019B960494DF}">
-                <a14:hiddenLine xmlns="" xmlns:a14="http://schemas.microsoft.com/office/drawing/2010/main" w="9525">
+                <a14:hiddenLine xmlns:a14="http://schemas.microsoft.com/office/drawing/2010/main" xmlns="" w="9525">
                   <a:solidFill>
                     <a:srgbClr val="000000"/>
                   </a:solidFill>
@@ -1813,7 +1797,7 @@
             </a:ln>
             <a:extLst>
               <a:ext uri="{91240B29-F687-4f45-9708-019B960494DF}">
-                <a14:hiddenLine xmlns="" xmlns:a14="http://schemas.microsoft.com/office/drawing/2010/main" w="9525">
+                <a14:hiddenLine xmlns:a14="http://schemas.microsoft.com/office/drawing/2010/main" xmlns="" w="9525">
                   <a:solidFill>
                     <a:srgbClr val="000000"/>
                   </a:solidFill>
@@ -1903,7 +1887,7 @@
             </a:ln>
             <a:extLst>
               <a:ext uri="{91240B29-F687-4f45-9708-019B960494DF}">
-                <a14:hiddenLine xmlns="" xmlns:a14="http://schemas.microsoft.com/office/drawing/2010/main" w="9525">
+                <a14:hiddenLine xmlns:a14="http://schemas.microsoft.com/office/drawing/2010/main" xmlns="" w="9525">
                   <a:solidFill>
                     <a:srgbClr val="000000"/>
                   </a:solidFill>
@@ -1965,7 +1949,7 @@
             </a:ln>
             <a:extLst>
               <a:ext uri="{91240B29-F687-4f45-9708-019B960494DF}">
-                <a14:hiddenLine xmlns="" xmlns:a14="http://schemas.microsoft.com/office/drawing/2010/main" w="9525">
+                <a14:hiddenLine xmlns:a14="http://schemas.microsoft.com/office/drawing/2010/main" xmlns="" w="9525">
                   <a:solidFill>
                     <a:srgbClr val="000000"/>
                   </a:solidFill>
@@ -2027,7 +2011,7 @@
             </a:ln>
             <a:extLst>
               <a:ext uri="{91240B29-F687-4f45-9708-019B960494DF}">
-                <a14:hiddenLine xmlns="" xmlns:a14="http://schemas.microsoft.com/office/drawing/2010/main" w="9525">
+                <a14:hiddenLine xmlns:a14="http://schemas.microsoft.com/office/drawing/2010/main" xmlns="" w="9525">
                   <a:solidFill>
                     <a:srgbClr val="000000"/>
                   </a:solidFill>
@@ -2117,7 +2101,7 @@
             </a:ln>
             <a:extLst>
               <a:ext uri="{91240B29-F687-4f45-9708-019B960494DF}">
-                <a14:hiddenLine xmlns="" xmlns:a14="http://schemas.microsoft.com/office/drawing/2010/main" w="9525">
+                <a14:hiddenLine xmlns:a14="http://schemas.microsoft.com/office/drawing/2010/main" xmlns="" w="9525">
                   <a:solidFill>
                     <a:srgbClr val="000000"/>
                   </a:solidFill>
@@ -2179,7 +2163,7 @@
             </a:ln>
             <a:extLst>
               <a:ext uri="{91240B29-F687-4f45-9708-019B960494DF}">
-                <a14:hiddenLine xmlns="" xmlns:a14="http://schemas.microsoft.com/office/drawing/2010/main" w="9525">
+                <a14:hiddenLine xmlns:a14="http://schemas.microsoft.com/office/drawing/2010/main" xmlns="" w="9525">
                   <a:solidFill>
                     <a:srgbClr val="000000"/>
                   </a:solidFill>
@@ -2241,7 +2225,7 @@
             </a:ln>
             <a:extLst>
               <a:ext uri="{91240B29-F687-4f45-9708-019B960494DF}">
-                <a14:hiddenLine xmlns="" xmlns:a14="http://schemas.microsoft.com/office/drawing/2010/main" w="9525">
+                <a14:hiddenLine xmlns:a14="http://schemas.microsoft.com/office/drawing/2010/main" xmlns="" w="9525">
                   <a:solidFill>
                     <a:srgbClr val="000000"/>
                   </a:solidFill>
@@ -2331,7 +2315,7 @@
             </a:ln>
             <a:extLst>
               <a:ext uri="{91240B29-F687-4f45-9708-019B960494DF}">
-                <a14:hiddenLine xmlns="" xmlns:a14="http://schemas.microsoft.com/office/drawing/2010/main" w="9525">
+                <a14:hiddenLine xmlns:a14="http://schemas.microsoft.com/office/drawing/2010/main" xmlns="" w="9525">
                   <a:solidFill>
                     <a:srgbClr val="000000"/>
                   </a:solidFill>
@@ -2421,7 +2405,7 @@
             </a:ln>
             <a:extLst>
               <a:ext uri="{91240B29-F687-4f45-9708-019B960494DF}">
-                <a14:hiddenLine xmlns="" xmlns:a14="http://schemas.microsoft.com/office/drawing/2010/main" w="9525">
+                <a14:hiddenLine xmlns:a14="http://schemas.microsoft.com/office/drawing/2010/main" xmlns="" w="9525">
                   <a:solidFill>
                     <a:srgbClr val="000000"/>
                   </a:solidFill>
@@ -2483,7 +2467,7 @@
             </a:ln>
             <a:extLst>
               <a:ext uri="{91240B29-F687-4f45-9708-019B960494DF}">
-                <a14:hiddenLine xmlns="" xmlns:a14="http://schemas.microsoft.com/office/drawing/2010/main" w="9525">
+                <a14:hiddenLine xmlns:a14="http://schemas.microsoft.com/office/drawing/2010/main" xmlns="" w="9525">
                   <a:solidFill>
                     <a:srgbClr val="000000"/>
                   </a:solidFill>
@@ -2593,7 +2577,7 @@
             </a:ln>
             <a:extLst>
               <a:ext uri="{91240B29-F687-4f45-9708-019B960494DF}">
-                <a14:hiddenLine xmlns="" xmlns:a14="http://schemas.microsoft.com/office/drawing/2010/main" w="9525">
+                <a14:hiddenLine xmlns:a14="http://schemas.microsoft.com/office/drawing/2010/main" xmlns="" w="9525">
                   <a:solidFill>
                     <a:srgbClr val="000000"/>
                   </a:solidFill>
@@ -2655,7 +2639,7 @@
             </a:ln>
             <a:extLst>
               <a:ext uri="{91240B29-F687-4f45-9708-019B960494DF}">
-                <a14:hiddenLine xmlns="" xmlns:a14="http://schemas.microsoft.com/office/drawing/2010/main" w="9525">
+                <a14:hiddenLine xmlns:a14="http://schemas.microsoft.com/office/drawing/2010/main" xmlns="" w="9525">
                   <a:solidFill>
                     <a:srgbClr val="000000"/>
                   </a:solidFill>
@@ -2745,7 +2729,7 @@
             </a:ln>
             <a:extLst>
               <a:ext uri="{91240B29-F687-4f45-9708-019B960494DF}">
-                <a14:hiddenLine xmlns="" xmlns:a14="http://schemas.microsoft.com/office/drawing/2010/main" w="9525">
+                <a14:hiddenLine xmlns:a14="http://schemas.microsoft.com/office/drawing/2010/main" xmlns="" w="9525">
                   <a:solidFill>
                     <a:srgbClr val="000000"/>
                   </a:solidFill>
@@ -2835,7 +2819,7 @@
             </a:ln>
             <a:extLst>
               <a:ext uri="{91240B29-F687-4f45-9708-019B960494DF}">
-                <a14:hiddenLine xmlns="" xmlns:a14="http://schemas.microsoft.com/office/drawing/2010/main" w="9525">
+                <a14:hiddenLine xmlns:a14="http://schemas.microsoft.com/office/drawing/2010/main" xmlns="" w="9525">
                   <a:solidFill>
                     <a:srgbClr val="000000"/>
                   </a:solidFill>
@@ -2897,7 +2881,7 @@
             </a:ln>
             <a:extLst>
               <a:ext uri="{91240B29-F687-4f45-9708-019B960494DF}">
-                <a14:hiddenLine xmlns="" xmlns:a14="http://schemas.microsoft.com/office/drawing/2010/main" w="9525">
+                <a14:hiddenLine xmlns:a14="http://schemas.microsoft.com/office/drawing/2010/main" xmlns="" w="9525">
                   <a:solidFill>
                     <a:srgbClr val="000000"/>
                   </a:solidFill>
@@ -2987,7 +2971,7 @@
             </a:ln>
             <a:extLst>
               <a:ext uri="{91240B29-F687-4f45-9708-019B960494DF}">
-                <a14:hiddenLine xmlns="" xmlns:a14="http://schemas.microsoft.com/office/drawing/2010/main" w="9525">
+                <a14:hiddenLine xmlns:a14="http://schemas.microsoft.com/office/drawing/2010/main" xmlns="" w="9525">
                   <a:solidFill>
                     <a:srgbClr val="000000"/>
                   </a:solidFill>
@@ -3077,7 +3061,7 @@
             </a:ln>
             <a:extLst>
               <a:ext uri="{91240B29-F687-4f45-9708-019B960494DF}">
-                <a14:hiddenLine xmlns="" xmlns:a14="http://schemas.microsoft.com/office/drawing/2010/main" w="9525">
+                <a14:hiddenLine xmlns:a14="http://schemas.microsoft.com/office/drawing/2010/main" xmlns="" w="9525">
                   <a:solidFill>
                     <a:srgbClr val="000000"/>
                   </a:solidFill>
@@ -3133,7 +3117,7 @@
             </a:ln>
             <a:extLst>
               <a:ext uri="{91240B29-F687-4f45-9708-019B960494DF}">
-                <a14:hiddenLine xmlns="" xmlns:a14="http://schemas.microsoft.com/office/drawing/2010/main" w="9525">
+                <a14:hiddenLine xmlns:a14="http://schemas.microsoft.com/office/drawing/2010/main" xmlns="" w="9525">
                   <a:solidFill>
                     <a:srgbClr val="000000"/>
                   </a:solidFill>
@@ -3223,7 +3207,7 @@
             </a:ln>
             <a:extLst>
               <a:ext uri="{91240B29-F687-4f45-9708-019B960494DF}">
-                <a14:hiddenLine xmlns="" xmlns:a14="http://schemas.microsoft.com/office/drawing/2010/main" w="9525">
+                <a14:hiddenLine xmlns:a14="http://schemas.microsoft.com/office/drawing/2010/main" xmlns="" w="9525">
                   <a:solidFill>
                     <a:srgbClr val="000000"/>
                   </a:solidFill>
@@ -3279,7 +3263,7 @@
             </a:ln>
             <a:extLst>
               <a:ext uri="{91240B29-F687-4f45-9708-019B960494DF}">
-                <a14:hiddenLine xmlns="" xmlns:a14="http://schemas.microsoft.com/office/drawing/2010/main" w="9525">
+                <a14:hiddenLine xmlns:a14="http://schemas.microsoft.com/office/drawing/2010/main" xmlns="" w="9525">
                   <a:solidFill>
                     <a:srgbClr val="000000"/>
                   </a:solidFill>
@@ -3369,7 +3353,7 @@
             </a:ln>
             <a:extLst>
               <a:ext uri="{91240B29-F687-4f45-9708-019B960494DF}">
-                <a14:hiddenLine xmlns="" xmlns:a14="http://schemas.microsoft.com/office/drawing/2010/main" w="9525">
+                <a14:hiddenLine xmlns:a14="http://schemas.microsoft.com/office/drawing/2010/main" xmlns="" w="9525">
                   <a:solidFill>
                     <a:srgbClr val="000000"/>
                   </a:solidFill>
@@ -3437,7 +3421,7 @@
             </a:ln>
             <a:extLst>
               <a:ext uri="{91240B29-F687-4f45-9708-019B960494DF}">
-                <a14:hiddenLine xmlns="" xmlns:a14="http://schemas.microsoft.com/office/drawing/2010/main" w="9525">
+                <a14:hiddenLine xmlns:a14="http://schemas.microsoft.com/office/drawing/2010/main" xmlns="" w="9525">
                   <a:solidFill>
                     <a:srgbClr val="000000"/>
                   </a:solidFill>
@@ -3527,7 +3511,7 @@
             </a:ln>
             <a:extLst>
               <a:ext uri="{91240B29-F687-4f45-9708-019B960494DF}">
-                <a14:hiddenLine xmlns="" xmlns:a14="http://schemas.microsoft.com/office/drawing/2010/main" w="9525">
+                <a14:hiddenLine xmlns:a14="http://schemas.microsoft.com/office/drawing/2010/main" xmlns="" w="9525">
                   <a:solidFill>
                     <a:srgbClr val="000000"/>
                   </a:solidFill>
@@ -3595,7 +3579,7 @@
             </a:ln>
             <a:extLst>
               <a:ext uri="{91240B29-F687-4f45-9708-019B960494DF}">
-                <a14:hiddenLine xmlns="" xmlns:a14="http://schemas.microsoft.com/office/drawing/2010/main" w="9525">
+                <a14:hiddenLine xmlns:a14="http://schemas.microsoft.com/office/drawing/2010/main" xmlns="" w="9525">
                   <a:solidFill>
                     <a:srgbClr val="000000"/>
                   </a:solidFill>
@@ -3685,7 +3669,7 @@
             </a:ln>
             <a:extLst>
               <a:ext uri="{91240B29-F687-4f45-9708-019B960494DF}">
-                <a14:hiddenLine xmlns="" xmlns:a14="http://schemas.microsoft.com/office/drawing/2010/main" w="9525">
+                <a14:hiddenLine xmlns:a14="http://schemas.microsoft.com/office/drawing/2010/main" xmlns="" w="9525">
                   <a:solidFill>
                     <a:srgbClr val="000000"/>
                   </a:solidFill>
@@ -3719,7 +3703,7 @@
             </a:ln>
             <a:extLst>
               <a:ext uri="{91240B29-F687-4f45-9708-019B960494DF}">
-                <a14:hiddenLine xmlns="" xmlns:a14="http://schemas.microsoft.com/office/drawing/2010/main" w="9525">
+                <a14:hiddenLine xmlns:a14="http://schemas.microsoft.com/office/drawing/2010/main" xmlns="" w="9525">
                   <a:solidFill>
                     <a:srgbClr val="000000"/>
                   </a:solidFill>
@@ -3809,7 +3793,7 @@
             </a:ln>
             <a:extLst>
               <a:ext uri="{91240B29-F687-4f45-9708-019B960494DF}">
-                <a14:hiddenLine xmlns="" xmlns:a14="http://schemas.microsoft.com/office/drawing/2010/main" w="9525">
+                <a14:hiddenLine xmlns:a14="http://schemas.microsoft.com/office/drawing/2010/main" xmlns="" w="9525">
                   <a:solidFill>
                     <a:srgbClr val="000000"/>
                   </a:solidFill>
@@ -3871,7 +3855,7 @@
             </a:ln>
             <a:extLst>
               <a:ext uri="{91240B29-F687-4f45-9708-019B960494DF}">
-                <a14:hiddenLine xmlns="" xmlns:a14="http://schemas.microsoft.com/office/drawing/2010/main" w="9525">
+                <a14:hiddenLine xmlns:a14="http://schemas.microsoft.com/office/drawing/2010/main" xmlns="" w="9525">
                   <a:solidFill>
                     <a:srgbClr val="000000"/>
                   </a:solidFill>
@@ -3933,7 +3917,7 @@
             </a:ln>
             <a:extLst>
               <a:ext uri="{91240B29-F687-4f45-9708-019B960494DF}">
-                <a14:hiddenLine xmlns="" xmlns:a14="http://schemas.microsoft.com/office/drawing/2010/main" w="9525">
+                <a14:hiddenLine xmlns:a14="http://schemas.microsoft.com/office/drawing/2010/main" xmlns="" w="9525">
                   <a:solidFill>
                     <a:srgbClr val="000000"/>
                   </a:solidFill>
@@ -4023,7 +4007,7 @@
             </a:ln>
             <a:extLst>
               <a:ext uri="{91240B29-F687-4f45-9708-019B960494DF}">
-                <a14:hiddenLine xmlns="" xmlns:a14="http://schemas.microsoft.com/office/drawing/2010/main" w="9525">
+                <a14:hiddenLine xmlns:a14="http://schemas.microsoft.com/office/drawing/2010/main" xmlns="" w="9525">
                   <a:solidFill>
                     <a:srgbClr val="000000"/>
                   </a:solidFill>
@@ -4091,7 +4075,7 @@
             </a:ln>
             <a:extLst>
               <a:ext uri="{91240B29-F687-4f45-9708-019B960494DF}">
-                <a14:hiddenLine xmlns="" xmlns:a14="http://schemas.microsoft.com/office/drawing/2010/main" w="9525">
+                <a14:hiddenLine xmlns:a14="http://schemas.microsoft.com/office/drawing/2010/main" xmlns="" w="9525">
                   <a:solidFill>
                     <a:srgbClr val="000000"/>
                   </a:solidFill>
@@ -4153,7 +4137,7 @@
             </a:ln>
             <a:extLst>
               <a:ext uri="{91240B29-F687-4f45-9708-019B960494DF}">
-                <a14:hiddenLine xmlns="" xmlns:a14="http://schemas.microsoft.com/office/drawing/2010/main" w="9525">
+                <a14:hiddenLine xmlns:a14="http://schemas.microsoft.com/office/drawing/2010/main" xmlns="" w="9525">
                   <a:solidFill>
                     <a:srgbClr val="000000"/>
                   </a:solidFill>
@@ -4243,7 +4227,7 @@
             </a:ln>
             <a:extLst>
               <a:ext uri="{91240B29-F687-4f45-9708-019B960494DF}">
-                <a14:hiddenLine xmlns="" xmlns:a14="http://schemas.microsoft.com/office/drawing/2010/main" w="9525">
+                <a14:hiddenLine xmlns:a14="http://schemas.microsoft.com/office/drawing/2010/main" xmlns="" w="9525">
                   <a:solidFill>
                     <a:srgbClr val="000000"/>
                   </a:solidFill>
@@ -4305,7 +4289,7 @@
             </a:ln>
             <a:extLst>
               <a:ext uri="{91240B29-F687-4f45-9708-019B960494DF}">
-                <a14:hiddenLine xmlns="" xmlns:a14="http://schemas.microsoft.com/office/drawing/2010/main" w="9525">
+                <a14:hiddenLine xmlns:a14="http://schemas.microsoft.com/office/drawing/2010/main" xmlns="" w="9525">
                   <a:solidFill>
                     <a:srgbClr val="000000"/>
                   </a:solidFill>
@@ -4395,7 +4379,7 @@
             </a:ln>
             <a:extLst>
               <a:ext uri="{91240B29-F687-4f45-9708-019B960494DF}">
-                <a14:hiddenLine xmlns="" xmlns:a14="http://schemas.microsoft.com/office/drawing/2010/main" w="9525">
+                <a14:hiddenLine xmlns:a14="http://schemas.microsoft.com/office/drawing/2010/main" xmlns="" w="9525">
                   <a:solidFill>
                     <a:srgbClr val="000000"/>
                   </a:solidFill>
@@ -4457,7 +4441,7 @@
             </a:ln>
             <a:extLst>
               <a:ext uri="{91240B29-F687-4f45-9708-019B960494DF}">
-                <a14:hiddenLine xmlns="" xmlns:a14="http://schemas.microsoft.com/office/drawing/2010/main" w="9525">
+                <a14:hiddenLine xmlns:a14="http://schemas.microsoft.com/office/drawing/2010/main" xmlns="" w="9525">
                   <a:solidFill>
                     <a:srgbClr val="000000"/>
                   </a:solidFill>
@@ -4547,7 +4531,7 @@
             </a:ln>
             <a:extLst>
               <a:ext uri="{91240B29-F687-4f45-9708-019B960494DF}">
-                <a14:hiddenLine xmlns="" xmlns:a14="http://schemas.microsoft.com/office/drawing/2010/main" w="9525">
+                <a14:hiddenLine xmlns:a14="http://schemas.microsoft.com/office/drawing/2010/main" xmlns="" w="9525">
                   <a:solidFill>
                     <a:srgbClr val="000000"/>
                   </a:solidFill>
@@ -4581,7 +4565,7 @@
             </a:ln>
             <a:extLst>
               <a:ext uri="{91240B29-F687-4f45-9708-019B960494DF}">
-                <a14:hiddenLine xmlns="" xmlns:a14="http://schemas.microsoft.com/office/drawing/2010/main" w="9525">
+                <a14:hiddenLine xmlns:a14="http://schemas.microsoft.com/office/drawing/2010/main" xmlns="" w="9525">
                   <a:solidFill>
                     <a:srgbClr val="000000"/>
                   </a:solidFill>
@@ -4646,7 +4630,7 @@
             </a:ln>
             <a:extLst>
               <a:ext uri="{91240B29-F687-4f45-9708-019B960494DF}">
-                <a14:hiddenLine xmlns="" xmlns:a14="http://schemas.microsoft.com/office/drawing/2010/main" w="9525">
+                <a14:hiddenLine xmlns:a14="http://schemas.microsoft.com/office/drawing/2010/main" xmlns="" w="9525">
                   <a:solidFill>
                     <a:srgbClr val="000000"/>
                   </a:solidFill>
@@ -4736,7 +4720,7 @@
             </a:ln>
             <a:extLst>
               <a:ext uri="{91240B29-F687-4f45-9708-019B960494DF}">
-                <a14:hiddenLine xmlns="" xmlns:a14="http://schemas.microsoft.com/office/drawing/2010/main" w="9525">
+                <a14:hiddenLine xmlns:a14="http://schemas.microsoft.com/office/drawing/2010/main" xmlns="" w="9525">
                   <a:solidFill>
                     <a:srgbClr val="000000"/>
                   </a:solidFill>
@@ -4798,7 +4782,7 @@
             </a:ln>
             <a:extLst>
               <a:ext uri="{91240B29-F687-4f45-9708-019B960494DF}">
-                <a14:hiddenLine xmlns="" xmlns:a14="http://schemas.microsoft.com/office/drawing/2010/main" w="9525">
+                <a14:hiddenLine xmlns:a14="http://schemas.microsoft.com/office/drawing/2010/main" xmlns="" w="9525">
                   <a:solidFill>
                     <a:srgbClr val="000000"/>
                   </a:solidFill>
@@ -4888,7 +4872,7 @@
             </a:ln>
             <a:extLst>
               <a:ext uri="{91240B29-F687-4f45-9708-019B960494DF}">
-                <a14:hiddenLine xmlns="" xmlns:a14="http://schemas.microsoft.com/office/drawing/2010/main" w="9525">
+                <a14:hiddenLine xmlns:a14="http://schemas.microsoft.com/office/drawing/2010/main" xmlns="" w="9525">
                   <a:solidFill>
                     <a:srgbClr val="000000"/>
                   </a:solidFill>
@@ -4978,7 +4962,7 @@
             </a:ln>
             <a:extLst>
               <a:ext uri="{91240B29-F687-4f45-9708-019B960494DF}">
-                <a14:hiddenLine xmlns="" xmlns:a14="http://schemas.microsoft.com/office/drawing/2010/main" w="9525">
+                <a14:hiddenLine xmlns:a14="http://schemas.microsoft.com/office/drawing/2010/main" xmlns="" w="9525">
                   <a:solidFill>
                     <a:srgbClr val="000000"/>
                   </a:solidFill>
@@ -5043,7 +5027,7 @@
             </a:ln>
             <a:extLst>
               <a:ext uri="{91240B29-F687-4f45-9708-019B960494DF}">
-                <a14:hiddenLine xmlns="" xmlns:a14="http://schemas.microsoft.com/office/drawing/2010/main" w="9525">
+                <a14:hiddenLine xmlns:a14="http://schemas.microsoft.com/office/drawing/2010/main" xmlns="" w="9525">
                   <a:solidFill>
                     <a:srgbClr val="000000"/>
                   </a:solidFill>
@@ -5105,7 +5089,7 @@
             </a:ln>
             <a:extLst>
               <a:ext uri="{91240B29-F687-4f45-9708-019B960494DF}">
-                <a14:hiddenLine xmlns="" xmlns:a14="http://schemas.microsoft.com/office/drawing/2010/main" w="9525">
+                <a14:hiddenLine xmlns:a14="http://schemas.microsoft.com/office/drawing/2010/main" xmlns="" w="9525">
                   <a:solidFill>
                     <a:srgbClr val="000000"/>
                   </a:solidFill>
@@ -5195,7 +5179,7 @@
             </a:ln>
             <a:extLst>
               <a:ext uri="{91240B29-F687-4f45-9708-019B960494DF}">
-                <a14:hiddenLine xmlns="" xmlns:a14="http://schemas.microsoft.com/office/drawing/2010/main" w="9525">
+                <a14:hiddenLine xmlns:a14="http://schemas.microsoft.com/office/drawing/2010/main" xmlns="" w="9525">
                   <a:solidFill>
                     <a:srgbClr val="000000"/>
                   </a:solidFill>
@@ -5285,7 +5269,7 @@
             </a:ln>
             <a:extLst>
               <a:ext uri="{91240B29-F687-4f45-9708-019B960494DF}">
-                <a14:hiddenLine xmlns="" xmlns:a14="http://schemas.microsoft.com/office/drawing/2010/main" w="9525">
+                <a14:hiddenLine xmlns:a14="http://schemas.microsoft.com/office/drawing/2010/main" xmlns="" w="9525">
                   <a:solidFill>
                     <a:srgbClr val="000000"/>
                   </a:solidFill>
@@ -5347,7 +5331,7 @@
             </a:ln>
             <a:extLst>
               <a:ext uri="{91240B29-F687-4f45-9708-019B960494DF}">
-                <a14:hiddenLine xmlns="" xmlns:a14="http://schemas.microsoft.com/office/drawing/2010/main" w="9525">
+                <a14:hiddenLine xmlns:a14="http://schemas.microsoft.com/office/drawing/2010/main" xmlns="" w="9525">
                   <a:solidFill>
                     <a:srgbClr val="000000"/>
                   </a:solidFill>
@@ -5467,7 +5451,7 @@
             </a:ln>
             <a:extLst>
               <a:ext uri="{91240B29-F687-4f45-9708-019B960494DF}">
-                <a14:hiddenLine xmlns="" xmlns:a14="http://schemas.microsoft.com/office/drawing/2010/main" w="9525">
+                <a14:hiddenLine xmlns:a14="http://schemas.microsoft.com/office/drawing/2010/main" xmlns="" w="9525">
                   <a:solidFill>
                     <a:srgbClr val="000000"/>
                   </a:solidFill>
@@ -5535,7 +5519,7 @@
             </a:ln>
             <a:extLst>
               <a:ext uri="{91240B29-F687-4f45-9708-019B960494DF}">
-                <a14:hiddenLine xmlns="" xmlns:a14="http://schemas.microsoft.com/office/drawing/2010/main" w="9525">
+                <a14:hiddenLine xmlns:a14="http://schemas.microsoft.com/office/drawing/2010/main" xmlns="" w="9525">
                   <a:solidFill>
                     <a:srgbClr val="000000"/>
                   </a:solidFill>
@@ -5625,7 +5609,7 @@
             </a:ln>
             <a:extLst>
               <a:ext uri="{91240B29-F687-4f45-9708-019B960494DF}">
-                <a14:hiddenLine xmlns="" xmlns:a14="http://schemas.microsoft.com/office/drawing/2010/main" w="9525">
+                <a14:hiddenLine xmlns:a14="http://schemas.microsoft.com/office/drawing/2010/main" xmlns="" w="9525">
                   <a:solidFill>
                     <a:srgbClr val="000000"/>
                   </a:solidFill>
@@ -5765,7 +5749,7 @@
           <a:p>
             <a:fld id="{5B11F235-42AF-49D3-AEEC-F57B10BE23B5}" type="datetimeFigureOut">
               <a:rPr lang="bg-BG" smtClean="0"/>
-              <a:t>14.5.2025 г.</a:t>
+              <a:t>21.5.2025 г.</a:t>
             </a:fld>
             <a:endParaRPr lang="bg-BG"/>
           </a:p>
@@ -6032,7 +6016,7 @@
           <a:p>
             <a:fld id="{5B11F235-42AF-49D3-AEEC-F57B10BE23B5}" type="datetimeFigureOut">
               <a:rPr lang="bg-BG" smtClean="0"/>
-              <a:t>14.5.2025 г.</a:t>
+              <a:t>21.5.2025 г.</a:t>
             </a:fld>
             <a:endParaRPr lang="bg-BG"/>
           </a:p>
@@ -6228,7 +6212,7 @@
           <a:p>
             <a:fld id="{5B11F235-42AF-49D3-AEEC-F57B10BE23B5}" type="datetimeFigureOut">
               <a:rPr lang="bg-BG" smtClean="0"/>
-              <a:t>14.5.2025 г.</a:t>
+              <a:t>21.5.2025 г.</a:t>
             </a:fld>
             <a:endParaRPr lang="bg-BG"/>
           </a:p>
@@ -6491,7 +6475,7 @@
           <a:p>
             <a:fld id="{5B11F235-42AF-49D3-AEEC-F57B10BE23B5}" type="datetimeFigureOut">
               <a:rPr lang="bg-BG" smtClean="0"/>
-              <a:t>14.5.2025 г.</a:t>
+              <a:t>21.5.2025 г.</a:t>
             </a:fld>
             <a:endParaRPr lang="bg-BG"/>
           </a:p>
@@ -6925,7 +6909,7 @@
           <a:p>
             <a:fld id="{5B11F235-42AF-49D3-AEEC-F57B10BE23B5}" type="datetimeFigureOut">
               <a:rPr lang="bg-BG" smtClean="0"/>
-              <a:t>14.5.2025 г.</a:t>
+              <a:t>21.5.2025 г.</a:t>
             </a:fld>
             <a:endParaRPr lang="bg-BG"/>
           </a:p>
@@ -7471,7 +7455,7 @@
           <a:p>
             <a:fld id="{5B11F235-42AF-49D3-AEEC-F57B10BE23B5}" type="datetimeFigureOut">
               <a:rPr lang="bg-BG" smtClean="0"/>
-              <a:t>14.5.2025 г.</a:t>
+              <a:t>21.5.2025 г.</a:t>
             </a:fld>
             <a:endParaRPr lang="bg-BG"/>
           </a:p>
@@ -8191,7 +8175,7 @@
           <a:p>
             <a:fld id="{5B11F235-42AF-49D3-AEEC-F57B10BE23B5}" type="datetimeFigureOut">
               <a:rPr lang="bg-BG" smtClean="0"/>
-              <a:t>14.5.2025 г.</a:t>
+              <a:t>21.5.2025 г.</a:t>
             </a:fld>
             <a:endParaRPr lang="bg-BG"/>
           </a:p>
@@ -8361,7 +8345,7 @@
           <a:p>
             <a:fld id="{5B11F235-42AF-49D3-AEEC-F57B10BE23B5}" type="datetimeFigureOut">
               <a:rPr lang="bg-BG" smtClean="0"/>
-              <a:t>14.5.2025 г.</a:t>
+              <a:t>21.5.2025 г.</a:t>
             </a:fld>
             <a:endParaRPr lang="bg-BG"/>
           </a:p>
@@ -8541,7 +8525,7 @@
           <a:p>
             <a:fld id="{5B11F235-42AF-49D3-AEEC-F57B10BE23B5}" type="datetimeFigureOut">
               <a:rPr lang="bg-BG" smtClean="0"/>
-              <a:t>14.5.2025 г.</a:t>
+              <a:t>21.5.2025 г.</a:t>
             </a:fld>
             <a:endParaRPr lang="bg-BG"/>
           </a:p>
@@ -8711,7 +8695,7 @@
           <a:p>
             <a:fld id="{5B11F235-42AF-49D3-AEEC-F57B10BE23B5}" type="datetimeFigureOut">
               <a:rPr lang="bg-BG" smtClean="0"/>
-              <a:t>14.5.2025 г.</a:t>
+              <a:t>21.5.2025 г.</a:t>
             </a:fld>
             <a:endParaRPr lang="bg-BG"/>
           </a:p>
@@ -8961,7 +8945,7 @@
           <a:p>
             <a:fld id="{5B11F235-42AF-49D3-AEEC-F57B10BE23B5}" type="datetimeFigureOut">
               <a:rPr lang="bg-BG" smtClean="0"/>
-              <a:t>14.5.2025 г.</a:t>
+              <a:t>21.5.2025 г.</a:t>
             </a:fld>
             <a:endParaRPr lang="bg-BG"/>
           </a:p>
@@ -9193,7 +9177,7 @@
           <a:p>
             <a:fld id="{5B11F235-42AF-49D3-AEEC-F57B10BE23B5}" type="datetimeFigureOut">
               <a:rPr lang="bg-BG" smtClean="0"/>
-              <a:t>14.5.2025 г.</a:t>
+              <a:t>21.5.2025 г.</a:t>
             </a:fld>
             <a:endParaRPr lang="bg-BG"/>
           </a:p>
@@ -9574,7 +9558,7 @@
           <a:p>
             <a:fld id="{5B11F235-42AF-49D3-AEEC-F57B10BE23B5}" type="datetimeFigureOut">
               <a:rPr lang="bg-BG" smtClean="0"/>
-              <a:t>14.5.2025 г.</a:t>
+              <a:t>21.5.2025 г.</a:t>
             </a:fld>
             <a:endParaRPr lang="bg-BG"/>
           </a:p>
@@ -9692,7 +9676,7 @@
           <a:p>
             <a:fld id="{5B11F235-42AF-49D3-AEEC-F57B10BE23B5}" type="datetimeFigureOut">
               <a:rPr lang="bg-BG" smtClean="0"/>
-              <a:t>14.5.2025 г.</a:t>
+              <a:t>21.5.2025 г.</a:t>
             </a:fld>
             <a:endParaRPr lang="bg-BG"/>
           </a:p>
@@ -9787,7 +9771,7 @@
           <a:p>
             <a:fld id="{5B11F235-42AF-49D3-AEEC-F57B10BE23B5}" type="datetimeFigureOut">
               <a:rPr lang="bg-BG" smtClean="0"/>
-              <a:t>14.5.2025 г.</a:t>
+              <a:t>21.5.2025 г.</a:t>
             </a:fld>
             <a:endParaRPr lang="bg-BG"/>
           </a:p>
@@ -10036,7 +10020,7 @@
           <a:p>
             <a:fld id="{5B11F235-42AF-49D3-AEEC-F57B10BE23B5}" type="datetimeFigureOut">
               <a:rPr lang="bg-BG" smtClean="0"/>
-              <a:t>14.5.2025 г.</a:t>
+              <a:t>21.5.2025 г.</a:t>
             </a:fld>
             <a:endParaRPr lang="bg-BG"/>
           </a:p>
@@ -10316,7 +10300,7 @@
           <a:p>
             <a:fld id="{5B11F235-42AF-49D3-AEEC-F57B10BE23B5}" type="datetimeFigureOut">
               <a:rPr lang="bg-BG" smtClean="0"/>
-              <a:t>14.5.2025 г.</a:t>
+              <a:t>21.5.2025 г.</a:t>
             </a:fld>
             <a:endParaRPr lang="bg-BG"/>
           </a:p>
@@ -10432,7 +10416,7 @@
           <a:noFill/>
           <a:extLst>
             <a:ext uri="{909E8E84-426E-40dd-AFC4-6F175D3DCCD1}">
-              <a14:hiddenFill xmlns="" xmlns:a14="http://schemas.microsoft.com/office/drawing/2010/main">
+              <a14:hiddenFill xmlns:a14="http://schemas.microsoft.com/office/drawing/2010/main" xmlns="">
                 <a:solidFill>
                   <a:srgbClr val="FFFFFF"/>
                 </a:solidFill>
@@ -10506,7 +10490,7 @@
               </a:ln>
               <a:extLst>
                 <a:ext uri="{91240B29-F687-4f45-9708-019B960494DF}">
-                  <a14:hiddenLine xmlns="" xmlns:a14="http://schemas.microsoft.com/office/drawing/2010/main" w="9525">
+                  <a14:hiddenLine xmlns:a14="http://schemas.microsoft.com/office/drawing/2010/main" xmlns="" w="9525">
                     <a:solidFill>
                       <a:srgbClr val="000000"/>
                     </a:solidFill>
@@ -10596,7 +10580,7 @@
               </a:ln>
               <a:extLst>
                 <a:ext uri="{91240B29-F687-4f45-9708-019B960494DF}">
-                  <a14:hiddenLine xmlns="" xmlns:a14="http://schemas.microsoft.com/office/drawing/2010/main" w="9525">
+                  <a14:hiddenLine xmlns:a14="http://schemas.microsoft.com/office/drawing/2010/main" xmlns="" w="9525">
                     <a:solidFill>
                       <a:srgbClr val="000000"/>
                     </a:solidFill>
@@ -10686,7 +10670,7 @@
               </a:ln>
               <a:extLst>
                 <a:ext uri="{91240B29-F687-4f45-9708-019B960494DF}">
-                  <a14:hiddenLine xmlns="" xmlns:a14="http://schemas.microsoft.com/office/drawing/2010/main" w="9525">
+                  <a14:hiddenLine xmlns:a14="http://schemas.microsoft.com/office/drawing/2010/main" xmlns="" w="9525">
                     <a:solidFill>
                       <a:srgbClr val="000000"/>
                     </a:solidFill>
@@ -10748,7 +10732,7 @@
               </a:ln>
               <a:extLst>
                 <a:ext uri="{91240B29-F687-4f45-9708-019B960494DF}">
-                  <a14:hiddenLine xmlns="" xmlns:a14="http://schemas.microsoft.com/office/drawing/2010/main" w="9525">
+                  <a14:hiddenLine xmlns:a14="http://schemas.microsoft.com/office/drawing/2010/main" xmlns="" w="9525">
                     <a:solidFill>
                       <a:srgbClr val="000000"/>
                     </a:solidFill>
@@ -10838,7 +10822,7 @@
               </a:ln>
               <a:extLst>
                 <a:ext uri="{91240B29-F687-4f45-9708-019B960494DF}">
-                  <a14:hiddenLine xmlns="" xmlns:a14="http://schemas.microsoft.com/office/drawing/2010/main" w="9525">
+                  <a14:hiddenLine xmlns:a14="http://schemas.microsoft.com/office/drawing/2010/main" xmlns="" w="9525">
                     <a:solidFill>
                       <a:srgbClr val="000000"/>
                     </a:solidFill>
@@ -10900,7 +10884,7 @@
               </a:ln>
               <a:extLst>
                 <a:ext uri="{91240B29-F687-4f45-9708-019B960494DF}">
-                  <a14:hiddenLine xmlns="" xmlns:a14="http://schemas.microsoft.com/office/drawing/2010/main" w="9525">
+                  <a14:hiddenLine xmlns:a14="http://schemas.microsoft.com/office/drawing/2010/main" xmlns="" w="9525">
                     <a:solidFill>
                       <a:srgbClr val="000000"/>
                     </a:solidFill>
@@ -10962,7 +10946,7 @@
               </a:ln>
               <a:extLst>
                 <a:ext uri="{91240B29-F687-4f45-9708-019B960494DF}">
-                  <a14:hiddenLine xmlns="" xmlns:a14="http://schemas.microsoft.com/office/drawing/2010/main" w="9525">
+                  <a14:hiddenLine xmlns:a14="http://schemas.microsoft.com/office/drawing/2010/main" xmlns="" w="9525">
                     <a:solidFill>
                       <a:srgbClr val="000000"/>
                     </a:solidFill>
@@ -11052,7 +11036,7 @@
               </a:ln>
               <a:extLst>
                 <a:ext uri="{91240B29-F687-4f45-9708-019B960494DF}">
-                  <a14:hiddenLine xmlns="" xmlns:a14="http://schemas.microsoft.com/office/drawing/2010/main" w="9525">
+                  <a14:hiddenLine xmlns:a14="http://schemas.microsoft.com/office/drawing/2010/main" xmlns="" w="9525">
                     <a:solidFill>
                       <a:srgbClr val="000000"/>
                     </a:solidFill>
@@ -11142,7 +11126,7 @@
               </a:ln>
               <a:extLst>
                 <a:ext uri="{91240B29-F687-4f45-9708-019B960494DF}">
-                  <a14:hiddenLine xmlns="" xmlns:a14="http://schemas.microsoft.com/office/drawing/2010/main" w="9525">
+                  <a14:hiddenLine xmlns:a14="http://schemas.microsoft.com/office/drawing/2010/main" xmlns="" w="9525">
                     <a:solidFill>
                       <a:srgbClr val="000000"/>
                     </a:solidFill>
@@ -11204,7 +11188,7 @@
               </a:ln>
               <a:extLst>
                 <a:ext uri="{91240B29-F687-4f45-9708-019B960494DF}">
-                  <a14:hiddenLine xmlns="" xmlns:a14="http://schemas.microsoft.com/office/drawing/2010/main" w="9525">
+                  <a14:hiddenLine xmlns:a14="http://schemas.microsoft.com/office/drawing/2010/main" xmlns="" w="9525">
                     <a:solidFill>
                       <a:srgbClr val="000000"/>
                     </a:solidFill>
@@ -11314,7 +11298,7 @@
               </a:ln>
               <a:extLst>
                 <a:ext uri="{91240B29-F687-4f45-9708-019B960494DF}">
-                  <a14:hiddenLine xmlns="" xmlns:a14="http://schemas.microsoft.com/office/drawing/2010/main" w="9525">
+                  <a14:hiddenLine xmlns:a14="http://schemas.microsoft.com/office/drawing/2010/main" xmlns="" w="9525">
                     <a:solidFill>
                       <a:srgbClr val="000000"/>
                     </a:solidFill>
@@ -11398,7 +11382,7 @@
               </a:ln>
               <a:extLst>
                 <a:ext uri="{91240B29-F687-4f45-9708-019B960494DF}">
-                  <a14:hiddenLine xmlns="" xmlns:a14="http://schemas.microsoft.com/office/drawing/2010/main" w="9525">
+                  <a14:hiddenLine xmlns:a14="http://schemas.microsoft.com/office/drawing/2010/main" xmlns="" w="9525">
                     <a:solidFill>
                       <a:srgbClr val="000000"/>
                     </a:solidFill>
@@ -11460,7 +11444,7 @@
               </a:ln>
               <a:extLst>
                 <a:ext uri="{91240B29-F687-4f45-9708-019B960494DF}">
-                  <a14:hiddenLine xmlns="" xmlns:a14="http://schemas.microsoft.com/office/drawing/2010/main" w="9525">
+                  <a14:hiddenLine xmlns:a14="http://schemas.microsoft.com/office/drawing/2010/main" xmlns="" w="9525">
                     <a:solidFill>
                       <a:srgbClr val="000000"/>
                     </a:solidFill>
@@ -11522,7 +11506,7 @@
               </a:ln>
               <a:extLst>
                 <a:ext uri="{91240B29-F687-4f45-9708-019B960494DF}">
-                  <a14:hiddenLine xmlns="" xmlns:a14="http://schemas.microsoft.com/office/drawing/2010/main" w="9525">
+                  <a14:hiddenLine xmlns:a14="http://schemas.microsoft.com/office/drawing/2010/main" xmlns="" w="9525">
                     <a:solidFill>
                       <a:srgbClr val="000000"/>
                     </a:solidFill>
@@ -11612,7 +11596,7 @@
               </a:ln>
               <a:extLst>
                 <a:ext uri="{91240B29-F687-4f45-9708-019B960494DF}">
-                  <a14:hiddenLine xmlns="" xmlns:a14="http://schemas.microsoft.com/office/drawing/2010/main" w="9525">
+                  <a14:hiddenLine xmlns:a14="http://schemas.microsoft.com/office/drawing/2010/main" xmlns="" w="9525">
                     <a:solidFill>
                       <a:srgbClr val="000000"/>
                     </a:solidFill>
@@ -11646,7 +11630,7 @@
               </a:ln>
               <a:extLst>
                 <a:ext uri="{91240B29-F687-4f45-9708-019B960494DF}">
-                  <a14:hiddenLine xmlns="" xmlns:a14="http://schemas.microsoft.com/office/drawing/2010/main" w="9525">
+                  <a14:hiddenLine xmlns:a14="http://schemas.microsoft.com/office/drawing/2010/main" xmlns="" w="9525">
                     <a:solidFill>
                       <a:srgbClr val="000000"/>
                     </a:solidFill>
@@ -11711,7 +11695,7 @@
               </a:ln>
               <a:extLst>
                 <a:ext uri="{91240B29-F687-4f45-9708-019B960494DF}">
-                  <a14:hiddenLine xmlns="" xmlns:a14="http://schemas.microsoft.com/office/drawing/2010/main" w="9525">
+                  <a14:hiddenLine xmlns:a14="http://schemas.microsoft.com/office/drawing/2010/main" xmlns="" w="9525">
                     <a:solidFill>
                       <a:srgbClr val="000000"/>
                     </a:solidFill>
@@ -11801,7 +11785,7 @@
               </a:ln>
               <a:extLst>
                 <a:ext uri="{91240B29-F687-4f45-9708-019B960494DF}">
-                  <a14:hiddenLine xmlns="" xmlns:a14="http://schemas.microsoft.com/office/drawing/2010/main" w="9525">
+                  <a14:hiddenLine xmlns:a14="http://schemas.microsoft.com/office/drawing/2010/main" xmlns="" w="9525">
                     <a:solidFill>
                       <a:srgbClr val="000000"/>
                     </a:solidFill>
@@ -11863,7 +11847,7 @@
               </a:ln>
               <a:extLst>
                 <a:ext uri="{91240B29-F687-4f45-9708-019B960494DF}">
-                  <a14:hiddenLine xmlns="" xmlns:a14="http://schemas.microsoft.com/office/drawing/2010/main" w="9525">
+                  <a14:hiddenLine xmlns:a14="http://schemas.microsoft.com/office/drawing/2010/main" xmlns="" w="9525">
                     <a:solidFill>
                       <a:srgbClr val="000000"/>
                     </a:solidFill>
@@ -11953,7 +11937,7 @@
               </a:ln>
               <a:extLst>
                 <a:ext uri="{91240B29-F687-4f45-9708-019B960494DF}">
-                  <a14:hiddenLine xmlns="" xmlns:a14="http://schemas.microsoft.com/office/drawing/2010/main" w="9525">
+                  <a14:hiddenLine xmlns:a14="http://schemas.microsoft.com/office/drawing/2010/main" xmlns="" w="9525">
                     <a:solidFill>
                       <a:srgbClr val="000000"/>
                     </a:solidFill>
@@ -12018,7 +12002,7 @@
               </a:ln>
               <a:extLst>
                 <a:ext uri="{91240B29-F687-4f45-9708-019B960494DF}">
-                  <a14:hiddenLine xmlns="" xmlns:a14="http://schemas.microsoft.com/office/drawing/2010/main" w="9525">
+                  <a14:hiddenLine xmlns:a14="http://schemas.microsoft.com/office/drawing/2010/main" xmlns="" w="9525">
                     <a:solidFill>
                       <a:srgbClr val="000000"/>
                     </a:solidFill>
@@ -12080,7 +12064,7 @@
               </a:ln>
               <a:extLst>
                 <a:ext uri="{91240B29-F687-4f45-9708-019B960494DF}">
-                  <a14:hiddenLine xmlns="" xmlns:a14="http://schemas.microsoft.com/office/drawing/2010/main" w="9525">
+                  <a14:hiddenLine xmlns:a14="http://schemas.microsoft.com/office/drawing/2010/main" xmlns="" w="9525">
                     <a:solidFill>
                       <a:srgbClr val="000000"/>
                     </a:solidFill>
@@ -12170,7 +12154,7 @@
               </a:ln>
               <a:extLst>
                 <a:ext uri="{91240B29-F687-4f45-9708-019B960494DF}">
-                  <a14:hiddenLine xmlns="" xmlns:a14="http://schemas.microsoft.com/office/drawing/2010/main" w="9525">
+                  <a14:hiddenLine xmlns:a14="http://schemas.microsoft.com/office/drawing/2010/main" xmlns="" w="9525">
                     <a:solidFill>
                       <a:srgbClr val="000000"/>
                     </a:solidFill>
@@ -12260,7 +12244,7 @@
               </a:ln>
               <a:extLst>
                 <a:ext uri="{91240B29-F687-4f45-9708-019B960494DF}">
-                  <a14:hiddenLine xmlns="" xmlns:a14="http://schemas.microsoft.com/office/drawing/2010/main" w="9525">
+                  <a14:hiddenLine xmlns:a14="http://schemas.microsoft.com/office/drawing/2010/main" xmlns="" w="9525">
                     <a:solidFill>
                       <a:srgbClr val="000000"/>
                     </a:solidFill>
@@ -12325,7 +12309,7 @@
               </a:ln>
               <a:extLst>
                 <a:ext uri="{91240B29-F687-4f45-9708-019B960494DF}">
-                  <a14:hiddenLine xmlns="" xmlns:a14="http://schemas.microsoft.com/office/drawing/2010/main" w="9525">
+                  <a14:hiddenLine xmlns:a14="http://schemas.microsoft.com/office/drawing/2010/main" xmlns="" w="9525">
                     <a:solidFill>
                       <a:srgbClr val="000000"/>
                     </a:solidFill>
@@ -12445,7 +12429,7 @@
               </a:ln>
               <a:extLst>
                 <a:ext uri="{91240B29-F687-4f45-9708-019B960494DF}">
-                  <a14:hiddenLine xmlns="" xmlns:a14="http://schemas.microsoft.com/office/drawing/2010/main" w="9525">
+                  <a14:hiddenLine xmlns:a14="http://schemas.microsoft.com/office/drawing/2010/main" xmlns="" w="9525">
                     <a:solidFill>
                       <a:srgbClr val="000000"/>
                     </a:solidFill>
@@ -12543,7 +12527,7 @@
               </a:ln>
               <a:extLst>
                 <a:ext uri="{91240B29-F687-4f45-9708-019B960494DF}">
-                  <a14:hiddenLine xmlns="" xmlns:a14="http://schemas.microsoft.com/office/drawing/2010/main" w="9525">
+                  <a14:hiddenLine xmlns:a14="http://schemas.microsoft.com/office/drawing/2010/main" xmlns="" w="9525">
                     <a:solidFill>
                       <a:srgbClr val="000000"/>
                     </a:solidFill>
@@ -12658,7 +12642,7 @@
               </a:ln>
               <a:extLst>
                 <a:ext uri="{91240B29-F687-4f45-9708-019B960494DF}">
-                  <a14:hiddenLine xmlns="" xmlns:a14="http://schemas.microsoft.com/office/drawing/2010/main" w="9525">
+                  <a14:hiddenLine xmlns:a14="http://schemas.microsoft.com/office/drawing/2010/main" xmlns="" w="9525">
                     <a:solidFill>
                       <a:srgbClr val="000000"/>
                     </a:solidFill>
@@ -12748,7 +12732,7 @@
               </a:ln>
               <a:extLst>
                 <a:ext uri="{91240B29-F687-4f45-9708-019B960494DF}">
-                  <a14:hiddenLine xmlns="" xmlns:a14="http://schemas.microsoft.com/office/drawing/2010/main" w="9525">
+                  <a14:hiddenLine xmlns:a14="http://schemas.microsoft.com/office/drawing/2010/main" xmlns="" w="9525">
                     <a:solidFill>
                       <a:srgbClr val="000000"/>
                     </a:solidFill>
@@ -12813,7 +12797,7 @@
               </a:ln>
               <a:extLst>
                 <a:ext uri="{91240B29-F687-4f45-9708-019B960494DF}">
-                  <a14:hiddenLine xmlns="" xmlns:a14="http://schemas.microsoft.com/office/drawing/2010/main" w="9525">
+                  <a14:hiddenLine xmlns:a14="http://schemas.microsoft.com/office/drawing/2010/main" xmlns="" w="9525">
                     <a:solidFill>
                       <a:srgbClr val="000000"/>
                     </a:solidFill>
@@ -12903,7 +12887,7 @@
               </a:ln>
               <a:extLst>
                 <a:ext uri="{91240B29-F687-4f45-9708-019B960494DF}">
-                  <a14:hiddenLine xmlns="" xmlns:a14="http://schemas.microsoft.com/office/drawing/2010/main" w="9525">
+                  <a14:hiddenLine xmlns:a14="http://schemas.microsoft.com/office/drawing/2010/main" xmlns="" w="9525">
                     <a:solidFill>
                       <a:srgbClr val="000000"/>
                     </a:solidFill>
@@ -12971,7 +12955,7 @@
               </a:ln>
               <a:extLst>
                 <a:ext uri="{91240B29-F687-4f45-9708-019B960494DF}">
-                  <a14:hiddenLine xmlns="" xmlns:a14="http://schemas.microsoft.com/office/drawing/2010/main" w="9525">
+                  <a14:hiddenLine xmlns:a14="http://schemas.microsoft.com/office/drawing/2010/main" xmlns="" w="9525">
                     <a:solidFill>
                       <a:srgbClr val="000000"/>
                     </a:solidFill>
@@ -13061,7 +13045,7 @@
               </a:ln>
               <a:extLst>
                 <a:ext uri="{91240B29-F687-4f45-9708-019B960494DF}">
-                  <a14:hiddenLine xmlns="" xmlns:a14="http://schemas.microsoft.com/office/drawing/2010/main" w="9525">
+                  <a14:hiddenLine xmlns:a14="http://schemas.microsoft.com/office/drawing/2010/main" xmlns="" w="9525">
                     <a:solidFill>
                       <a:srgbClr val="000000"/>
                     </a:solidFill>
@@ -13129,7 +13113,7 @@
               </a:ln>
               <a:extLst>
                 <a:ext uri="{91240B29-F687-4f45-9708-019B960494DF}">
-                  <a14:hiddenLine xmlns="" xmlns:a14="http://schemas.microsoft.com/office/drawing/2010/main" w="9525">
+                  <a14:hiddenLine xmlns:a14="http://schemas.microsoft.com/office/drawing/2010/main" xmlns="" w="9525">
                     <a:solidFill>
                       <a:srgbClr val="000000"/>
                     </a:solidFill>
@@ -13219,7 +13203,7 @@
               </a:ln>
               <a:extLst>
                 <a:ext uri="{91240B29-F687-4f45-9708-019B960494DF}">
-                  <a14:hiddenLine xmlns="" xmlns:a14="http://schemas.microsoft.com/office/drawing/2010/main" w="9525">
+                  <a14:hiddenLine xmlns:a14="http://schemas.microsoft.com/office/drawing/2010/main" xmlns="" w="9525">
                     <a:solidFill>
                       <a:srgbClr val="000000"/>
                     </a:solidFill>
@@ -13253,7 +13237,7 @@
               </a:ln>
               <a:extLst>
                 <a:ext uri="{91240B29-F687-4f45-9708-019B960494DF}">
-                  <a14:hiddenLine xmlns="" xmlns:a14="http://schemas.microsoft.com/office/drawing/2010/main" w="9525">
+                  <a14:hiddenLine xmlns:a14="http://schemas.microsoft.com/office/drawing/2010/main" xmlns="" w="9525">
                     <a:solidFill>
                       <a:srgbClr val="000000"/>
                     </a:solidFill>
@@ -13393,7 +13377,7 @@
           <a:p>
             <a:fld id="{5B11F235-42AF-49D3-AEEC-F57B10BE23B5}" type="datetimeFigureOut">
               <a:rPr lang="bg-BG" smtClean="0"/>
-              <a:t>14.5.2025 г.</a:t>
+              <a:t>21.5.2025 г.</a:t>
             </a:fld>
             <a:endParaRPr lang="bg-BG"/>
           </a:p>
@@ -14111,7 +14095,15 @@
             <p:ph type="title"/>
           </p:nvPr>
         </p:nvSpPr>
-        <p:spPr/>
+        <p:spPr>
+          <a:effectLst>
+            <a:outerShdw blurRad="50800" dist="38100" dir="2700000" algn="tl" rotWithShape="0">
+              <a:prstClr val="black">
+                <a:alpha val="40000"/>
+              </a:prstClr>
+            </a:outerShdw>
+          </a:effectLst>
+        </p:spPr>
         <p:txBody>
           <a:bodyPr>
             <a:normAutofit/>
@@ -14119,20 +14111,20 @@
           <a:lstStyle/>
           <a:p>
             <a:r>
-              <a:rPr lang="bg-BG" sz="2000" dirty="0"/>
+              <a:rPr lang="bg-BG" sz="2800" dirty="0"/>
               <a:t>Въведение и цел на проекта</a:t>
             </a:r>
             <a:br>
-              <a:rPr lang="bg-BG" sz="2000" dirty="0"/>
+              <a:rPr lang="bg-BG" sz="2800" dirty="0"/>
             </a:br>
             <a:r>
-              <a:rPr lang="bg-BG" sz="2000" dirty="0"/>
+              <a:rPr lang="bg-BG" sz="2800" dirty="0"/>
               <a:t/>
             </a:r>
             <a:br>
-              <a:rPr lang="bg-BG" sz="2000" dirty="0"/>
+              <a:rPr lang="bg-BG" sz="2800" dirty="0"/>
             </a:br>
-            <a:endParaRPr lang="bg-BG" sz="2000" dirty="0"/>
+            <a:endParaRPr lang="bg-BG" sz="2800" dirty="0"/>
           </a:p>
         </p:txBody>
       </p:sp>
@@ -14194,6 +14186,13 @@
             <a:avLst/>
           </a:prstGeom>
           <a:noFill/>
+          <a:effectLst>
+            <a:outerShdw blurRad="63500" sx="102000" sy="102000" algn="ctr" rotWithShape="0">
+              <a:prstClr val="black">
+                <a:alpha val="40000"/>
+              </a:prstClr>
+            </a:outerShdw>
+          </a:effectLst>
           <a:extLst>
             <a:ext uri="{909E8E84-426E-40DD-AFC4-6F175D3DCCD1}">
               <a14:hiddenFill xmlns:a14="http://schemas.microsoft.com/office/drawing/2010/main">
@@ -14252,15 +14251,24 @@
             <p:ph type="title"/>
           </p:nvPr>
         </p:nvSpPr>
-        <p:spPr/>
+        <p:spPr>
+          <a:effectLst>
+            <a:outerShdw blurRad="50800" dist="38100" dir="2700000" algn="tl" rotWithShape="0">
+              <a:prstClr val="black">
+                <a:alpha val="40000"/>
+              </a:prstClr>
+            </a:outerShdw>
+          </a:effectLst>
+        </p:spPr>
         <p:txBody>
           <a:bodyPr>
             <a:normAutofit/>
           </a:bodyPr>
           <a:lstStyle/>
           <a:p>
+            <a:pPr algn="ctr"/>
             <a:r>
-              <a:rPr lang="bg-BG" dirty="0"/>
+              <a:rPr lang="bg-BG" sz="2800" dirty="0"/>
               <a:t>Исторически преглед и значимост на уеб технологиите</a:t>
             </a:r>
           </a:p>
@@ -14284,7 +14292,7 @@
         </p:blipFill>
         <p:spPr>
           <a:xfrm>
-            <a:off x="1597892" y="1862609"/>
+            <a:off x="2215140" y="1931189"/>
             <a:ext cx="7758544" cy="4381173"/>
           </a:xfrm>
           <a:prstGeom prst="rect">
@@ -14339,15 +14347,24 @@
             <p:ph type="title"/>
           </p:nvPr>
         </p:nvSpPr>
-        <p:spPr/>
+        <p:spPr>
+          <a:effectLst>
+            <a:outerShdw blurRad="50800" dist="38100" dir="2700000" algn="tl" rotWithShape="0">
+              <a:prstClr val="black">
+                <a:alpha val="40000"/>
+              </a:prstClr>
+            </a:outerShdw>
+          </a:effectLst>
+        </p:spPr>
         <p:txBody>
           <a:bodyPr>
             <a:normAutofit/>
           </a:bodyPr>
           <a:lstStyle/>
           <a:p>
+            <a:pPr algn="ctr"/>
             <a:r>
-              <a:rPr lang="bg-BG" dirty="0"/>
+              <a:rPr lang="bg-BG" sz="2800" dirty="0"/>
               <a:t>Избор и характеристика на операционна система Ubuntu Server</a:t>
             </a:r>
           </a:p>
@@ -14371,7 +14388,7 @@
         </p:blipFill>
         <p:spPr>
           <a:xfrm>
-            <a:off x="1801091" y="1794111"/>
+            <a:off x="2353685" y="1874121"/>
             <a:ext cx="7481453" cy="4332520"/>
           </a:xfrm>
           <a:prstGeom prst="rect">
@@ -14426,13 +14443,24 @@
             <p:ph type="title"/>
           </p:nvPr>
         </p:nvSpPr>
-        <p:spPr/>
+        <p:spPr>
+          <a:effectLst>
+            <a:outerShdw blurRad="50800" dist="38100" dir="2700000" algn="tl" rotWithShape="0">
+              <a:prstClr val="black">
+                <a:alpha val="40000"/>
+              </a:prstClr>
+            </a:outerShdw>
+          </a:effectLst>
+        </p:spPr>
         <p:txBody>
-          <a:bodyPr/>
+          <a:bodyPr>
+            <a:normAutofit/>
+          </a:bodyPr>
           <a:lstStyle/>
           <a:p>
+            <a:pPr algn="ctr"/>
             <a:r>
-              <a:rPr lang="bg-BG" dirty="0"/>
+              <a:rPr lang="bg-BG" sz="2800" dirty="0"/>
               <a:t>Уеб сървър Nginx и WSGI сървър Gunicorn</a:t>
             </a:r>
           </a:p>
@@ -14556,21 +14584,30 @@
             <p:ph type="title"/>
           </p:nvPr>
         </p:nvSpPr>
-        <p:spPr/>
+        <p:spPr>
+          <a:effectLst>
+            <a:outerShdw blurRad="50800" dist="38100" dir="2700000" algn="tl" rotWithShape="0">
+              <a:prstClr val="black">
+                <a:alpha val="40000"/>
+              </a:prstClr>
+            </a:outerShdw>
+          </a:effectLst>
+        </p:spPr>
         <p:txBody>
           <a:bodyPr>
-            <a:normAutofit fontScale="90000"/>
+            <a:normAutofit/>
           </a:bodyPr>
           <a:lstStyle/>
           <a:p>
+            <a:pPr algn="ctr"/>
             <a:r>
-              <a:rPr lang="bg-BG" dirty="0"/>
+              <a:rPr lang="bg-BG" sz="2800" dirty="0"/>
               <a:t>Използване на Python и Django за създаване на приложението</a:t>
             </a:r>
             <a:br>
-              <a:rPr lang="bg-BG" dirty="0"/>
+              <a:rPr lang="bg-BG" sz="2800" dirty="0"/>
             </a:br>
-            <a:endParaRPr lang="bg-BG" dirty="0"/>
+            <a:endParaRPr lang="bg-BG" sz="2800" dirty="0"/>
           </a:p>
         </p:txBody>
       </p:sp>
@@ -14592,7 +14629,7 @@
         </p:blipFill>
         <p:spPr>
           <a:xfrm>
-            <a:off x="1514763" y="1625599"/>
+            <a:off x="1993466" y="1705609"/>
             <a:ext cx="8201891" cy="4655127"/>
           </a:xfrm>
           <a:prstGeom prst="rect">
@@ -14654,25 +14691,30 @@
             <p:ph type="title"/>
           </p:nvPr>
         </p:nvSpPr>
-        <p:spPr/>
+        <p:spPr>
+          <a:effectLst>
+            <a:outerShdw blurRad="50800" dist="38100" dir="2700000" algn="tl" rotWithShape="0">
+              <a:prstClr val="black">
+                <a:alpha val="40000"/>
+              </a:prstClr>
+            </a:outerShdw>
+          </a:effectLst>
+        </p:spPr>
         <p:txBody>
           <a:bodyPr>
             <a:normAutofit/>
           </a:bodyPr>
           <a:lstStyle/>
           <a:p>
+            <a:pPr algn="ctr"/>
             <a:r>
-              <a:rPr lang="bg-BG" sz="2700" dirty="0"/>
+              <a:rPr lang="bg-BG" sz="2800" dirty="0"/>
               <a:t>Система за управление на бази данни MySQL и инструмент phpMyAdmin</a:t>
             </a:r>
-            <a:r>
-              <a:rPr lang="bg-BG" dirty="0"/>
-              <a:t/>
-            </a:r>
             <a:br>
-              <a:rPr lang="bg-BG" dirty="0"/>
+              <a:rPr lang="bg-BG" sz="2800" dirty="0"/>
             </a:br>
-            <a:endParaRPr lang="bg-BG" dirty="0"/>
+            <a:endParaRPr lang="bg-BG" sz="2800" dirty="0"/>
           </a:p>
         </p:txBody>
       </p:sp>
@@ -14694,7 +14736,7 @@
         </p:blipFill>
         <p:spPr>
           <a:xfrm>
-            <a:off x="1064404" y="1487055"/>
+            <a:off x="1421923" y="1509915"/>
             <a:ext cx="9344977" cy="4812145"/>
           </a:xfrm>
           <a:prstGeom prst="rect">
@@ -14749,25 +14791,30 @@
             <p:ph type="title"/>
           </p:nvPr>
         </p:nvSpPr>
-        <p:spPr/>
+        <p:spPr>
+          <a:effectLst>
+            <a:outerShdw blurRad="50800" dist="38100" dir="2700000" algn="tl" rotWithShape="0">
+              <a:prstClr val="black">
+                <a:alpha val="40000"/>
+              </a:prstClr>
+            </a:outerShdw>
+          </a:effectLst>
+        </p:spPr>
         <p:txBody>
           <a:bodyPr>
             <a:normAutofit/>
           </a:bodyPr>
           <a:lstStyle/>
           <a:p>
+            <a:pPr algn="ctr"/>
             <a:r>
-              <a:rPr lang="bg-BG" sz="2700" dirty="0"/>
+              <a:rPr lang="bg-BG" sz="2800" dirty="0"/>
               <a:t>Процес на инсталация, конфигурация и деплой на приложението</a:t>
             </a:r>
-            <a:r>
-              <a:rPr lang="bg-BG" dirty="0"/>
-              <a:t/>
-            </a:r>
             <a:br>
-              <a:rPr lang="bg-BG" dirty="0"/>
+              <a:rPr lang="bg-BG" sz="2800" dirty="0"/>
             </a:br>
-            <a:endParaRPr lang="bg-BG" dirty="0"/>
+            <a:endParaRPr lang="bg-BG" sz="2800" dirty="0"/>
           </a:p>
         </p:txBody>
       </p:sp>
@@ -14789,7 +14836,7 @@
         </p:blipFill>
         <p:spPr>
           <a:xfrm>
-            <a:off x="1148287" y="1459346"/>
+            <a:off x="1805610" y="1756526"/>
             <a:ext cx="8577603" cy="4432488"/>
           </a:xfrm>
           <a:prstGeom prst="rect">
@@ -14844,13 +14891,24 @@
             <p:ph type="title"/>
           </p:nvPr>
         </p:nvSpPr>
-        <p:spPr/>
+        <p:spPr>
+          <a:effectLst>
+            <a:outerShdw blurRad="50800" dist="38100" dir="2700000" algn="tl" rotWithShape="0">
+              <a:prstClr val="black">
+                <a:alpha val="40000"/>
+              </a:prstClr>
+            </a:outerShdw>
+          </a:effectLst>
+        </p:spPr>
         <p:txBody>
-          <a:bodyPr/>
+          <a:bodyPr>
+            <a:normAutofit/>
+          </a:bodyPr>
           <a:lstStyle/>
           <a:p>
+            <a:pPr algn="ctr"/>
             <a:r>
-              <a:rPr lang="bg-BG" dirty="0"/>
+              <a:rPr lang="bg-BG" sz="2800" dirty="0"/>
               <a:t>Заключение и изводи</a:t>
             </a:r>
           </a:p>
@@ -14874,7 +14932,7 @@
         </p:blipFill>
         <p:spPr>
           <a:xfrm>
-            <a:off x="99456" y="1782618"/>
+            <a:off x="482249" y="1759758"/>
             <a:ext cx="11224326" cy="3915371"/>
           </a:xfrm>
           <a:prstGeom prst="rect">
